--- a/20225699_MaiVanDang_20252.pptx
+++ b/20225699_MaiVanDang_20252.pptx
@@ -5,25 +5,27 @@
     <p:sldMasterId id="2147483648" r:id="rId4"/>
   </p:sldMasterIdLst>
   <p:notesMasterIdLst>
-    <p:notesMasterId r:id="rId18"/>
+    <p:notesMasterId r:id="rId20"/>
   </p:notesMasterIdLst>
   <p:handoutMasterIdLst>
-    <p:handoutMasterId r:id="rId19"/>
+    <p:handoutMasterId r:id="rId21"/>
   </p:handoutMasterIdLst>
   <p:sldIdLst>
     <p:sldId id="259" r:id="rId5"/>
-    <p:sldId id="256" r:id="rId6"/>
-    <p:sldId id="257" r:id="rId7"/>
-    <p:sldId id="260" r:id="rId8"/>
-    <p:sldId id="261" r:id="rId9"/>
-    <p:sldId id="258" r:id="rId10"/>
-    <p:sldId id="264" r:id="rId11"/>
-    <p:sldId id="263" r:id="rId12"/>
-    <p:sldId id="265" r:id="rId13"/>
-    <p:sldId id="266" r:id="rId14"/>
-    <p:sldId id="267" r:id="rId15"/>
-    <p:sldId id="268" r:id="rId16"/>
-    <p:sldId id="262" r:id="rId17"/>
+    <p:sldId id="257" r:id="rId6"/>
+    <p:sldId id="260" r:id="rId7"/>
+    <p:sldId id="261" r:id="rId8"/>
+    <p:sldId id="258" r:id="rId9"/>
+    <p:sldId id="264" r:id="rId10"/>
+    <p:sldId id="271" r:id="rId11"/>
+    <p:sldId id="270" r:id="rId12"/>
+    <p:sldId id="269" r:id="rId13"/>
+    <p:sldId id="263" r:id="rId14"/>
+    <p:sldId id="265" r:id="rId15"/>
+    <p:sldId id="266" r:id="rId16"/>
+    <p:sldId id="267" r:id="rId17"/>
+    <p:sldId id="268" r:id="rId18"/>
+    <p:sldId id="262" r:id="rId19"/>
   </p:sldIdLst>
   <p:sldSz cx="12192000" cy="6858000"/>
   <p:notesSz cx="6858000" cy="9144000"/>
@@ -4509,10 +4511,60 @@
       </p:grpSpPr>
       <p:sp>
         <p:nvSpPr>
-          <p:cNvPr id="2" name="Slide Number Placeholder 1">
-            <a:extLst>
-              <a:ext uri="{FF2B5EF4-FFF2-40B4-BE49-F238E27FC236}">
-                <a16:creationId xmlns:a16="http://schemas.microsoft.com/office/drawing/2014/main" id="{3F787B8F-671E-899B-3B95-4CCE696DE9CF}"/>
+          <p:cNvPr id="2" name="Content Placeholder 1">
+            <a:extLst>
+              <a:ext uri="{FF2B5EF4-FFF2-40B4-BE49-F238E27FC236}">
+                <a16:creationId xmlns:a16="http://schemas.microsoft.com/office/drawing/2014/main" id="{5308E1B1-D9CD-415A-BCE5-B57F39B2F31D}"/>
+              </a:ext>
+            </a:extLst>
+          </p:cNvPr>
+          <p:cNvSpPr>
+            <a:spLocks noGrp="1"/>
+          </p:cNvSpPr>
+          <p:nvPr>
+            <p:ph sz="quarter" idx="13"/>
+          </p:nvPr>
+        </p:nvSpPr>
+        <p:spPr/>
+        <p:txBody>
+          <a:bodyPr/>
+          <a:lstStyle/>
+          <a:p>
+            <a:endParaRPr lang="en-US"/>
+          </a:p>
+        </p:txBody>
+      </p:sp>
+      <p:sp>
+        <p:nvSpPr>
+          <p:cNvPr id="3" name="Title 2">
+            <a:extLst>
+              <a:ext uri="{FF2B5EF4-FFF2-40B4-BE49-F238E27FC236}">
+                <a16:creationId xmlns:a16="http://schemas.microsoft.com/office/drawing/2014/main" id="{AD6941D0-D074-43AE-8875-C4BDC98ADB7F}"/>
+              </a:ext>
+            </a:extLst>
+          </p:cNvPr>
+          <p:cNvSpPr>
+            <a:spLocks noGrp="1"/>
+          </p:cNvSpPr>
+          <p:nvPr>
+            <p:ph type="title"/>
+          </p:nvPr>
+        </p:nvSpPr>
+        <p:spPr/>
+        <p:txBody>
+          <a:bodyPr/>
+          <a:lstStyle/>
+          <a:p>
+            <a:endParaRPr lang="en-US"/>
+          </a:p>
+        </p:txBody>
+      </p:sp>
+      <p:sp>
+        <p:nvSpPr>
+          <p:cNvPr id="4" name="Slide Number Placeholder 3">
+            <a:extLst>
+              <a:ext uri="{FF2B5EF4-FFF2-40B4-BE49-F238E27FC236}">
+                <a16:creationId xmlns:a16="http://schemas.microsoft.com/office/drawing/2014/main" id="{BD91CA00-8B5A-4B5F-AE21-CF0691D64D53}"/>
               </a:ext>
             </a:extLst>
           </p:cNvPr>
@@ -4537,71 +4589,10 @@
           </a:p>
         </p:txBody>
       </p:sp>
-      <p:sp>
-        <p:nvSpPr>
-          <p:cNvPr id="3" name="Title 2">
-            <a:extLst>
-              <a:ext uri="{FF2B5EF4-FFF2-40B4-BE49-F238E27FC236}">
-                <a16:creationId xmlns:a16="http://schemas.microsoft.com/office/drawing/2014/main" id="{57BA6010-86B5-CA9E-6538-49958090D5E1}"/>
-              </a:ext>
-            </a:extLst>
-          </p:cNvPr>
-          <p:cNvSpPr>
-            <a:spLocks noGrp="1"/>
-          </p:cNvSpPr>
-          <p:nvPr>
-            <p:ph type="title"/>
-          </p:nvPr>
-        </p:nvSpPr>
-        <p:spPr/>
-        <p:txBody>
-          <a:bodyPr/>
-          <a:lstStyle/>
-          <a:p>
-            <a:endParaRPr lang="en-US"/>
-          </a:p>
-        </p:txBody>
-      </p:sp>
-      <p:sp>
-        <p:nvSpPr>
-          <p:cNvPr id="4" name="Chart Placeholder 3">
-            <a:extLst>
-              <a:ext uri="{FF2B5EF4-FFF2-40B4-BE49-F238E27FC236}">
-                <a16:creationId xmlns:a16="http://schemas.microsoft.com/office/drawing/2014/main" id="{C8E2D656-4DFD-D837-76D3-A143B0106EB5}"/>
-              </a:ext>
-            </a:extLst>
-          </p:cNvPr>
-          <p:cNvSpPr>
-            <a:spLocks noGrp="1"/>
-          </p:cNvSpPr>
-          <p:nvPr>
-            <p:ph type="chart" sz="quarter" idx="13"/>
-          </p:nvPr>
-        </p:nvSpPr>
-        <p:spPr/>
-      </p:sp>
-      <p:sp>
-        <p:nvSpPr>
-          <p:cNvPr id="5" name="Picture Placeholder 4">
-            <a:extLst>
-              <a:ext uri="{FF2B5EF4-FFF2-40B4-BE49-F238E27FC236}">
-                <a16:creationId xmlns:a16="http://schemas.microsoft.com/office/drawing/2014/main" id="{9CBAF409-B126-D20D-BE76-1D4AFBEB4A86}"/>
-              </a:ext>
-            </a:extLst>
-          </p:cNvPr>
-          <p:cNvSpPr>
-            <a:spLocks noGrp="1"/>
-          </p:cNvSpPr>
-          <p:nvPr>
-            <p:ph type="pic" sz="quarter" idx="14"/>
-          </p:nvPr>
-        </p:nvSpPr>
-        <p:spPr/>
-      </p:sp>
     </p:spTree>
     <p:extLst>
       <p:ext uri="{BB962C8B-B14F-4D97-AF65-F5344CB8AC3E}">
-        <p14:creationId xmlns:p14="http://schemas.microsoft.com/office/powerpoint/2010/main" val="428433212"/>
+        <p14:creationId xmlns:p14="http://schemas.microsoft.com/office/powerpoint/2010/main" val="485500544"/>
       </p:ext>
     </p:extLst>
   </p:cSld>
@@ -4633,7 +4624,7 @@
           <p:cNvPr id="2" name="Title 1">
             <a:extLst>
               <a:ext uri="{FF2B5EF4-FFF2-40B4-BE49-F238E27FC236}">
-                <a16:creationId xmlns:a16="http://schemas.microsoft.com/office/drawing/2014/main" id="{56EBCDCA-26D1-DE31-7955-F13FF981A1DC}"/>
+                <a16:creationId xmlns:a16="http://schemas.microsoft.com/office/drawing/2014/main" id="{7BC5AD8A-1EA9-C7CE-D797-0A3D974FB867}"/>
               </a:ext>
             </a:extLst>
           </p:cNvPr>
@@ -4658,7 +4649,7 @@
           <p:cNvPr id="3" name="Text Placeholder 2">
             <a:extLst>
               <a:ext uri="{FF2B5EF4-FFF2-40B4-BE49-F238E27FC236}">
-                <a16:creationId xmlns:a16="http://schemas.microsoft.com/office/drawing/2014/main" id="{ED744802-0381-50A3-7C85-B7B6ED4EFE1B}"/>
+                <a16:creationId xmlns:a16="http://schemas.microsoft.com/office/drawing/2014/main" id="{734CFAC5-863F-C743-EE8D-B9564CC43E47}"/>
               </a:ext>
             </a:extLst>
           </p:cNvPr>
@@ -4683,7 +4674,7 @@
           <p:cNvPr id="4" name="Slide Number Placeholder 3">
             <a:extLst>
               <a:ext uri="{FF2B5EF4-FFF2-40B4-BE49-F238E27FC236}">
-                <a16:creationId xmlns:a16="http://schemas.microsoft.com/office/drawing/2014/main" id="{F830FB4F-C0E4-5A49-AA97-BCAA527E88FD}"/>
+                <a16:creationId xmlns:a16="http://schemas.microsoft.com/office/drawing/2014/main" id="{F8DD1CE8-660D-F65D-7BA2-062181F1E9B0}"/>
               </a:ext>
             </a:extLst>
           </p:cNvPr>
@@ -4711,7 +4702,7 @@
     </p:spTree>
     <p:extLst>
       <p:ext uri="{BB962C8B-B14F-4D97-AF65-F5344CB8AC3E}">
-        <p14:creationId xmlns:p14="http://schemas.microsoft.com/office/powerpoint/2010/main" val="3001568464"/>
+        <p14:creationId xmlns:p14="http://schemas.microsoft.com/office/powerpoint/2010/main" val="3092516354"/>
       </p:ext>
     </p:extLst>
   </p:cSld>
@@ -4743,7 +4734,7 @@
           <p:cNvPr id="2" name="Slide Number Placeholder 1">
             <a:extLst>
               <a:ext uri="{FF2B5EF4-FFF2-40B4-BE49-F238E27FC236}">
-                <a16:creationId xmlns:a16="http://schemas.microsoft.com/office/drawing/2014/main" id="{4E248DCA-B91F-BC5A-64CE-246CF3581AEB}"/>
+                <a16:creationId xmlns:a16="http://schemas.microsoft.com/office/drawing/2014/main" id="{3F787B8F-671E-899B-3B95-4CCE696DE9CF}"/>
               </a:ext>
             </a:extLst>
           </p:cNvPr>
@@ -4773,7 +4764,7 @@
           <p:cNvPr id="3" name="Title 2">
             <a:extLst>
               <a:ext uri="{FF2B5EF4-FFF2-40B4-BE49-F238E27FC236}">
-                <a16:creationId xmlns:a16="http://schemas.microsoft.com/office/drawing/2014/main" id="{D4A308EB-C22C-0699-31DF-5588F4DDA75F}"/>
+                <a16:creationId xmlns:a16="http://schemas.microsoft.com/office/drawing/2014/main" id="{57BA6010-86B5-CA9E-6538-49958090D5E1}"/>
               </a:ext>
             </a:extLst>
           </p:cNvPr>
@@ -4798,7 +4789,7 @@
           <p:cNvPr id="4" name="Chart Placeholder 3">
             <a:extLst>
               <a:ext uri="{FF2B5EF4-FFF2-40B4-BE49-F238E27FC236}">
-                <a16:creationId xmlns:a16="http://schemas.microsoft.com/office/drawing/2014/main" id="{99678272-23D5-2910-516A-D7EDB6A7FE52}"/>
+                <a16:creationId xmlns:a16="http://schemas.microsoft.com/office/drawing/2014/main" id="{C8E2D656-4DFD-D837-76D3-A143B0106EB5}"/>
               </a:ext>
             </a:extLst>
           </p:cNvPr>
@@ -4810,13 +4801,20 @@
           </p:nvPr>
         </p:nvSpPr>
         <p:spPr/>
+        <p:txBody>
+          <a:bodyPr/>
+          <a:lstStyle/>
+          <a:p>
+            <a:endParaRPr lang="vi-VN"/>
+          </a:p>
+        </p:txBody>
       </p:sp>
       <p:sp>
         <p:nvSpPr>
           <p:cNvPr id="5" name="Picture Placeholder 4">
             <a:extLst>
               <a:ext uri="{FF2B5EF4-FFF2-40B4-BE49-F238E27FC236}">
-                <a16:creationId xmlns:a16="http://schemas.microsoft.com/office/drawing/2014/main" id="{30E00C4E-0536-65FC-3882-BD908064E9B3}"/>
+                <a16:creationId xmlns:a16="http://schemas.microsoft.com/office/drawing/2014/main" id="{9CBAF409-B126-D20D-BE76-1D4AFBEB4A86}"/>
               </a:ext>
             </a:extLst>
           </p:cNvPr>
@@ -4828,11 +4826,18 @@
           </p:nvPr>
         </p:nvSpPr>
         <p:spPr/>
+        <p:txBody>
+          <a:bodyPr/>
+          <a:lstStyle/>
+          <a:p>
+            <a:endParaRPr lang="vi-VN"/>
+          </a:p>
+        </p:txBody>
       </p:sp>
     </p:spTree>
     <p:extLst>
       <p:ext uri="{BB962C8B-B14F-4D97-AF65-F5344CB8AC3E}">
-        <p14:creationId xmlns:p14="http://schemas.microsoft.com/office/powerpoint/2010/main" val="3594598399"/>
+        <p14:creationId xmlns:p14="http://schemas.microsoft.com/office/powerpoint/2010/main" val="428433212"/>
       </p:ext>
     </p:extLst>
   </p:cSld>
@@ -4861,6 +4866,251 @@
       </p:grpSpPr>
       <p:sp>
         <p:nvSpPr>
+          <p:cNvPr id="2" name="Title 1">
+            <a:extLst>
+              <a:ext uri="{FF2B5EF4-FFF2-40B4-BE49-F238E27FC236}">
+                <a16:creationId xmlns:a16="http://schemas.microsoft.com/office/drawing/2014/main" id="{56EBCDCA-26D1-DE31-7955-F13FF981A1DC}"/>
+              </a:ext>
+            </a:extLst>
+          </p:cNvPr>
+          <p:cNvSpPr>
+            <a:spLocks noGrp="1"/>
+          </p:cNvSpPr>
+          <p:nvPr>
+            <p:ph type="title"/>
+          </p:nvPr>
+        </p:nvSpPr>
+        <p:spPr/>
+        <p:txBody>
+          <a:bodyPr/>
+          <a:lstStyle/>
+          <a:p>
+            <a:endParaRPr lang="en-US"/>
+          </a:p>
+        </p:txBody>
+      </p:sp>
+      <p:sp>
+        <p:nvSpPr>
+          <p:cNvPr id="3" name="Text Placeholder 2">
+            <a:extLst>
+              <a:ext uri="{FF2B5EF4-FFF2-40B4-BE49-F238E27FC236}">
+                <a16:creationId xmlns:a16="http://schemas.microsoft.com/office/drawing/2014/main" id="{ED744802-0381-50A3-7C85-B7B6ED4EFE1B}"/>
+              </a:ext>
+            </a:extLst>
+          </p:cNvPr>
+          <p:cNvSpPr>
+            <a:spLocks noGrp="1"/>
+          </p:cNvSpPr>
+          <p:nvPr>
+            <p:ph type="body" sz="quarter" idx="13"/>
+          </p:nvPr>
+        </p:nvSpPr>
+        <p:spPr/>
+        <p:txBody>
+          <a:bodyPr/>
+          <a:lstStyle/>
+          <a:p>
+            <a:endParaRPr lang="en-US"/>
+          </a:p>
+        </p:txBody>
+      </p:sp>
+      <p:sp>
+        <p:nvSpPr>
+          <p:cNvPr id="4" name="Slide Number Placeholder 3">
+            <a:extLst>
+              <a:ext uri="{FF2B5EF4-FFF2-40B4-BE49-F238E27FC236}">
+                <a16:creationId xmlns:a16="http://schemas.microsoft.com/office/drawing/2014/main" id="{F830FB4F-C0E4-5A49-AA97-BCAA527E88FD}"/>
+              </a:ext>
+            </a:extLst>
+          </p:cNvPr>
+          <p:cNvSpPr>
+            <a:spLocks noGrp="1"/>
+          </p:cNvSpPr>
+          <p:nvPr>
+            <p:ph type="sldNum" sz="quarter" idx="12"/>
+          </p:nvPr>
+        </p:nvSpPr>
+        <p:spPr/>
+        <p:txBody>
+          <a:bodyPr/>
+          <a:lstStyle/>
+          <a:p>
+            <a:fld id="{9EA0BE3B-158A-4EDF-80DC-E394A0D1600F}" type="slidenum">
+              <a:rPr lang="en-US" smtClean="0"/>
+              <a:pPr/>
+              <a:t>13</a:t>
+            </a:fld>
+            <a:endParaRPr lang="en-US"/>
+          </a:p>
+        </p:txBody>
+      </p:sp>
+    </p:spTree>
+    <p:extLst>
+      <p:ext uri="{BB962C8B-B14F-4D97-AF65-F5344CB8AC3E}">
+        <p14:creationId xmlns:p14="http://schemas.microsoft.com/office/powerpoint/2010/main" val="3001568464"/>
+      </p:ext>
+    </p:extLst>
+  </p:cSld>
+  <p:clrMapOvr>
+    <a:masterClrMapping/>
+  </p:clrMapOvr>
+</p:sld>
+</file>
+
+<file path=ppt/slides/slide14.xml><?xml version="1.0" encoding="utf-8"?>
+<p:sld xmlns:a="http://schemas.openxmlformats.org/drawingml/2006/main" xmlns:r="http://schemas.openxmlformats.org/officeDocument/2006/relationships" xmlns:p="http://schemas.openxmlformats.org/presentationml/2006/main">
+  <p:cSld>
+    <p:spTree>
+      <p:nvGrpSpPr>
+        <p:cNvPr id="1" name=""/>
+        <p:cNvGrpSpPr/>
+        <p:nvPr/>
+      </p:nvGrpSpPr>
+      <p:grpSpPr>
+        <a:xfrm>
+          <a:off x="0" y="0"/>
+          <a:ext cx="0" cy="0"/>
+          <a:chOff x="0" y="0"/>
+          <a:chExt cx="0" cy="0"/>
+        </a:xfrm>
+      </p:grpSpPr>
+      <p:sp>
+        <p:nvSpPr>
+          <p:cNvPr id="2" name="Slide Number Placeholder 1">
+            <a:extLst>
+              <a:ext uri="{FF2B5EF4-FFF2-40B4-BE49-F238E27FC236}">
+                <a16:creationId xmlns:a16="http://schemas.microsoft.com/office/drawing/2014/main" id="{4E248DCA-B91F-BC5A-64CE-246CF3581AEB}"/>
+              </a:ext>
+            </a:extLst>
+          </p:cNvPr>
+          <p:cNvSpPr>
+            <a:spLocks noGrp="1"/>
+          </p:cNvSpPr>
+          <p:nvPr>
+            <p:ph type="sldNum" sz="quarter" idx="12"/>
+          </p:nvPr>
+        </p:nvSpPr>
+        <p:spPr/>
+        <p:txBody>
+          <a:bodyPr/>
+          <a:lstStyle/>
+          <a:p>
+            <a:fld id="{9EA0BE3B-158A-4EDF-80DC-E394A0D1600F}" type="slidenum">
+              <a:rPr lang="en-US" smtClean="0"/>
+              <a:pPr/>
+              <a:t>14</a:t>
+            </a:fld>
+            <a:endParaRPr lang="en-US"/>
+          </a:p>
+        </p:txBody>
+      </p:sp>
+      <p:sp>
+        <p:nvSpPr>
+          <p:cNvPr id="3" name="Title 2">
+            <a:extLst>
+              <a:ext uri="{FF2B5EF4-FFF2-40B4-BE49-F238E27FC236}">
+                <a16:creationId xmlns:a16="http://schemas.microsoft.com/office/drawing/2014/main" id="{D4A308EB-C22C-0699-31DF-5588F4DDA75F}"/>
+              </a:ext>
+            </a:extLst>
+          </p:cNvPr>
+          <p:cNvSpPr>
+            <a:spLocks noGrp="1"/>
+          </p:cNvSpPr>
+          <p:nvPr>
+            <p:ph type="title"/>
+          </p:nvPr>
+        </p:nvSpPr>
+        <p:spPr/>
+        <p:txBody>
+          <a:bodyPr/>
+          <a:lstStyle/>
+          <a:p>
+            <a:endParaRPr lang="en-US"/>
+          </a:p>
+        </p:txBody>
+      </p:sp>
+      <p:sp>
+        <p:nvSpPr>
+          <p:cNvPr id="4" name="Chart Placeholder 3">
+            <a:extLst>
+              <a:ext uri="{FF2B5EF4-FFF2-40B4-BE49-F238E27FC236}">
+                <a16:creationId xmlns:a16="http://schemas.microsoft.com/office/drawing/2014/main" id="{99678272-23D5-2910-516A-D7EDB6A7FE52}"/>
+              </a:ext>
+            </a:extLst>
+          </p:cNvPr>
+          <p:cNvSpPr>
+            <a:spLocks noGrp="1"/>
+          </p:cNvSpPr>
+          <p:nvPr>
+            <p:ph type="chart" sz="quarter" idx="13"/>
+          </p:nvPr>
+        </p:nvSpPr>
+        <p:spPr/>
+        <p:txBody>
+          <a:bodyPr/>
+          <a:lstStyle/>
+          <a:p>
+            <a:endParaRPr lang="vi-VN"/>
+          </a:p>
+        </p:txBody>
+      </p:sp>
+      <p:sp>
+        <p:nvSpPr>
+          <p:cNvPr id="5" name="Picture Placeholder 4">
+            <a:extLst>
+              <a:ext uri="{FF2B5EF4-FFF2-40B4-BE49-F238E27FC236}">
+                <a16:creationId xmlns:a16="http://schemas.microsoft.com/office/drawing/2014/main" id="{30E00C4E-0536-65FC-3882-BD908064E9B3}"/>
+              </a:ext>
+            </a:extLst>
+          </p:cNvPr>
+          <p:cNvSpPr>
+            <a:spLocks noGrp="1"/>
+          </p:cNvSpPr>
+          <p:nvPr>
+            <p:ph type="pic" sz="quarter" idx="14"/>
+          </p:nvPr>
+        </p:nvSpPr>
+        <p:spPr/>
+        <p:txBody>
+          <a:bodyPr/>
+          <a:lstStyle/>
+          <a:p>
+            <a:endParaRPr lang="vi-VN"/>
+          </a:p>
+        </p:txBody>
+      </p:sp>
+    </p:spTree>
+    <p:extLst>
+      <p:ext uri="{BB962C8B-B14F-4D97-AF65-F5344CB8AC3E}">
+        <p14:creationId xmlns:p14="http://schemas.microsoft.com/office/powerpoint/2010/main" val="3594598399"/>
+      </p:ext>
+    </p:extLst>
+  </p:cSld>
+  <p:clrMapOvr>
+    <a:masterClrMapping/>
+  </p:clrMapOvr>
+</p:sld>
+</file>
+
+<file path=ppt/slides/slide15.xml><?xml version="1.0" encoding="utf-8"?>
+<p:sld xmlns:a="http://schemas.openxmlformats.org/drawingml/2006/main" xmlns:r="http://schemas.openxmlformats.org/officeDocument/2006/relationships" xmlns:p="http://schemas.openxmlformats.org/presentationml/2006/main">
+  <p:cSld>
+    <p:spTree>
+      <p:nvGrpSpPr>
+        <p:cNvPr id="1" name=""/>
+        <p:cNvGrpSpPr/>
+        <p:nvPr/>
+      </p:nvGrpSpPr>
+      <p:grpSpPr>
+        <a:xfrm>
+          <a:off x="0" y="0"/>
+          <a:ext cx="0" cy="0"/>
+          <a:chOff x="0" y="0"/>
+          <a:chExt cx="0" cy="0"/>
+        </a:xfrm>
+      </p:grpSpPr>
+      <p:sp>
+        <p:nvSpPr>
           <p:cNvPr id="2" name="Title 6">
             <a:extLst>
               <a:ext uri="{FF2B5EF4-FFF2-40B4-BE49-F238E27FC236}">
@@ -4935,7 +5185,7 @@
             <a:fld id="{9EA0BE3B-158A-4EDF-80DC-E394A0D1600F}" type="slidenum">
               <a:rPr lang="en-US" smtClean="0"/>
               <a:pPr/>
-              <a:t>13</a:t>
+              <a:t>15</a:t>
             </a:fld>
             <a:endParaRPr lang="en-US"/>
           </a:p>
@@ -4971,40 +5221,299 @@
           <a:chExt cx="0" cy="0"/>
         </a:xfrm>
       </p:grpSpPr>
-      <p:sp>
-        <p:nvSpPr>
-          <p:cNvPr id="4" name="Title 1">
-            <a:extLst>
-              <a:ext uri="{FF2B5EF4-FFF2-40B4-BE49-F238E27FC236}">
-                <a16:creationId xmlns:a16="http://schemas.microsoft.com/office/drawing/2014/main" id="{5642BA63-383F-45B9-939A-7A3B792A60C4}"/>
-              </a:ext>
-            </a:extLst>
-          </p:cNvPr>
-          <p:cNvSpPr>
-            <a:spLocks noGrp="1"/>
-          </p:cNvSpPr>
-          <p:nvPr>
-            <p:ph type="title"/>
-          </p:nvPr>
-        </p:nvSpPr>
-        <p:spPr>
-          <a:xfrm>
-            <a:off x="3788898" y="2461846"/>
-            <a:ext cx="4614203" cy="1934307"/>
-          </a:xfrm>
-        </p:spPr>
+      <p:pic>
+        <p:nvPicPr>
+          <p:cNvPr id="2" name="Picture 3">
+            <a:extLst>
+              <a:ext uri="{FF2B5EF4-FFF2-40B4-BE49-F238E27FC236}">
+                <a16:creationId xmlns:a16="http://schemas.microsoft.com/office/drawing/2014/main" id="{737FC17F-78B9-4DA3-B1E3-B6651CB17456}"/>
+              </a:ext>
+            </a:extLst>
+          </p:cNvPr>
+          <p:cNvPicPr>
+            <a:picLocks noChangeAspect="1"/>
+          </p:cNvPicPr>
+          <p:nvPr/>
+        </p:nvPicPr>
+        <p:blipFill>
+          <a:blip r:embed="rId2">
+            <a:extLst>
+              <a:ext uri="{28A0092B-C50C-407E-A947-70E740481C1C}">
+                <a14:useLocalDpi xmlns:a14="http://schemas.microsoft.com/office/drawing/2010/main" val="0"/>
+              </a:ext>
+            </a:extLst>
+          </a:blip>
+          <a:srcRect/>
+          <a:stretch/>
+        </p:blipFill>
+        <p:spPr>
+          <a:xfrm>
+            <a:off x="438005" y="322818"/>
+            <a:ext cx="3174367" cy="952975"/>
+          </a:xfrm>
+          <a:prstGeom prst="rect">
+            <a:avLst/>
+          </a:prstGeom>
+        </p:spPr>
+      </p:pic>
+      <p:sp>
+        <p:nvSpPr>
+          <p:cNvPr id="3" name="Title 6">
+            <a:extLst>
+              <a:ext uri="{FF2B5EF4-FFF2-40B4-BE49-F238E27FC236}">
+                <a16:creationId xmlns:a16="http://schemas.microsoft.com/office/drawing/2014/main" id="{5702E00C-3125-4CD1-A5F8-64723BF48E3E}"/>
+              </a:ext>
+            </a:extLst>
+          </p:cNvPr>
+          <p:cNvSpPr txBox="1">
+            <a:spLocks/>
+          </p:cNvSpPr>
+          <p:nvPr/>
+        </p:nvSpPr>
+        <p:spPr>
+          <a:xfrm>
+            <a:off x="386634" y="2219413"/>
+            <a:ext cx="7342482" cy="848792"/>
+          </a:xfrm>
+          <a:prstGeom prst="rect">
+            <a:avLst/>
+          </a:prstGeom>
+        </p:spPr>
+        <p:txBody>
+          <a:bodyPr lIns="91440" tIns="45720" rIns="91440" bIns="45720" anchor="t"/>
+          <a:lstStyle>
+            <a:lvl1pPr algn="l" defTabSz="914400" rtl="0" eaLnBrk="1" latinLnBrk="0" hangingPunct="1">
+              <a:lnSpc>
+                <a:spcPct val="90000"/>
+              </a:lnSpc>
+              <a:spcBef>
+                <a:spcPct val="0"/>
+              </a:spcBef>
+              <a:buNone/>
+              <a:defRPr sz="5400" b="1" kern="1200">
+                <a:solidFill>
+                  <a:srgbClr val="C00000"/>
+                </a:solidFill>
+                <a:latin typeface="Lato" panose="020F0502020204030203" pitchFamily="34" charset="0"/>
+                <a:ea typeface="Lato" panose="020F0502020204030203" pitchFamily="34" charset="0"/>
+                <a:cs typeface="Lato" panose="020F0502020204030203" pitchFamily="34" charset="0"/>
+              </a:defRPr>
+            </a:lvl1pPr>
+          </a:lstStyle>
+          <a:p>
+            <a:endParaRPr lang="en-US" dirty="0"/>
+          </a:p>
+        </p:txBody>
+      </p:sp>
+      <p:sp>
+        <p:nvSpPr>
+          <p:cNvPr id="4" name="Title 6">
+            <a:extLst>
+              <a:ext uri="{FF2B5EF4-FFF2-40B4-BE49-F238E27FC236}">
+                <a16:creationId xmlns:a16="http://schemas.microsoft.com/office/drawing/2014/main" id="{72BF49D9-2FCE-4950-8B1C-F580CC18F4C9}"/>
+              </a:ext>
+            </a:extLst>
+          </p:cNvPr>
+          <p:cNvSpPr txBox="1">
+            <a:spLocks/>
+          </p:cNvSpPr>
+          <p:nvPr/>
+        </p:nvSpPr>
+        <p:spPr>
+          <a:xfrm>
+            <a:off x="386634" y="3884623"/>
+            <a:ext cx="10613875" cy="848793"/>
+          </a:xfrm>
+          <a:prstGeom prst="rect">
+            <a:avLst/>
+          </a:prstGeom>
+        </p:spPr>
+        <p:txBody>
+          <a:bodyPr lIns="91440" tIns="45720" rIns="91440" bIns="45720" anchor="t"/>
+          <a:lstStyle>
+            <a:lvl1pPr algn="l" defTabSz="914400" rtl="0" eaLnBrk="1" latinLnBrk="0" hangingPunct="1">
+              <a:lnSpc>
+                <a:spcPct val="90000"/>
+              </a:lnSpc>
+              <a:spcBef>
+                <a:spcPct val="0"/>
+              </a:spcBef>
+              <a:buNone/>
+              <a:defRPr sz="5400" b="1" kern="1200">
+                <a:solidFill>
+                  <a:srgbClr val="C00000"/>
+                </a:solidFill>
+                <a:latin typeface="Lato" panose="020F0502020204030203" pitchFamily="34" charset="0"/>
+                <a:ea typeface="Lato" panose="020F0502020204030203" pitchFamily="34" charset="0"/>
+                <a:cs typeface="Lato" panose="020F0502020204030203" pitchFamily="34" charset="0"/>
+              </a:defRPr>
+            </a:lvl1pPr>
+          </a:lstStyle>
+          <a:p>
+            <a:endParaRPr lang="en-US" sz="2800" b="0" dirty="0">
+              <a:solidFill>
+                <a:schemeClr val="tx1"/>
+              </a:solidFill>
+            </a:endParaRPr>
+          </a:p>
+        </p:txBody>
+      </p:sp>
+      <p:sp>
+        <p:nvSpPr>
+          <p:cNvPr id="9" name="Slide Number Placeholder 8">
+            <a:extLst>
+              <a:ext uri="{FF2B5EF4-FFF2-40B4-BE49-F238E27FC236}">
+                <a16:creationId xmlns:a16="http://schemas.microsoft.com/office/drawing/2014/main" id="{99BF4829-01AB-4F75-A03B-DF4FC4C312C6}"/>
+              </a:ext>
+            </a:extLst>
+          </p:cNvPr>
+          <p:cNvSpPr>
+            <a:spLocks noGrp="1"/>
+          </p:cNvSpPr>
+          <p:nvPr>
+            <p:ph type="sldNum" sz="quarter" idx="12"/>
+          </p:nvPr>
+        </p:nvSpPr>
+        <p:spPr/>
         <p:txBody>
           <a:bodyPr/>
           <a:lstStyle/>
           <a:p>
+            <a:fld id="{9EA0BE3B-158A-4EDF-80DC-E394A0D1600F}" type="slidenum">
+              <a:rPr lang="en-US" smtClean="0"/>
+              <a:pPr/>
+              <a:t>2</a:t>
+            </a:fld>
             <a:endParaRPr lang="en-US"/>
+          </a:p>
+        </p:txBody>
+      </p:sp>
+      <p:sp>
+        <p:nvSpPr>
+          <p:cNvPr id="5" name="Hộp Văn bản 4">
+            <a:extLst>
+              <a:ext uri="{FF2B5EF4-FFF2-40B4-BE49-F238E27FC236}">
+                <a16:creationId xmlns:a16="http://schemas.microsoft.com/office/drawing/2014/main" id="{6AB5E1FB-AFEB-2850-B1CC-75C8CAE43395}"/>
+              </a:ext>
+            </a:extLst>
+          </p:cNvPr>
+          <p:cNvSpPr txBox="1"/>
+          <p:nvPr/>
+        </p:nvSpPr>
+        <p:spPr>
+          <a:xfrm>
+            <a:off x="438005" y="1727693"/>
+            <a:ext cx="9310095" cy="2062103"/>
+          </a:xfrm>
+          <a:prstGeom prst="rect">
+            <a:avLst/>
+          </a:prstGeom>
+          <a:noFill/>
+        </p:spPr>
+        <p:txBody>
+          <a:bodyPr wrap="square" rtlCol="0">
+            <a:spAutoFit/>
+          </a:bodyPr>
+          <a:lstStyle/>
+          <a:p>
+            <a:r>
+              <a:rPr lang="vi-VN" sz="3200" b="1">
+                <a:solidFill>
+                  <a:srgbClr val="C00000"/>
+                </a:solidFill>
+              </a:rPr>
+              <a:t>PHÁT TRIỂN HỆ THỐNG NHẬN DIỆN NGƯỜI DÙNG QUA HÀNH VI SỬ DỤNG ĐIỆN THOẠI VỚI CƠ CHẾ XÁC THỰC DỰ PHÒNG BẰNG CỬ CHỈ CHUYỂN ĐỘNG</a:t>
+            </a:r>
+            <a:endParaRPr lang="vi-VN" sz="3200">
+              <a:solidFill>
+                <a:srgbClr val="C00000"/>
+              </a:solidFill>
+            </a:endParaRPr>
+          </a:p>
+        </p:txBody>
+      </p:sp>
+      <p:sp>
+        <p:nvSpPr>
+          <p:cNvPr id="6" name="Hộp Văn bản 5">
+            <a:extLst>
+              <a:ext uri="{FF2B5EF4-FFF2-40B4-BE49-F238E27FC236}">
+                <a16:creationId xmlns:a16="http://schemas.microsoft.com/office/drawing/2014/main" id="{E3A84007-AAA8-4538-B911-EC1DD55BB5F0}"/>
+              </a:ext>
+            </a:extLst>
+          </p:cNvPr>
+          <p:cNvSpPr txBox="1"/>
+          <p:nvPr/>
+        </p:nvSpPr>
+        <p:spPr>
+          <a:xfrm>
+            <a:off x="386634" y="3996036"/>
+            <a:ext cx="4386137" cy="523220"/>
+          </a:xfrm>
+          <a:prstGeom prst="rect">
+            <a:avLst/>
+          </a:prstGeom>
+          <a:noFill/>
+        </p:spPr>
+        <p:txBody>
+          <a:bodyPr wrap="none" rtlCol="0">
+            <a:spAutoFit/>
+          </a:bodyPr>
+          <a:lstStyle/>
+          <a:p>
+            <a:r>
+              <a:rPr lang="vi-VN" sz="2800">
+                <a:solidFill>
+                  <a:srgbClr val="C00000"/>
+                </a:solidFill>
+              </a:rPr>
+              <a:t>Mai Văn Đăng - 20225699</a:t>
+            </a:r>
+          </a:p>
+        </p:txBody>
+      </p:sp>
+      <p:sp>
+        <p:nvSpPr>
+          <p:cNvPr id="7" name="Hộp Văn bản 6">
+            <a:extLst>
+              <a:ext uri="{FF2B5EF4-FFF2-40B4-BE49-F238E27FC236}">
+                <a16:creationId xmlns:a16="http://schemas.microsoft.com/office/drawing/2014/main" id="{320CEA0A-A3BE-2049-495B-C78774C2BECD}"/>
+              </a:ext>
+            </a:extLst>
+          </p:cNvPr>
+          <p:cNvSpPr txBox="1"/>
+          <p:nvPr/>
+        </p:nvSpPr>
+        <p:spPr>
+          <a:xfrm>
+            <a:off x="386634" y="4828315"/>
+            <a:ext cx="6014788" cy="523220"/>
+          </a:xfrm>
+          <a:prstGeom prst="rect">
+            <a:avLst/>
+          </a:prstGeom>
+          <a:noFill/>
+        </p:spPr>
+        <p:txBody>
+          <a:bodyPr wrap="none" rtlCol="0">
+            <a:spAutoFit/>
+          </a:bodyPr>
+          <a:lstStyle/>
+          <a:p>
+            <a:r>
+              <a:rPr lang="vi-VN" sz="2800">
+                <a:solidFill>
+                  <a:srgbClr val="C00000"/>
+                </a:solidFill>
+              </a:rPr>
+              <a:t>GVHD: PGS.TS. Nguyễn Linh Giang</a:t>
+            </a:r>
           </a:p>
         </p:txBody>
       </p:sp>
     </p:spTree>
     <p:extLst>
       <p:ext uri="{BB962C8B-B14F-4D97-AF65-F5344CB8AC3E}">
-        <p14:creationId xmlns:p14="http://schemas.microsoft.com/office/powerpoint/2010/main" val="1234004128"/>
+        <p14:creationId xmlns:p14="http://schemas.microsoft.com/office/powerpoint/2010/main" val="743172911"/>
       </p:ext>
     </p:extLst>
   </p:cSld>
@@ -5031,149 +5540,138 @@
           <a:chExt cx="0" cy="0"/>
         </a:xfrm>
       </p:grpSpPr>
-      <p:pic>
-        <p:nvPicPr>
-          <p:cNvPr id="2" name="Picture 3">
-            <a:extLst>
-              <a:ext uri="{FF2B5EF4-FFF2-40B4-BE49-F238E27FC236}">
-                <a16:creationId xmlns:a16="http://schemas.microsoft.com/office/drawing/2014/main" id="{737FC17F-78B9-4DA3-B1E3-B6651CB17456}"/>
-              </a:ext>
-            </a:extLst>
-          </p:cNvPr>
-          <p:cNvPicPr>
-            <a:picLocks noChangeAspect="1"/>
-          </p:cNvPicPr>
-          <p:nvPr/>
-        </p:nvPicPr>
-        <p:blipFill>
-          <a:blip r:embed="rId2">
-            <a:extLst>
-              <a:ext uri="{28A0092B-C50C-407E-A947-70E740481C1C}">
-                <a14:useLocalDpi xmlns:a14="http://schemas.microsoft.com/office/drawing/2010/main" val="0"/>
-              </a:ext>
-            </a:extLst>
-          </a:blip>
-          <a:srcRect/>
-          <a:stretch/>
-        </p:blipFill>
-        <p:spPr>
-          <a:xfrm>
-            <a:off x="438005" y="322818"/>
-            <a:ext cx="3174367" cy="952975"/>
-          </a:xfrm>
-          <a:prstGeom prst="rect">
-            <a:avLst/>
-          </a:prstGeom>
-        </p:spPr>
-      </p:pic>
-      <p:sp>
-        <p:nvSpPr>
-          <p:cNvPr id="3" name="Title 6">
-            <a:extLst>
-              <a:ext uri="{FF2B5EF4-FFF2-40B4-BE49-F238E27FC236}">
-                <a16:creationId xmlns:a16="http://schemas.microsoft.com/office/drawing/2014/main" id="{5702E00C-3125-4CD1-A5F8-64723BF48E3E}"/>
-              </a:ext>
-            </a:extLst>
-          </p:cNvPr>
-          <p:cNvSpPr txBox="1">
-            <a:spLocks/>
-          </p:cNvSpPr>
-          <p:nvPr/>
-        </p:nvSpPr>
-        <p:spPr>
-          <a:xfrm>
-            <a:off x="386634" y="2219413"/>
-            <a:ext cx="7342482" cy="848792"/>
-          </a:xfrm>
-          <a:prstGeom prst="rect">
-            <a:avLst/>
-          </a:prstGeom>
-        </p:spPr>
-        <p:txBody>
-          <a:bodyPr lIns="91440" tIns="45720" rIns="91440" bIns="45720" anchor="t"/>
-          <a:lstStyle>
-            <a:lvl1pPr algn="l" defTabSz="914400" rtl="0" eaLnBrk="1" latinLnBrk="0" hangingPunct="1">
-              <a:lnSpc>
-                <a:spcPct val="90000"/>
-              </a:lnSpc>
-              <a:spcBef>
-                <a:spcPct val="0"/>
-              </a:spcBef>
-              <a:buNone/>
-              <a:defRPr sz="5400" b="1" kern="1200">
-                <a:solidFill>
-                  <a:srgbClr val="C00000"/>
-                </a:solidFill>
-                <a:latin typeface="Lato" panose="020F0502020204030203" pitchFamily="34" charset="0"/>
-                <a:ea typeface="Lato" panose="020F0502020204030203" pitchFamily="34" charset="0"/>
-                <a:cs typeface="Lato" panose="020F0502020204030203" pitchFamily="34" charset="0"/>
-              </a:defRPr>
-            </a:lvl1pPr>
-          </a:lstStyle>
-          <a:p>
-            <a:endParaRPr lang="en-US" dirty="0"/>
-          </a:p>
-        </p:txBody>
-      </p:sp>
-      <p:sp>
-        <p:nvSpPr>
-          <p:cNvPr id="4" name="Title 6">
-            <a:extLst>
-              <a:ext uri="{FF2B5EF4-FFF2-40B4-BE49-F238E27FC236}">
-                <a16:creationId xmlns:a16="http://schemas.microsoft.com/office/drawing/2014/main" id="{72BF49D9-2FCE-4950-8B1C-F580CC18F4C9}"/>
-              </a:ext>
-            </a:extLst>
-          </p:cNvPr>
-          <p:cNvSpPr txBox="1">
-            <a:spLocks/>
-          </p:cNvSpPr>
-          <p:nvPr/>
-        </p:nvSpPr>
-        <p:spPr>
-          <a:xfrm>
-            <a:off x="386633" y="3365399"/>
-            <a:ext cx="10613875" cy="848793"/>
-          </a:xfrm>
-          <a:prstGeom prst="rect">
-            <a:avLst/>
-          </a:prstGeom>
-        </p:spPr>
-        <p:txBody>
-          <a:bodyPr lIns="91440" tIns="45720" rIns="91440" bIns="45720" anchor="t"/>
-          <a:lstStyle>
-            <a:lvl1pPr algn="l" defTabSz="914400" rtl="0" eaLnBrk="1" latinLnBrk="0" hangingPunct="1">
-              <a:lnSpc>
-                <a:spcPct val="90000"/>
-              </a:lnSpc>
-              <a:spcBef>
-                <a:spcPct val="0"/>
-              </a:spcBef>
-              <a:buNone/>
-              <a:defRPr sz="5400" b="1" kern="1200">
-                <a:solidFill>
-                  <a:srgbClr val="C00000"/>
-                </a:solidFill>
-                <a:latin typeface="Lato" panose="020F0502020204030203" pitchFamily="34" charset="0"/>
-                <a:ea typeface="Lato" panose="020F0502020204030203" pitchFamily="34" charset="0"/>
-                <a:cs typeface="Lato" panose="020F0502020204030203" pitchFamily="34" charset="0"/>
-              </a:defRPr>
-            </a:lvl1pPr>
-          </a:lstStyle>
-          <a:p>
-            <a:endParaRPr lang="en-US" sz="2800" b="0" dirty="0">
-              <a:solidFill>
-                <a:schemeClr val="tx1"/>
-              </a:solidFill>
-            </a:endParaRPr>
-          </a:p>
-        </p:txBody>
-      </p:sp>
-      <p:sp>
-        <p:nvSpPr>
-          <p:cNvPr id="9" name="Slide Number Placeholder 8">
-            <a:extLst>
-              <a:ext uri="{FF2B5EF4-FFF2-40B4-BE49-F238E27FC236}">
-                <a16:creationId xmlns:a16="http://schemas.microsoft.com/office/drawing/2014/main" id="{99BF4829-01AB-4F75-A03B-DF4FC4C312C6}"/>
+      <p:sp>
+        <p:nvSpPr>
+          <p:cNvPr id="2" name="Title 1">
+            <a:extLst>
+              <a:ext uri="{FF2B5EF4-FFF2-40B4-BE49-F238E27FC236}">
+                <a16:creationId xmlns:a16="http://schemas.microsoft.com/office/drawing/2014/main" id="{EF9B3AB5-95DF-4273-871C-843529DB7255}"/>
+              </a:ext>
+            </a:extLst>
+          </p:cNvPr>
+          <p:cNvSpPr>
+            <a:spLocks noGrp="1"/>
+          </p:cNvSpPr>
+          <p:nvPr>
+            <p:ph type="title"/>
+          </p:nvPr>
+        </p:nvSpPr>
+        <p:spPr/>
+        <p:txBody>
+          <a:bodyPr/>
+          <a:lstStyle/>
+          <a:p>
+            <a:r>
+              <a:rPr lang="vi-VN"/>
+              <a:t>Nội dung chính</a:t>
+            </a:r>
+            <a:br>
+              <a:rPr lang="vi-VN"/>
+            </a:br>
+            <a:endParaRPr lang="en-US"/>
+          </a:p>
+        </p:txBody>
+      </p:sp>
+      <p:sp>
+        <p:nvSpPr>
+          <p:cNvPr id="3" name="Content Placeholder 2">
+            <a:extLst>
+              <a:ext uri="{FF2B5EF4-FFF2-40B4-BE49-F238E27FC236}">
+                <a16:creationId xmlns:a16="http://schemas.microsoft.com/office/drawing/2014/main" id="{3573E091-9DCD-4DE7-96D1-A93E44E0F5B9}"/>
+              </a:ext>
+            </a:extLst>
+          </p:cNvPr>
+          <p:cNvSpPr>
+            <a:spLocks noGrp="1"/>
+          </p:cNvSpPr>
+          <p:nvPr>
+            <p:ph sz="quarter" idx="13"/>
+          </p:nvPr>
+        </p:nvSpPr>
+        <p:spPr>
+          <a:xfrm>
+            <a:off x="338736" y="1101653"/>
+            <a:ext cx="11514528" cy="4909124"/>
+          </a:xfrm>
+        </p:spPr>
+        <p:txBody>
+          <a:bodyPr/>
+          <a:lstStyle/>
+          <a:p>
+            <a:pPr marL="514350" indent="-514350">
+              <a:buFont typeface="+mj-lt"/>
+              <a:buAutoNum type="arabicPeriod"/>
+            </a:pPr>
+            <a:r>
+              <a:rPr lang="vi-VN"/>
+              <a:t>Đặt vấn đề &amp; mục tiêu</a:t>
+            </a:r>
+          </a:p>
+          <a:p>
+            <a:pPr marL="514350" indent="-514350">
+              <a:buFont typeface="+mj-lt"/>
+              <a:buAutoNum type="arabicPeriod"/>
+            </a:pPr>
+            <a:r>
+              <a:rPr lang="vi-VN"/>
+              <a:t>Tổng quan giải pháp</a:t>
+            </a:r>
+          </a:p>
+          <a:p>
+            <a:pPr marL="514350" indent="-514350">
+              <a:buFont typeface="+mj-lt"/>
+              <a:buAutoNum type="arabicPeriod"/>
+            </a:pPr>
+            <a:r>
+              <a:rPr lang="vi-VN"/>
+              <a:t>Xây dựng dữ liệu &amp; mô hình</a:t>
+            </a:r>
+          </a:p>
+          <a:p>
+            <a:pPr marL="514350" indent="-514350">
+              <a:buFont typeface="+mj-lt"/>
+              <a:buAutoNum type="arabicPeriod"/>
+            </a:pPr>
+            <a:r>
+              <a:rPr lang="vi-VN"/>
+              <a:t>Kết quả đánh giá</a:t>
+            </a:r>
+          </a:p>
+          <a:p>
+            <a:pPr marL="514350" indent="-514350">
+              <a:buFont typeface="+mj-lt"/>
+              <a:buAutoNum type="arabicPeriod"/>
+            </a:pPr>
+            <a:r>
+              <a:rPr lang="vi-VN"/>
+              <a:t>Triển khai &amp; sản phẩm</a:t>
+            </a:r>
+          </a:p>
+          <a:p>
+            <a:pPr marL="514350" indent="-514350">
+              <a:buFont typeface="+mj-lt"/>
+              <a:buAutoNum type="arabicPeriod"/>
+            </a:pPr>
+            <a:r>
+              <a:rPr lang="vi-VN"/>
+              <a:t>Kết luận</a:t>
+            </a:r>
+          </a:p>
+          <a:p>
+            <a:pPr marL="514350" indent="-514350">
+              <a:buFont typeface="+mj-lt"/>
+              <a:buAutoNum type="arabicPeriod"/>
+            </a:pPr>
+            <a:endParaRPr lang="en-US"/>
+          </a:p>
+        </p:txBody>
+      </p:sp>
+      <p:sp>
+        <p:nvSpPr>
+          <p:cNvPr id="4" name="Slide Number Placeholder 3">
+            <a:extLst>
+              <a:ext uri="{FF2B5EF4-FFF2-40B4-BE49-F238E27FC236}">
+                <a16:creationId xmlns:a16="http://schemas.microsoft.com/office/drawing/2014/main" id="{6CAB879D-D188-4DA3-8675-F8BCF379A12E}"/>
               </a:ext>
             </a:extLst>
           </p:cNvPr>
@@ -5201,7 +5699,7 @@
     </p:spTree>
     <p:extLst>
       <p:ext uri="{BB962C8B-B14F-4D97-AF65-F5344CB8AC3E}">
-        <p14:creationId xmlns:p14="http://schemas.microsoft.com/office/powerpoint/2010/main" val="743172911"/>
+        <p14:creationId xmlns:p14="http://schemas.microsoft.com/office/powerpoint/2010/main" val="221433772"/>
       </p:ext>
     </p:extLst>
   </p:cSld>
@@ -5233,7 +5731,7 @@
           <p:cNvPr id="2" name="Title 1">
             <a:extLst>
               <a:ext uri="{FF2B5EF4-FFF2-40B4-BE49-F238E27FC236}">
-                <a16:creationId xmlns:a16="http://schemas.microsoft.com/office/drawing/2014/main" id="{EF9B3AB5-95DF-4273-871C-843529DB7255}"/>
+                <a16:creationId xmlns:a16="http://schemas.microsoft.com/office/drawing/2014/main" id="{4FB6CB3A-046A-4C56-A02D-DBF672421CAF}"/>
               </a:ext>
             </a:extLst>
           </p:cNvPr>
@@ -5249,46 +5747,105 @@
           <a:bodyPr/>
           <a:lstStyle/>
           <a:p>
+            <a:r>
+              <a:rPr lang="vi-VN"/>
+              <a:t>1. Đặt vấn đề &amp; Mục tiêu</a:t>
+            </a:r>
+            <a:br>
+              <a:rPr lang="vi-VN"/>
+            </a:br>
             <a:endParaRPr lang="en-US"/>
           </a:p>
         </p:txBody>
       </p:sp>
       <p:sp>
         <p:nvSpPr>
-          <p:cNvPr id="3" name="Content Placeholder 2">
-            <a:extLst>
-              <a:ext uri="{FF2B5EF4-FFF2-40B4-BE49-F238E27FC236}">
-                <a16:creationId xmlns:a16="http://schemas.microsoft.com/office/drawing/2014/main" id="{3573E091-9DCD-4DE7-96D1-A93E44E0F5B9}"/>
-              </a:ext>
-            </a:extLst>
-          </p:cNvPr>
-          <p:cNvSpPr>
-            <a:spLocks noGrp="1"/>
-          </p:cNvSpPr>
-          <p:nvPr>
-            <p:ph sz="quarter" idx="13"/>
-          </p:nvPr>
-        </p:nvSpPr>
-        <p:spPr>
-          <a:xfrm>
-            <a:off x="338736" y="1101653"/>
-            <a:ext cx="11514528" cy="4909124"/>
+          <p:cNvPr id="3" name="Chart Placeholder 2">
+            <a:extLst>
+              <a:ext uri="{FF2B5EF4-FFF2-40B4-BE49-F238E27FC236}">
+                <a16:creationId xmlns:a16="http://schemas.microsoft.com/office/drawing/2014/main" id="{C8196C5E-7B93-4E81-B617-CD97C06D6032}"/>
+              </a:ext>
+            </a:extLst>
+          </p:cNvPr>
+          <p:cNvSpPr>
+            <a:spLocks noGrp="1"/>
+          </p:cNvSpPr>
+          <p:nvPr>
+            <p:ph type="chart" sz="quarter" idx="13"/>
+          </p:nvPr>
+        </p:nvSpPr>
+        <p:spPr>
+          <a:xfrm>
+            <a:off x="330200" y="1406769"/>
+            <a:ext cx="11735420" cy="4655894"/>
           </a:xfrm>
         </p:spPr>
         <p:txBody>
           <a:bodyPr/>
           <a:lstStyle/>
           <a:p>
-            <a:endParaRPr lang="en-US"/>
-          </a:p>
-        </p:txBody>
-      </p:sp>
-      <p:sp>
-        <p:nvSpPr>
-          <p:cNvPr id="4" name="Slide Number Placeholder 3">
-            <a:extLst>
-              <a:ext uri="{FF2B5EF4-FFF2-40B4-BE49-F238E27FC236}">
-                <a16:creationId xmlns:a16="http://schemas.microsoft.com/office/drawing/2014/main" id="{6CAB879D-D188-4DA3-8675-F8BCF379A12E}"/>
+            <a:pPr marL="0" indent="0">
+              <a:buNone/>
+            </a:pPr>
+            <a:r>
+              <a:rPr lang="vi-VN" b="1"/>
+              <a:t>Đặt vấn đề</a:t>
+            </a:r>
+          </a:p>
+          <a:p>
+            <a:r>
+              <a:rPr lang="vi-VN" sz="2400"/>
+              <a:t>Xác thực hiện nay chỉ diễn ra một lần lúc mở khóa</a:t>
+            </a:r>
+          </a:p>
+          <a:p>
+            <a:pPr marL="0" indent="0">
+              <a:buNone/>
+            </a:pPr>
+            <a:r>
+              <a:rPr lang="vi-VN" sz="2400"/>
+              <a:t>   → mở khóa xong không kiểm soát lại danh tính</a:t>
+            </a:r>
+          </a:p>
+          <a:p>
+            <a:r>
+              <a:rPr lang="vi-VN" sz="2400"/>
+              <a:t>Sinh trắc học hành vi: xác thực liên tục, tận dụng cảm biến có sẵn - không cần phần cứng riêng</a:t>
+            </a:r>
+          </a:p>
+          <a:p>
+            <a:r>
+              <a:rPr lang="vi-VN" sz="2400"/>
+              <a:t>Khoảng trống nghiên cứu: thiếu phát hiện người lạ (tập mở) và thiếu cơ chế phản ứng khi bất thường</a:t>
+            </a:r>
+          </a:p>
+          <a:p>
+            <a:pPr marL="0" indent="0">
+              <a:buNone/>
+            </a:pPr>
+            <a:r>
+              <a:rPr lang="vi-VN" b="1"/>
+              <a:t>Mục tiêu</a:t>
+            </a:r>
+            <a:endParaRPr lang="vi-VN"/>
+          </a:p>
+          <a:p>
+            <a:pPr marL="0" indent="0">
+              <a:buNone/>
+            </a:pPr>
+            <a:r>
+              <a:rPr lang="vi-VN" sz="2400"/>
+              <a:t>Xây dựng hệ thống xác thực hành vi liên tục chạy trên thiết bị, phát hiện người lạ, kèm dự phòng bằng cử chỉ lắc</a:t>
+            </a:r>
+          </a:p>
+        </p:txBody>
+      </p:sp>
+      <p:sp>
+        <p:nvSpPr>
+          <p:cNvPr id="5" name="Slide Number Placeholder 4">
+            <a:extLst>
+              <a:ext uri="{FF2B5EF4-FFF2-40B4-BE49-F238E27FC236}">
+                <a16:creationId xmlns:a16="http://schemas.microsoft.com/office/drawing/2014/main" id="{3776946D-AB92-4D05-97ED-4EDF0AB0FF55}"/>
               </a:ext>
             </a:extLst>
           </p:cNvPr>
@@ -5316,7 +5873,7 @@
     </p:spTree>
     <p:extLst>
       <p:ext uri="{BB962C8B-B14F-4D97-AF65-F5344CB8AC3E}">
-        <p14:creationId xmlns:p14="http://schemas.microsoft.com/office/powerpoint/2010/main" val="221433772"/>
+        <p14:creationId xmlns:p14="http://schemas.microsoft.com/office/powerpoint/2010/main" val="64084651"/>
       </p:ext>
     </p:extLst>
   </p:cSld>
@@ -5348,7 +5905,7 @@
           <p:cNvPr id="2" name="Title 1">
             <a:extLst>
               <a:ext uri="{FF2B5EF4-FFF2-40B4-BE49-F238E27FC236}">
-                <a16:creationId xmlns:a16="http://schemas.microsoft.com/office/drawing/2014/main" id="{4FB6CB3A-046A-4C56-A02D-DBF672421CAF}"/>
+                <a16:creationId xmlns:a16="http://schemas.microsoft.com/office/drawing/2014/main" id="{C7A5D019-96A4-4D1E-AFB5-09D65C86E12D}"/>
               </a:ext>
             </a:extLst>
           </p:cNvPr>
@@ -5364,52 +5921,48 @@
           <a:bodyPr/>
           <a:lstStyle/>
           <a:p>
+            <a:r>
+              <a:rPr lang="vi-VN"/>
+              <a:t>2. Tổng quan giải pháp</a:t>
+            </a:r>
+            <a:br>
+              <a:rPr lang="vi-VN"/>
+            </a:br>
             <a:endParaRPr lang="en-US"/>
           </a:p>
         </p:txBody>
       </p:sp>
       <p:sp>
         <p:nvSpPr>
-          <p:cNvPr id="3" name="Chart Placeholder 2">
-            <a:extLst>
-              <a:ext uri="{FF2B5EF4-FFF2-40B4-BE49-F238E27FC236}">
-                <a16:creationId xmlns:a16="http://schemas.microsoft.com/office/drawing/2014/main" id="{C8196C5E-7B93-4E81-B617-CD97C06D6032}"/>
-              </a:ext>
-            </a:extLst>
-          </p:cNvPr>
-          <p:cNvSpPr>
-            <a:spLocks noGrp="1"/>
-          </p:cNvSpPr>
-          <p:nvPr>
-            <p:ph type="chart" sz="quarter" idx="13"/>
+          <p:cNvPr id="3" name="Text Placeholder 2">
+            <a:extLst>
+              <a:ext uri="{FF2B5EF4-FFF2-40B4-BE49-F238E27FC236}">
+                <a16:creationId xmlns:a16="http://schemas.microsoft.com/office/drawing/2014/main" id="{A5726603-7893-4AE0-9532-68058044B69D}"/>
+              </a:ext>
+            </a:extLst>
+          </p:cNvPr>
+          <p:cNvSpPr>
+            <a:spLocks noGrp="1"/>
+          </p:cNvSpPr>
+          <p:nvPr>
+            <p:ph type="body" sz="quarter" idx="13"/>
           </p:nvPr>
         </p:nvSpPr>
         <p:spPr/>
-      </p:sp>
-      <p:sp>
-        <p:nvSpPr>
-          <p:cNvPr id="4" name="Picture Placeholder 3">
-            <a:extLst>
-              <a:ext uri="{FF2B5EF4-FFF2-40B4-BE49-F238E27FC236}">
-                <a16:creationId xmlns:a16="http://schemas.microsoft.com/office/drawing/2014/main" id="{377CB842-AD15-4F5A-8EF5-EBD6CE5F54A3}"/>
-              </a:ext>
-            </a:extLst>
-          </p:cNvPr>
-          <p:cNvSpPr>
-            <a:spLocks noGrp="1"/>
-          </p:cNvSpPr>
-          <p:nvPr>
-            <p:ph type="pic" sz="quarter" idx="14"/>
-          </p:nvPr>
-        </p:nvSpPr>
-        <p:spPr/>
-      </p:sp>
-      <p:sp>
-        <p:nvSpPr>
-          <p:cNvPr id="5" name="Slide Number Placeholder 4">
-            <a:extLst>
-              <a:ext uri="{FF2B5EF4-FFF2-40B4-BE49-F238E27FC236}">
-                <a16:creationId xmlns:a16="http://schemas.microsoft.com/office/drawing/2014/main" id="{3776946D-AB92-4D05-97ED-4EDF0AB0FF55}"/>
+        <p:txBody>
+          <a:bodyPr/>
+          <a:lstStyle/>
+          <a:p>
+            <a:endParaRPr lang="en-US"/>
+          </a:p>
+        </p:txBody>
+      </p:sp>
+      <p:sp>
+        <p:nvSpPr>
+          <p:cNvPr id="6" name="Slide Number Placeholder 5">
+            <a:extLst>
+              <a:ext uri="{FF2B5EF4-FFF2-40B4-BE49-F238E27FC236}">
+                <a16:creationId xmlns:a16="http://schemas.microsoft.com/office/drawing/2014/main" id="{11E4677A-4F02-4478-B9B8-685D0B6264D3}"/>
               </a:ext>
             </a:extLst>
           </p:cNvPr>
@@ -5434,10 +5987,115 @@
           </a:p>
         </p:txBody>
       </p:sp>
+      <p:pic>
+        <p:nvPicPr>
+          <p:cNvPr id="5" name="Hình ảnh 4">
+            <a:extLst>
+              <a:ext uri="{FF2B5EF4-FFF2-40B4-BE49-F238E27FC236}">
+                <a16:creationId xmlns:a16="http://schemas.microsoft.com/office/drawing/2014/main" id="{38DFF745-883A-A6E3-2E16-C73EEE7AB951}"/>
+              </a:ext>
+            </a:extLst>
+          </p:cNvPr>
+          <p:cNvPicPr>
+            <a:picLocks noChangeAspect="1"/>
+          </p:cNvPicPr>
+          <p:nvPr/>
+        </p:nvPicPr>
+        <p:blipFill>
+          <a:blip r:embed="rId2"/>
+          <a:stretch>
+            <a:fillRect/>
+          </a:stretch>
+        </p:blipFill>
+        <p:spPr>
+          <a:xfrm>
+            <a:off x="3371850" y="1104900"/>
+            <a:ext cx="5448300" cy="4648200"/>
+          </a:xfrm>
+          <a:prstGeom prst="rect">
+            <a:avLst/>
+          </a:prstGeom>
+        </p:spPr>
+      </p:pic>
+      <p:pic>
+        <p:nvPicPr>
+          <p:cNvPr id="8" name="Hình ảnh 7">
+            <a:extLst>
+              <a:ext uri="{FF2B5EF4-FFF2-40B4-BE49-F238E27FC236}">
+                <a16:creationId xmlns:a16="http://schemas.microsoft.com/office/drawing/2014/main" id="{8CE5613F-1E3B-735D-8B31-AAB63D9DF155}"/>
+              </a:ext>
+            </a:extLst>
+          </p:cNvPr>
+          <p:cNvPicPr>
+            <a:picLocks noChangeAspect="1"/>
+          </p:cNvPicPr>
+          <p:nvPr/>
+        </p:nvPicPr>
+        <p:blipFill>
+          <a:blip r:embed="rId3">
+            <a:extLst>
+              <a:ext uri="{28A0092B-C50C-407E-A947-70E740481C1C}">
+                <a14:useLocalDpi xmlns:a14="http://schemas.microsoft.com/office/drawing/2010/main" val="0"/>
+              </a:ext>
+            </a:extLst>
+          </a:blip>
+          <a:stretch>
+            <a:fillRect/>
+          </a:stretch>
+        </p:blipFill>
+        <p:spPr>
+          <a:xfrm>
+            <a:off x="1951463" y="1025532"/>
+            <a:ext cx="8096686" cy="4945691"/>
+          </a:xfrm>
+          <a:prstGeom prst="rect">
+            <a:avLst/>
+          </a:prstGeom>
+        </p:spPr>
+      </p:pic>
+      <p:sp>
+        <p:nvSpPr>
+          <p:cNvPr id="9" name="Hộp Văn bản 8">
+            <a:extLst>
+              <a:ext uri="{FF2B5EF4-FFF2-40B4-BE49-F238E27FC236}">
+                <a16:creationId xmlns:a16="http://schemas.microsoft.com/office/drawing/2014/main" id="{EE36919C-B110-AF6D-3E86-F2851EBF0484}"/>
+              </a:ext>
+            </a:extLst>
+          </p:cNvPr>
+          <p:cNvSpPr txBox="1"/>
+          <p:nvPr/>
+        </p:nvSpPr>
+        <p:spPr>
+          <a:xfrm>
+            <a:off x="4027138" y="6043613"/>
+            <a:ext cx="4136526" cy="369332"/>
+          </a:xfrm>
+          <a:prstGeom prst="rect">
+            <a:avLst/>
+          </a:prstGeom>
+          <a:noFill/>
+        </p:spPr>
+        <p:txBody>
+          <a:bodyPr wrap="square" rtlCol="0">
+            <a:spAutoFit/>
+          </a:bodyPr>
+          <a:lstStyle/>
+          <a:p>
+            <a:r>
+              <a:rPr lang="vi-VN" sz="1600"/>
+              <a:t>Sơ đồ tổng</a:t>
+            </a:r>
+            <a:r>
+              <a:rPr lang="vi-VN"/>
+              <a:t> quan pipeline hệ thống</a:t>
+            </a:r>
+          </a:p>
+        </p:txBody>
+      </p:sp>
     </p:spTree>
     <p:extLst>
       <p:ext uri="{BB962C8B-B14F-4D97-AF65-F5344CB8AC3E}">
-        <p14:creationId xmlns:p14="http://schemas.microsoft.com/office/powerpoint/2010/main" val="64084651"/>
+        <p14:creationId xmlns:p14="http://schemas.microsoft.com/office/powerpoint/2010/main" val="3505952789"/>
       </p:ext>
     </p:extLst>
   </p:cSld>
@@ -5469,7 +6127,7 @@
           <p:cNvPr id="2" name="Title 1">
             <a:extLst>
               <a:ext uri="{FF2B5EF4-FFF2-40B4-BE49-F238E27FC236}">
-                <a16:creationId xmlns:a16="http://schemas.microsoft.com/office/drawing/2014/main" id="{C7A5D019-96A4-4D1E-AFB5-09D65C86E12D}"/>
+                <a16:creationId xmlns:a16="http://schemas.microsoft.com/office/drawing/2014/main" id="{AEAEFE0E-299A-46D8-9DF7-2C84CBBCAF45}"/>
               </a:ext>
             </a:extLst>
           </p:cNvPr>
@@ -5485,41 +6143,85 @@
           <a:bodyPr/>
           <a:lstStyle/>
           <a:p>
+            <a:r>
+              <a:rPr lang="vi-VN"/>
+              <a:t>3. Xây dựng dữ liệu &amp; mô hình</a:t>
+            </a:r>
             <a:endParaRPr lang="en-US"/>
           </a:p>
         </p:txBody>
       </p:sp>
       <p:sp>
         <p:nvSpPr>
-          <p:cNvPr id="3" name="Text Placeholder 2">
-            <a:extLst>
-              <a:ext uri="{FF2B5EF4-FFF2-40B4-BE49-F238E27FC236}">
-                <a16:creationId xmlns:a16="http://schemas.microsoft.com/office/drawing/2014/main" id="{A5726603-7893-4AE0-9532-68058044B69D}"/>
-              </a:ext>
-            </a:extLst>
-          </p:cNvPr>
-          <p:cNvSpPr>
-            <a:spLocks noGrp="1"/>
-          </p:cNvSpPr>
-          <p:nvPr>
-            <p:ph type="body" sz="quarter" idx="13"/>
-          </p:nvPr>
-        </p:nvSpPr>
-        <p:spPr/>
+          <p:cNvPr id="3" name="Chart Placeholder 2">
+            <a:extLst>
+              <a:ext uri="{FF2B5EF4-FFF2-40B4-BE49-F238E27FC236}">
+                <a16:creationId xmlns:a16="http://schemas.microsoft.com/office/drawing/2014/main" id="{22B1B2EF-F9E2-4625-AD70-EE979A3EA521}"/>
+              </a:ext>
+            </a:extLst>
+          </p:cNvPr>
+          <p:cNvSpPr>
+            <a:spLocks noGrp="1"/>
+          </p:cNvSpPr>
+          <p:nvPr>
+            <p:ph type="chart" sz="quarter" idx="13"/>
+          </p:nvPr>
+        </p:nvSpPr>
+        <p:spPr>
+          <a:xfrm>
+            <a:off x="338735" y="1406525"/>
+            <a:ext cx="11514527" cy="4670425"/>
+          </a:xfrm>
+        </p:spPr>
         <p:txBody>
           <a:bodyPr/>
           <a:lstStyle/>
           <a:p>
-            <a:endParaRPr lang="en-US"/>
-          </a:p>
-        </p:txBody>
-      </p:sp>
-      <p:sp>
-        <p:nvSpPr>
-          <p:cNvPr id="6" name="Slide Number Placeholder 5">
-            <a:extLst>
-              <a:ext uri="{FF2B5EF4-FFF2-40B4-BE49-F238E27FC236}">
-                <a16:creationId xmlns:a16="http://schemas.microsoft.com/office/drawing/2014/main" id="{11E4677A-4F02-4478-B9B8-685D0B6264D3}"/>
+            <a:pPr marL="0" indent="0">
+              <a:buNone/>
+            </a:pPr>
+            <a:r>
+              <a:rPr lang="vi-VN" b="1"/>
+              <a:t>3.1. Xây dựng dữ liệu</a:t>
+            </a:r>
+          </a:p>
+          <a:p>
+            <a:r>
+              <a:rPr lang="vi-VN" sz="2400"/>
+              <a:t>26 người, 19 dòng thiết bị, thu trong điều kiện sử dụng tự nhiên</a:t>
+            </a:r>
+          </a:p>
+          <a:p>
+            <a:r>
+              <a:rPr lang="vi-VN"/>
+              <a:t>Mỗi người </a:t>
+            </a:r>
+            <a:r>
+              <a:rPr lang="vi-VN" b="1"/>
+              <a:t>6 phiên</a:t>
+            </a:r>
+            <a:r>
+              <a:rPr lang="vi-VN"/>
+              <a:t>: 3 hoạt động + biểu mẫu tương tác (chạm, cuộn)</a:t>
+            </a:r>
+          </a:p>
+          <a:p>
+            <a:endParaRPr lang="vi-VN" sz="2400"/>
+          </a:p>
+          <a:p>
+            <a:pPr marL="0" indent="0">
+              <a:buNone/>
+            </a:pPr>
+            <a:endParaRPr lang="vi-VN"/>
+          </a:p>
+        </p:txBody>
+      </p:sp>
+      <p:sp>
+        <p:nvSpPr>
+          <p:cNvPr id="5" name="Slide Number Placeholder 4">
+            <a:extLst>
+              <a:ext uri="{FF2B5EF4-FFF2-40B4-BE49-F238E27FC236}">
+                <a16:creationId xmlns:a16="http://schemas.microsoft.com/office/drawing/2014/main" id="{E8B4E653-E636-4EED-9A37-BC263FE84A93}"/>
               </a:ext>
             </a:extLst>
           </p:cNvPr>
@@ -5544,10 +6246,502 @@
           </a:p>
         </p:txBody>
       </p:sp>
+      <p:sp>
+        <p:nvSpPr>
+          <p:cNvPr id="7" name="Hộp Văn bản 6">
+            <a:extLst>
+              <a:ext uri="{FF2B5EF4-FFF2-40B4-BE49-F238E27FC236}">
+                <a16:creationId xmlns:a16="http://schemas.microsoft.com/office/drawing/2014/main" id="{10B68849-2BBA-CBFF-B8BE-A6BFC3F4FB59}"/>
+              </a:ext>
+            </a:extLst>
+          </p:cNvPr>
+          <p:cNvSpPr txBox="1">
+            <a:spLocks/>
+          </p:cNvSpPr>
+          <p:nvPr/>
+        </p:nvSpPr>
+        <p:spPr>
+          <a:xfrm>
+            <a:off x="4870341" y="5892284"/>
+            <a:ext cx="2451312" cy="369332"/>
+          </a:xfrm>
+          <a:prstGeom prst="rect">
+            <a:avLst/>
+          </a:prstGeom>
+          <a:noFill/>
+        </p:spPr>
+        <p:txBody>
+          <a:bodyPr wrap="none" rtlCol="0">
+            <a:spAutoFit/>
+          </a:bodyPr>
+          <a:lstStyle/>
+          <a:p>
+            <a:r>
+              <a:rPr lang="vi-VN"/>
+              <a:t>Bảng </a:t>
+            </a:r>
+            <a:r>
+              <a:rPr lang="vi-VN" sz="1600"/>
+              <a:t>tổng</a:t>
+            </a:r>
+            <a:r>
+              <a:rPr lang="vi-VN"/>
+              <a:t> hợp thiết bị</a:t>
+            </a:r>
+          </a:p>
+        </p:txBody>
+      </p:sp>
+      <p:graphicFrame>
+        <p:nvGraphicFramePr>
+          <p:cNvPr id="8" name="Bảng 7">
+            <a:extLst>
+              <a:ext uri="{FF2B5EF4-FFF2-40B4-BE49-F238E27FC236}">
+                <a16:creationId xmlns:a16="http://schemas.microsoft.com/office/drawing/2014/main" id="{7F986E9D-24E0-06A0-6994-FB860AF81020}"/>
+              </a:ext>
+            </a:extLst>
+          </p:cNvPr>
+          <p:cNvGraphicFramePr/>
+          <p:nvPr>
+            <p:extLst>
+              <p:ext uri="{D42A27DB-BD31-4B8C-83A1-F6EECF244321}">
+                <p14:modId xmlns:p14="http://schemas.microsoft.com/office/powerpoint/2010/main" val="2626992209"/>
+              </p:ext>
+            </p:extLst>
+          </p:nvPr>
+        </p:nvGraphicFramePr>
+        <p:xfrm>
+          <a:off x="1907307" y="2925564"/>
+          <a:ext cx="8127999" cy="2966720"/>
+        </p:xfrm>
+        <a:graphic>
+          <a:graphicData uri="http://schemas.openxmlformats.org/drawingml/2006/table">
+            <a:tbl>
+              <a:tblPr firstRow="1" bandRow="1">
+                <a:tableStyleId>{5C22544A-7EE6-4342-B048-85BDC9FD1C3A}</a:tableStyleId>
+              </a:tblPr>
+              <a:tblGrid>
+                <a:gridCol w="2709333">
+                  <a:extLst>
+                    <a:ext uri="{9D8B030D-6E8A-4147-A177-3AD203B41FA5}">
+                      <a16:colId xmlns:a16="http://schemas.microsoft.com/office/drawing/2014/main" val="2059748016"/>
+                    </a:ext>
+                  </a:extLst>
+                </a:gridCol>
+                <a:gridCol w="2709333">
+                  <a:extLst>
+                    <a:ext uri="{9D8B030D-6E8A-4147-A177-3AD203B41FA5}">
+                      <a16:colId xmlns:a16="http://schemas.microsoft.com/office/drawing/2014/main" val="2477870711"/>
+                    </a:ext>
+                  </a:extLst>
+                </a:gridCol>
+                <a:gridCol w="2709333">
+                  <a:extLst>
+                    <a:ext uri="{9D8B030D-6E8A-4147-A177-3AD203B41FA5}">
+                      <a16:colId xmlns:a16="http://schemas.microsoft.com/office/drawing/2014/main" val="2248635876"/>
+                    </a:ext>
+                  </a:extLst>
+                </a:gridCol>
+              </a:tblGrid>
+              <a:tr h="370840">
+                <a:tc>
+                  <a:txBody>
+                    <a:bodyPr/>
+                    <a:lstStyle/>
+                    <a:p>
+                      <a:pPr algn="ctr"/>
+                      <a:r>
+                        <a:rPr lang="vi-VN"/>
+                        <a:t>Hãng sản xuất</a:t>
+                      </a:r>
+                    </a:p>
+                  </a:txBody>
+                  <a:tcPr/>
+                </a:tc>
+                <a:tc>
+                  <a:txBody>
+                    <a:bodyPr/>
+                    <a:lstStyle/>
+                    <a:p>
+                      <a:pPr algn="ctr"/>
+                      <a:r>
+                        <a:rPr lang="vi-VN"/>
+                        <a:t>Số lượng máy</a:t>
+                      </a:r>
+                    </a:p>
+                  </a:txBody>
+                  <a:tcPr/>
+                </a:tc>
+                <a:tc>
+                  <a:txBody>
+                    <a:bodyPr/>
+                    <a:lstStyle/>
+                    <a:p>
+                      <a:pPr algn="ctr"/>
+                      <a:r>
+                        <a:rPr lang="vi-VN"/>
+                        <a:t>Phiên bản Android</a:t>
+                      </a:r>
+                    </a:p>
+                  </a:txBody>
+                  <a:tcPr/>
+                </a:tc>
+                <a:extLst>
+                  <a:ext uri="{0D108BD9-81ED-4DB2-BD59-A6C34878D82A}">
+                    <a16:rowId xmlns:a16="http://schemas.microsoft.com/office/drawing/2014/main" val="436057960"/>
+                  </a:ext>
+                </a:extLst>
+              </a:tr>
+              <a:tr h="370840">
+                <a:tc>
+                  <a:txBody>
+                    <a:bodyPr/>
+                    <a:lstStyle/>
+                    <a:p>
+                      <a:pPr algn="ctr"/>
+                      <a:r>
+                        <a:rPr lang="vi-VN"/>
+                        <a:t>Samsung</a:t>
+                      </a:r>
+                    </a:p>
+                  </a:txBody>
+                  <a:tcPr/>
+                </a:tc>
+                <a:tc>
+                  <a:txBody>
+                    <a:bodyPr/>
+                    <a:lstStyle/>
+                    <a:p>
+                      <a:pPr algn="ctr"/>
+                      <a:r>
+                        <a:rPr lang="vi-VN"/>
+                        <a:t>6</a:t>
+                      </a:r>
+                    </a:p>
+                  </a:txBody>
+                  <a:tcPr/>
+                </a:tc>
+                <a:tc>
+                  <a:txBody>
+                    <a:bodyPr/>
+                    <a:lstStyle/>
+                    <a:p>
+                      <a:pPr algn="ctr"/>
+                      <a:r>
+                        <a:rPr lang="vi-VN"/>
+                        <a:t>12, 13, 16</a:t>
+                      </a:r>
+                    </a:p>
+                  </a:txBody>
+                  <a:tcPr/>
+                </a:tc>
+                <a:extLst>
+                  <a:ext uri="{0D108BD9-81ED-4DB2-BD59-A6C34878D82A}">
+                    <a16:rowId xmlns:a16="http://schemas.microsoft.com/office/drawing/2014/main" val="3969970558"/>
+                  </a:ext>
+                </a:extLst>
+              </a:tr>
+              <a:tr h="370840">
+                <a:tc>
+                  <a:txBody>
+                    <a:bodyPr/>
+                    <a:lstStyle/>
+                    <a:p>
+                      <a:pPr algn="ctr"/>
+                      <a:r>
+                        <a:rPr lang="vi-VN"/>
+                        <a:t>Xiaomi</a:t>
+                      </a:r>
+                    </a:p>
+                  </a:txBody>
+                  <a:tcPr/>
+                </a:tc>
+                <a:tc>
+                  <a:txBody>
+                    <a:bodyPr/>
+                    <a:lstStyle/>
+                    <a:p>
+                      <a:pPr algn="ctr"/>
+                      <a:r>
+                        <a:rPr lang="vi-VN"/>
+                        <a:t>6</a:t>
+                      </a:r>
+                    </a:p>
+                  </a:txBody>
+                  <a:tcPr/>
+                </a:tc>
+                <a:tc>
+                  <a:txBody>
+                    <a:bodyPr/>
+                    <a:lstStyle/>
+                    <a:p>
+                      <a:pPr algn="ctr"/>
+                      <a:r>
+                        <a:rPr lang="vi-VN"/>
+                        <a:t>13, 14, 16</a:t>
+                      </a:r>
+                    </a:p>
+                  </a:txBody>
+                  <a:tcPr/>
+                </a:tc>
+                <a:extLst>
+                  <a:ext uri="{0D108BD9-81ED-4DB2-BD59-A6C34878D82A}">
+                    <a16:rowId xmlns:a16="http://schemas.microsoft.com/office/drawing/2014/main" val="4010951132"/>
+                  </a:ext>
+                </a:extLst>
+              </a:tr>
+              <a:tr h="370840">
+                <a:tc>
+                  <a:txBody>
+                    <a:bodyPr/>
+                    <a:lstStyle/>
+                    <a:p>
+                      <a:pPr algn="ctr"/>
+                      <a:r>
+                        <a:rPr lang="vi-VN"/>
+                        <a:t>Oppo</a:t>
+                      </a:r>
+                    </a:p>
+                  </a:txBody>
+                  <a:tcPr/>
+                </a:tc>
+                <a:tc>
+                  <a:txBody>
+                    <a:bodyPr/>
+                    <a:lstStyle/>
+                    <a:p>
+                      <a:pPr algn="ctr"/>
+                      <a:r>
+                        <a:rPr lang="vi-VN"/>
+                        <a:t>4</a:t>
+                      </a:r>
+                    </a:p>
+                  </a:txBody>
+                  <a:tcPr/>
+                </a:tc>
+                <a:tc>
+                  <a:txBody>
+                    <a:bodyPr/>
+                    <a:lstStyle/>
+                    <a:p>
+                      <a:pPr algn="ctr"/>
+                      <a:r>
+                        <a:rPr lang="vi-VN"/>
+                        <a:t>8.1, 12, 13</a:t>
+                      </a:r>
+                    </a:p>
+                  </a:txBody>
+                  <a:tcPr/>
+                </a:tc>
+                <a:extLst>
+                  <a:ext uri="{0D108BD9-81ED-4DB2-BD59-A6C34878D82A}">
+                    <a16:rowId xmlns:a16="http://schemas.microsoft.com/office/drawing/2014/main" val="554265947"/>
+                  </a:ext>
+                </a:extLst>
+              </a:tr>
+              <a:tr h="370840">
+                <a:tc>
+                  <a:txBody>
+                    <a:bodyPr/>
+                    <a:lstStyle/>
+                    <a:p>
+                      <a:pPr algn="ctr"/>
+                      <a:r>
+                        <a:rPr lang="vi-VN"/>
+                        <a:t>Realme</a:t>
+                      </a:r>
+                    </a:p>
+                  </a:txBody>
+                  <a:tcPr/>
+                </a:tc>
+                <a:tc>
+                  <a:txBody>
+                    <a:bodyPr/>
+                    <a:lstStyle/>
+                    <a:p>
+                      <a:pPr algn="ctr"/>
+                      <a:r>
+                        <a:rPr lang="vi-VN"/>
+                        <a:t>1</a:t>
+                      </a:r>
+                    </a:p>
+                  </a:txBody>
+                  <a:tcPr/>
+                </a:tc>
+                <a:tc>
+                  <a:txBody>
+                    <a:bodyPr/>
+                    <a:lstStyle/>
+                    <a:p>
+                      <a:pPr algn="ctr"/>
+                      <a:r>
+                        <a:rPr lang="vi-VN"/>
+                        <a:t>15</a:t>
+                      </a:r>
+                    </a:p>
+                  </a:txBody>
+                  <a:tcPr/>
+                </a:tc>
+                <a:extLst>
+                  <a:ext uri="{0D108BD9-81ED-4DB2-BD59-A6C34878D82A}">
+                    <a16:rowId xmlns:a16="http://schemas.microsoft.com/office/drawing/2014/main" val="3518539513"/>
+                  </a:ext>
+                </a:extLst>
+              </a:tr>
+              <a:tr h="370840">
+                <a:tc>
+                  <a:txBody>
+                    <a:bodyPr/>
+                    <a:lstStyle/>
+                    <a:p>
+                      <a:pPr algn="ctr"/>
+                      <a:r>
+                        <a:rPr lang="vi-VN"/>
+                        <a:t>Tecno</a:t>
+                      </a:r>
+                    </a:p>
+                  </a:txBody>
+                  <a:tcPr/>
+                </a:tc>
+                <a:tc>
+                  <a:txBody>
+                    <a:bodyPr/>
+                    <a:lstStyle/>
+                    <a:p>
+                      <a:pPr algn="ctr"/>
+                      <a:r>
+                        <a:rPr lang="vi-VN"/>
+                        <a:t>1</a:t>
+                      </a:r>
+                    </a:p>
+                  </a:txBody>
+                  <a:tcPr/>
+                </a:tc>
+                <a:tc>
+                  <a:txBody>
+                    <a:bodyPr/>
+                    <a:lstStyle/>
+                    <a:p>
+                      <a:pPr algn="ctr"/>
+                      <a:r>
+                        <a:rPr lang="vi-VN"/>
+                        <a:t>15</a:t>
+                      </a:r>
+                    </a:p>
+                  </a:txBody>
+                  <a:tcPr/>
+                </a:tc>
+                <a:extLst>
+                  <a:ext uri="{0D108BD9-81ED-4DB2-BD59-A6C34878D82A}">
+                    <a16:rowId xmlns:a16="http://schemas.microsoft.com/office/drawing/2014/main" val="3971706396"/>
+                  </a:ext>
+                </a:extLst>
+              </a:tr>
+              <a:tr h="370840">
+                <a:tc>
+                  <a:txBody>
+                    <a:bodyPr/>
+                    <a:lstStyle/>
+                    <a:p>
+                      <a:pPr algn="ctr"/>
+                      <a:r>
+                        <a:rPr lang="vi-VN"/>
+                        <a:t>Khác</a:t>
+                      </a:r>
+                    </a:p>
+                  </a:txBody>
+                  <a:tcPr/>
+                </a:tc>
+                <a:tc>
+                  <a:txBody>
+                    <a:bodyPr/>
+                    <a:lstStyle/>
+                    <a:p>
+                      <a:pPr algn="ctr"/>
+                      <a:r>
+                        <a:rPr lang="vi-VN"/>
+                        <a:t>1</a:t>
+                      </a:r>
+                    </a:p>
+                  </a:txBody>
+                  <a:tcPr/>
+                </a:tc>
+                <a:tc>
+                  <a:txBody>
+                    <a:bodyPr/>
+                    <a:lstStyle/>
+                    <a:p>
+                      <a:pPr algn="ctr"/>
+                      <a:r>
+                        <a:rPr lang="vi-VN"/>
+                        <a:t>15</a:t>
+                      </a:r>
+                    </a:p>
+                  </a:txBody>
+                  <a:tcPr/>
+                </a:tc>
+                <a:extLst>
+                  <a:ext uri="{0D108BD9-81ED-4DB2-BD59-A6C34878D82A}">
+                    <a16:rowId xmlns:a16="http://schemas.microsoft.com/office/drawing/2014/main" val="3725566909"/>
+                  </a:ext>
+                </a:extLst>
+              </a:tr>
+              <a:tr h="370840">
+                <a:tc>
+                  <a:txBody>
+                    <a:bodyPr/>
+                    <a:lstStyle/>
+                    <a:p>
+                      <a:pPr algn="ctr"/>
+                      <a:r>
+                        <a:rPr lang="vi-VN"/>
+                        <a:t>Tổng</a:t>
+                      </a:r>
+                    </a:p>
+                  </a:txBody>
+                  <a:tcPr/>
+                </a:tc>
+                <a:tc>
+                  <a:txBody>
+                    <a:bodyPr/>
+                    <a:lstStyle/>
+                    <a:p>
+                      <a:pPr algn="ctr"/>
+                      <a:r>
+                        <a:rPr lang="vi-VN"/>
+                        <a:t>19</a:t>
+                      </a:r>
+                    </a:p>
+                  </a:txBody>
+                  <a:tcPr/>
+                </a:tc>
+                <a:tc>
+                  <a:txBody>
+                    <a:bodyPr/>
+                    <a:lstStyle/>
+                    <a:p>
+                      <a:pPr algn="ctr"/>
+                      <a:r>
+                        <a:rPr lang="vi-VN"/>
+                        <a:t>8.1 - 16</a:t>
+                      </a:r>
+                    </a:p>
+                  </a:txBody>
+                  <a:tcPr/>
+                </a:tc>
+                <a:extLst>
+                  <a:ext uri="{0D108BD9-81ED-4DB2-BD59-A6C34878D82A}">
+                    <a16:rowId xmlns:a16="http://schemas.microsoft.com/office/drawing/2014/main" val="2507513631"/>
+                  </a:ext>
+                </a:extLst>
+              </a:tr>
+            </a:tbl>
+          </a:graphicData>
+        </a:graphic>
+      </p:graphicFrame>
     </p:spTree>
     <p:extLst>
       <p:ext uri="{BB962C8B-B14F-4D97-AF65-F5344CB8AC3E}">
-        <p14:creationId xmlns:p14="http://schemas.microsoft.com/office/powerpoint/2010/main" val="3505952789"/>
+        <p14:creationId xmlns:p14="http://schemas.microsoft.com/office/powerpoint/2010/main" val="2287700220"/>
       </p:ext>
     </p:extLst>
   </p:cSld>
@@ -5562,7 +6756,13 @@
   <p:cSld>
     <p:spTree>
       <p:nvGrpSpPr>
-        <p:cNvPr id="1" name=""/>
+        <p:cNvPr id="1" name="">
+          <a:extLst>
+            <a:ext uri="{FF2B5EF4-FFF2-40B4-BE49-F238E27FC236}">
+              <a16:creationId xmlns:a16="http://schemas.microsoft.com/office/drawing/2014/main" id="{622E5F46-7DD8-B5A1-3FC0-B232CCE5AC9E}"/>
+            </a:ext>
+          </a:extLst>
+        </p:cNvPr>
         <p:cNvGrpSpPr/>
         <p:nvPr/>
       </p:nvGrpSpPr>
@@ -5579,7 +6779,7 @@
           <p:cNvPr id="2" name="Title 1">
             <a:extLst>
               <a:ext uri="{FF2B5EF4-FFF2-40B4-BE49-F238E27FC236}">
-                <a16:creationId xmlns:a16="http://schemas.microsoft.com/office/drawing/2014/main" id="{AEAEFE0E-299A-46D8-9DF7-2C84CBBCAF45}"/>
+                <a16:creationId xmlns:a16="http://schemas.microsoft.com/office/drawing/2014/main" id="{04DFB256-A415-9353-3FC1-E07837A931B9}"/>
               </a:ext>
             </a:extLst>
           </p:cNvPr>
@@ -5595,6 +6795,10 @@
           <a:bodyPr/>
           <a:lstStyle/>
           <a:p>
+            <a:r>
+              <a:rPr lang="vi-VN"/>
+              <a:t>3. Xây dựng dữ liệu &amp; mô hình</a:t>
+            </a:r>
             <a:endParaRPr lang="en-US"/>
           </a:p>
         </p:txBody>
@@ -5604,7 +6808,7 @@
           <p:cNvPr id="3" name="Chart Placeholder 2">
             <a:extLst>
               <a:ext uri="{FF2B5EF4-FFF2-40B4-BE49-F238E27FC236}">
-                <a16:creationId xmlns:a16="http://schemas.microsoft.com/office/drawing/2014/main" id="{22B1B2EF-F9E2-4625-AD70-EE979A3EA521}"/>
+                <a16:creationId xmlns:a16="http://schemas.microsoft.com/office/drawing/2014/main" id="{69BA23E4-CECF-9924-32AA-BB85B2025888}"/>
               </a:ext>
             </a:extLst>
           </p:cNvPr>
@@ -5615,32 +6819,38 @@
             <p:ph type="chart" sz="quarter" idx="13"/>
           </p:nvPr>
         </p:nvSpPr>
-        <p:spPr/>
-      </p:sp>
-      <p:sp>
-        <p:nvSpPr>
-          <p:cNvPr id="4" name="Table Placeholder 3">
-            <a:extLst>
-              <a:ext uri="{FF2B5EF4-FFF2-40B4-BE49-F238E27FC236}">
-                <a16:creationId xmlns:a16="http://schemas.microsoft.com/office/drawing/2014/main" id="{9B7570B9-F44D-4F61-BF1F-C3F752BCAAB3}"/>
-              </a:ext>
-            </a:extLst>
-          </p:cNvPr>
-          <p:cNvSpPr>
-            <a:spLocks noGrp="1"/>
-          </p:cNvSpPr>
-          <p:nvPr>
-            <p:ph type="tbl" sz="quarter" idx="14"/>
-          </p:nvPr>
-        </p:nvSpPr>
-        <p:spPr/>
+        <p:spPr>
+          <a:xfrm>
+            <a:off x="338735" y="1406525"/>
+            <a:ext cx="11514527" cy="4670425"/>
+          </a:xfrm>
+        </p:spPr>
+        <p:txBody>
+          <a:bodyPr/>
+          <a:lstStyle/>
+          <a:p>
+            <a:pPr marL="0" indent="0">
+              <a:buNone/>
+            </a:pPr>
+            <a:r>
+              <a:rPr lang="vi-VN" b="1"/>
+              <a:t>3.1. Xây dựng dữ liệu</a:t>
+            </a:r>
+          </a:p>
+          <a:p>
+            <a:pPr marL="0" indent="0">
+              <a:buNone/>
+            </a:pPr>
+            <a:endParaRPr lang="vi-VN"/>
+          </a:p>
+        </p:txBody>
       </p:sp>
       <p:sp>
         <p:nvSpPr>
           <p:cNvPr id="5" name="Slide Number Placeholder 4">
             <a:extLst>
               <a:ext uri="{FF2B5EF4-FFF2-40B4-BE49-F238E27FC236}">
-                <a16:creationId xmlns:a16="http://schemas.microsoft.com/office/drawing/2014/main" id="{E8B4E653-E636-4EED-9A37-BC263FE84A93}"/>
+                <a16:creationId xmlns:a16="http://schemas.microsoft.com/office/drawing/2014/main" id="{05CF76F5-FF9B-A83C-B081-48EB3CEA8ECC}"/>
               </a:ext>
             </a:extLst>
           </p:cNvPr>
@@ -5665,10 +6875,207 @@
           </a:p>
         </p:txBody>
       </p:sp>
+      <p:pic>
+        <p:nvPicPr>
+          <p:cNvPr id="6" name="Hình ảnh 5">
+            <a:extLst>
+              <a:ext uri="{FF2B5EF4-FFF2-40B4-BE49-F238E27FC236}">
+                <a16:creationId xmlns:a16="http://schemas.microsoft.com/office/drawing/2014/main" id="{7332EFAE-A17D-C546-376D-FA52A9622BA5}"/>
+              </a:ext>
+            </a:extLst>
+          </p:cNvPr>
+          <p:cNvPicPr>
+            <a:picLocks noChangeAspect="1"/>
+          </p:cNvPicPr>
+          <p:nvPr/>
+        </p:nvPicPr>
+        <p:blipFill>
+          <a:blip r:embed="rId2"/>
+          <a:stretch>
+            <a:fillRect/>
+          </a:stretch>
+        </p:blipFill>
+        <p:spPr>
+          <a:xfrm>
+            <a:off x="338735" y="1897924"/>
+            <a:ext cx="4771691" cy="3391399"/>
+          </a:xfrm>
+          <a:prstGeom prst="rect">
+            <a:avLst/>
+          </a:prstGeom>
+        </p:spPr>
+      </p:pic>
+      <p:sp>
+        <p:nvSpPr>
+          <p:cNvPr id="9" name="Hộp Văn bản 8">
+            <a:extLst>
+              <a:ext uri="{FF2B5EF4-FFF2-40B4-BE49-F238E27FC236}">
+                <a16:creationId xmlns:a16="http://schemas.microsoft.com/office/drawing/2014/main" id="{4127F326-E48B-0E0B-2DE5-3D0F295E1118}"/>
+              </a:ext>
+            </a:extLst>
+          </p:cNvPr>
+          <p:cNvSpPr txBox="1"/>
+          <p:nvPr/>
+        </p:nvSpPr>
+        <p:spPr>
+          <a:xfrm>
+            <a:off x="828819" y="5411390"/>
+            <a:ext cx="3631122" cy="369332"/>
+          </a:xfrm>
+          <a:prstGeom prst="rect">
+            <a:avLst/>
+          </a:prstGeom>
+          <a:noFill/>
+        </p:spPr>
+        <p:txBody>
+          <a:bodyPr wrap="none" rtlCol="0">
+            <a:spAutoFit/>
+          </a:bodyPr>
+          <a:lstStyle/>
+          <a:p>
+            <a:r>
+              <a:rPr lang="vi-VN"/>
+              <a:t>Sơ đồ </a:t>
+            </a:r>
+            <a:r>
+              <a:rPr lang="vi-VN" sz="1600"/>
+              <a:t>usecase</a:t>
+            </a:r>
+            <a:r>
+              <a:rPr lang="vi-VN"/>
+              <a:t> thiết bị thu dữ liệu</a:t>
+            </a:r>
+          </a:p>
+        </p:txBody>
+      </p:sp>
+      <p:pic>
+        <p:nvPicPr>
+          <p:cNvPr id="11" name="Hình ảnh 10">
+            <a:extLst>
+              <a:ext uri="{FF2B5EF4-FFF2-40B4-BE49-F238E27FC236}">
+                <a16:creationId xmlns:a16="http://schemas.microsoft.com/office/drawing/2014/main" id="{4F8C2323-5A57-2BEE-7655-1301B0A52681}"/>
+              </a:ext>
+            </a:extLst>
+          </p:cNvPr>
+          <p:cNvPicPr>
+            <a:picLocks noChangeAspect="1"/>
+          </p:cNvPicPr>
+          <p:nvPr/>
+        </p:nvPicPr>
+        <p:blipFill>
+          <a:blip r:embed="rId3">
+            <a:extLst>
+              <a:ext uri="{28A0092B-C50C-407E-A947-70E740481C1C}">
+                <a14:useLocalDpi xmlns:a14="http://schemas.microsoft.com/office/drawing/2010/main" val="0"/>
+              </a:ext>
+            </a:extLst>
+          </a:blip>
+          <a:stretch>
+            <a:fillRect/>
+          </a:stretch>
+        </p:blipFill>
+        <p:spPr>
+          <a:xfrm>
+            <a:off x="7081576" y="2060024"/>
+            <a:ext cx="2200275" cy="3229299"/>
+          </a:xfrm>
+          <a:prstGeom prst="rect">
+            <a:avLst/>
+          </a:prstGeom>
+        </p:spPr>
+      </p:pic>
+      <p:sp>
+        <p:nvSpPr>
+          <p:cNvPr id="12" name="Hộp Văn bản 11">
+            <a:extLst>
+              <a:ext uri="{FF2B5EF4-FFF2-40B4-BE49-F238E27FC236}">
+                <a16:creationId xmlns:a16="http://schemas.microsoft.com/office/drawing/2014/main" id="{D8725FFA-1084-5159-9AD7-D3CB59E87F44}"/>
+              </a:ext>
+            </a:extLst>
+          </p:cNvPr>
+          <p:cNvSpPr txBox="1"/>
+          <p:nvPr/>
+        </p:nvSpPr>
+        <p:spPr>
+          <a:xfrm>
+            <a:off x="6898885" y="5412860"/>
+            <a:ext cx="2515432" cy="584775"/>
+          </a:xfrm>
+          <a:prstGeom prst="rect">
+            <a:avLst/>
+          </a:prstGeom>
+          <a:noFill/>
+        </p:spPr>
+        <p:txBody>
+          <a:bodyPr wrap="none" rtlCol="0">
+            <a:spAutoFit/>
+          </a:bodyPr>
+          <a:lstStyle/>
+          <a:p>
+            <a:r>
+              <a:rPr lang="vi-VN" sz="1600"/>
+              <a:t>Cấu trúc thư mục dữ liệu </a:t>
+            </a:r>
+          </a:p>
+          <a:p>
+            <a:pPr algn="ctr"/>
+            <a:r>
+              <a:rPr lang="vi-VN" sz="1600"/>
+              <a:t>của một người dùng</a:t>
+            </a:r>
+          </a:p>
+        </p:txBody>
+      </p:sp>
+      <p:sp>
+        <p:nvSpPr>
+          <p:cNvPr id="13" name="Mũi tên: Phải 12">
+            <a:extLst>
+              <a:ext uri="{FF2B5EF4-FFF2-40B4-BE49-F238E27FC236}">
+                <a16:creationId xmlns:a16="http://schemas.microsoft.com/office/drawing/2014/main" id="{DEFEE467-84CF-A072-3D77-169B251A23FC}"/>
+              </a:ext>
+            </a:extLst>
+          </p:cNvPr>
+          <p:cNvSpPr/>
+          <p:nvPr/>
+        </p:nvSpPr>
+        <p:spPr>
+          <a:xfrm>
+            <a:off x="4904509" y="3429000"/>
+            <a:ext cx="1191491" cy="238991"/>
+          </a:xfrm>
+          <a:prstGeom prst="rightArrow">
+            <a:avLst/>
+          </a:prstGeom>
+        </p:spPr>
+        <p:style>
+          <a:lnRef idx="2">
+            <a:schemeClr val="accent1">
+              <a:shade val="15000"/>
+            </a:schemeClr>
+          </a:lnRef>
+          <a:fillRef idx="1">
+            <a:schemeClr val="accent1"/>
+          </a:fillRef>
+          <a:effectRef idx="0">
+            <a:schemeClr val="accent1"/>
+          </a:effectRef>
+          <a:fontRef idx="minor">
+            <a:schemeClr val="lt1"/>
+          </a:fontRef>
+        </p:style>
+        <p:txBody>
+          <a:bodyPr rtlCol="0" anchor="ctr"/>
+          <a:lstStyle/>
+          <a:p>
+            <a:pPr algn="ctr"/>
+            <a:endParaRPr lang="vi-VN"/>
+          </a:p>
+        </p:txBody>
+      </p:sp>
     </p:spTree>
     <p:extLst>
       <p:ext uri="{BB962C8B-B14F-4D97-AF65-F5344CB8AC3E}">
-        <p14:creationId xmlns:p14="http://schemas.microsoft.com/office/powerpoint/2010/main" val="2287700220"/>
+        <p14:creationId xmlns:p14="http://schemas.microsoft.com/office/powerpoint/2010/main" val="770028928"/>
       </p:ext>
     </p:extLst>
   </p:cSld>
@@ -5683,7 +7090,13 @@
   <p:cSld>
     <p:spTree>
       <p:nvGrpSpPr>
-        <p:cNvPr id="1" name=""/>
+        <p:cNvPr id="1" name="">
+          <a:extLst>
+            <a:ext uri="{FF2B5EF4-FFF2-40B4-BE49-F238E27FC236}">
+              <a16:creationId xmlns:a16="http://schemas.microsoft.com/office/drawing/2014/main" id="{6519D729-9D07-971C-98B5-123EF7D99379}"/>
+            </a:ext>
+          </a:extLst>
+        </p:cNvPr>
         <p:cNvGrpSpPr/>
         <p:nvPr/>
       </p:nvGrpSpPr>
@@ -5697,18 +7110,18 @@
       </p:grpSpPr>
       <p:sp>
         <p:nvSpPr>
-          <p:cNvPr id="2" name="Content Placeholder 1">
-            <a:extLst>
-              <a:ext uri="{FF2B5EF4-FFF2-40B4-BE49-F238E27FC236}">
-                <a16:creationId xmlns:a16="http://schemas.microsoft.com/office/drawing/2014/main" id="{5308E1B1-D9CD-415A-BCE5-B57F39B2F31D}"/>
-              </a:ext>
-            </a:extLst>
-          </p:cNvPr>
-          <p:cNvSpPr>
-            <a:spLocks noGrp="1"/>
-          </p:cNvSpPr>
-          <p:nvPr>
-            <p:ph sz="quarter" idx="13"/>
+          <p:cNvPr id="2" name="Title 1">
+            <a:extLst>
+              <a:ext uri="{FF2B5EF4-FFF2-40B4-BE49-F238E27FC236}">
+                <a16:creationId xmlns:a16="http://schemas.microsoft.com/office/drawing/2014/main" id="{3D41C999-3492-2E9E-139C-77A3DF05DC3F}"/>
+              </a:ext>
+            </a:extLst>
+          </p:cNvPr>
+          <p:cNvSpPr>
+            <a:spLocks noGrp="1"/>
+          </p:cNvSpPr>
+          <p:nvPr>
+            <p:ph type="title"/>
           </p:nvPr>
         </p:nvSpPr>
         <p:spPr/>
@@ -5716,41 +7129,91 @@
           <a:bodyPr/>
           <a:lstStyle/>
           <a:p>
+            <a:r>
+              <a:rPr lang="vi-VN"/>
+              <a:t>3. Xây dựng dữ liệu &amp; mô hình</a:t>
+            </a:r>
             <a:endParaRPr lang="en-US"/>
           </a:p>
         </p:txBody>
       </p:sp>
       <p:sp>
         <p:nvSpPr>
-          <p:cNvPr id="3" name="Title 2">
-            <a:extLst>
-              <a:ext uri="{FF2B5EF4-FFF2-40B4-BE49-F238E27FC236}">
-                <a16:creationId xmlns:a16="http://schemas.microsoft.com/office/drawing/2014/main" id="{AD6941D0-D074-43AE-8875-C4BDC98ADB7F}"/>
-              </a:ext>
-            </a:extLst>
-          </p:cNvPr>
-          <p:cNvSpPr>
-            <a:spLocks noGrp="1"/>
-          </p:cNvSpPr>
-          <p:nvPr>
-            <p:ph type="title"/>
-          </p:nvPr>
-        </p:nvSpPr>
-        <p:spPr/>
+          <p:cNvPr id="3" name="Chart Placeholder 2">
+            <a:extLst>
+              <a:ext uri="{FF2B5EF4-FFF2-40B4-BE49-F238E27FC236}">
+                <a16:creationId xmlns:a16="http://schemas.microsoft.com/office/drawing/2014/main" id="{280AA060-FC2D-4350-A6FD-F60EA6F587EA}"/>
+              </a:ext>
+            </a:extLst>
+          </p:cNvPr>
+          <p:cNvSpPr>
+            <a:spLocks noGrp="1"/>
+          </p:cNvSpPr>
+          <p:nvPr>
+            <p:ph type="chart" sz="quarter" idx="13"/>
+          </p:nvPr>
+        </p:nvSpPr>
+        <p:spPr>
+          <a:xfrm>
+            <a:off x="338735" y="1406525"/>
+            <a:ext cx="11514527" cy="4670425"/>
+          </a:xfrm>
+        </p:spPr>
         <p:txBody>
           <a:bodyPr/>
           <a:lstStyle/>
           <a:p>
-            <a:endParaRPr lang="en-US"/>
-          </a:p>
-        </p:txBody>
-      </p:sp>
-      <p:sp>
-        <p:nvSpPr>
-          <p:cNvPr id="4" name="Slide Number Placeholder 3">
-            <a:extLst>
-              <a:ext uri="{FF2B5EF4-FFF2-40B4-BE49-F238E27FC236}">
-                <a16:creationId xmlns:a16="http://schemas.microsoft.com/office/drawing/2014/main" id="{BD91CA00-8B5A-4B5F-AE21-CF0691D64D53}"/>
+            <a:pPr marL="0" indent="0">
+              <a:buNone/>
+            </a:pPr>
+            <a:r>
+              <a:rPr lang="vi-VN" b="1"/>
+              <a:t>3.2. Xây dựng mô hình</a:t>
+            </a:r>
+          </a:p>
+          <a:p>
+            <a:r>
+              <a:rPr lang="vi-VN"/>
+              <a:t>Nhánh quán tính: </a:t>
+            </a:r>
+          </a:p>
+          <a:p>
+            <a:pPr lvl="1"/>
+            <a:r>
+              <a:rPr lang="vi-VN"/>
+              <a:t>CNN 1D mã hóa cửa sổ 200×9 → embedding 128 chiều (khảo sát cùng CNN-LSTM, CNN-BiLSTM)</a:t>
+            </a:r>
+          </a:p>
+          <a:p>
+            <a:pPr lvl="1"/>
+            <a:r>
+              <a:rPr lang="vi-VN"/>
+              <a:t>Nhận dạng tập mở: anchor → cosine → z-norm cohort → sigmoid (hàm cos_znorm)</a:t>
+            </a:r>
+          </a:p>
+          <a:p>
+            <a:r>
+              <a:rPr lang="vi-VN"/>
+              <a:t>Nhánh touch 33 chiều (Random Forest) + dung hợp điểm</a:t>
+            </a:r>
+          </a:p>
+          <a:p>
+            <a:endParaRPr lang="vi-VN" sz="2400"/>
+          </a:p>
+          <a:p>
+            <a:pPr marL="0" indent="0">
+              <a:buNone/>
+            </a:pPr>
+            <a:endParaRPr lang="vi-VN"/>
+          </a:p>
+        </p:txBody>
+      </p:sp>
+      <p:sp>
+        <p:nvSpPr>
+          <p:cNvPr id="5" name="Slide Number Placeholder 4">
+            <a:extLst>
+              <a:ext uri="{FF2B5EF4-FFF2-40B4-BE49-F238E27FC236}">
+                <a16:creationId xmlns:a16="http://schemas.microsoft.com/office/drawing/2014/main" id="{7F5860C8-7DEC-B70C-66A2-7554912C5D46}"/>
               </a:ext>
             </a:extLst>
           </p:cNvPr>
@@ -5778,7 +7241,7 @@
     </p:spTree>
     <p:extLst>
       <p:ext uri="{BB962C8B-B14F-4D97-AF65-F5344CB8AC3E}">
-        <p14:creationId xmlns:p14="http://schemas.microsoft.com/office/powerpoint/2010/main" val="485500544"/>
+        <p14:creationId xmlns:p14="http://schemas.microsoft.com/office/powerpoint/2010/main" val="3157123402"/>
       </p:ext>
     </p:extLst>
   </p:cSld>
@@ -5793,7 +7256,13 @@
   <p:cSld>
     <p:spTree>
       <p:nvGrpSpPr>
-        <p:cNvPr id="1" name=""/>
+        <p:cNvPr id="1" name="">
+          <a:extLst>
+            <a:ext uri="{FF2B5EF4-FFF2-40B4-BE49-F238E27FC236}">
+              <a16:creationId xmlns:a16="http://schemas.microsoft.com/office/drawing/2014/main" id="{8F3DD39F-7D4B-8919-E95C-093A3E7D8B29}"/>
+            </a:ext>
+          </a:extLst>
+        </p:cNvPr>
         <p:cNvGrpSpPr/>
         <p:nvPr/>
       </p:nvGrpSpPr>
@@ -5810,7 +7279,7 @@
           <p:cNvPr id="2" name="Title 1">
             <a:extLst>
               <a:ext uri="{FF2B5EF4-FFF2-40B4-BE49-F238E27FC236}">
-                <a16:creationId xmlns:a16="http://schemas.microsoft.com/office/drawing/2014/main" id="{7BC5AD8A-1EA9-C7CE-D797-0A3D974FB867}"/>
+                <a16:creationId xmlns:a16="http://schemas.microsoft.com/office/drawing/2014/main" id="{30640617-7424-9516-7EA3-09E786B29819}"/>
               </a:ext>
             </a:extLst>
           </p:cNvPr>
@@ -5832,18 +7301,18 @@
       </p:sp>
       <p:sp>
         <p:nvSpPr>
-          <p:cNvPr id="3" name="Text Placeholder 2">
-            <a:extLst>
-              <a:ext uri="{FF2B5EF4-FFF2-40B4-BE49-F238E27FC236}">
-                <a16:creationId xmlns:a16="http://schemas.microsoft.com/office/drawing/2014/main" id="{734CFAC5-863F-C743-EE8D-B9564CC43E47}"/>
-              </a:ext>
-            </a:extLst>
-          </p:cNvPr>
-          <p:cNvSpPr>
-            <a:spLocks noGrp="1"/>
-          </p:cNvSpPr>
-          <p:nvPr>
-            <p:ph type="body" sz="quarter" idx="13"/>
+          <p:cNvPr id="3" name="Chart Placeholder 2">
+            <a:extLst>
+              <a:ext uri="{FF2B5EF4-FFF2-40B4-BE49-F238E27FC236}">
+                <a16:creationId xmlns:a16="http://schemas.microsoft.com/office/drawing/2014/main" id="{2CBB4C80-E123-AF8B-B6F8-D35F3192162D}"/>
+              </a:ext>
+            </a:extLst>
+          </p:cNvPr>
+          <p:cNvSpPr>
+            <a:spLocks noGrp="1"/>
+          </p:cNvSpPr>
+          <p:nvPr>
+            <p:ph type="chart" sz="quarter" idx="13"/>
           </p:nvPr>
         </p:nvSpPr>
         <p:spPr/>
@@ -5851,16 +7320,41 @@
           <a:bodyPr/>
           <a:lstStyle/>
           <a:p>
-            <a:endParaRPr lang="en-US"/>
-          </a:p>
-        </p:txBody>
-      </p:sp>
-      <p:sp>
-        <p:nvSpPr>
-          <p:cNvPr id="4" name="Slide Number Placeholder 3">
-            <a:extLst>
-              <a:ext uri="{FF2B5EF4-FFF2-40B4-BE49-F238E27FC236}">
-                <a16:creationId xmlns:a16="http://schemas.microsoft.com/office/drawing/2014/main" id="{F8DD1CE8-660D-F65D-7BA2-062181F1E9B0}"/>
+            <a:endParaRPr lang="vi-VN"/>
+          </a:p>
+        </p:txBody>
+      </p:sp>
+      <p:sp>
+        <p:nvSpPr>
+          <p:cNvPr id="4" name="Table Placeholder 3">
+            <a:extLst>
+              <a:ext uri="{FF2B5EF4-FFF2-40B4-BE49-F238E27FC236}">
+                <a16:creationId xmlns:a16="http://schemas.microsoft.com/office/drawing/2014/main" id="{0B0E9581-D575-41FD-9C1E-220AE5191B45}"/>
+              </a:ext>
+            </a:extLst>
+          </p:cNvPr>
+          <p:cNvSpPr>
+            <a:spLocks noGrp="1"/>
+          </p:cNvSpPr>
+          <p:nvPr>
+            <p:ph type="tbl" sz="quarter" idx="14"/>
+          </p:nvPr>
+        </p:nvSpPr>
+        <p:spPr/>
+        <p:txBody>
+          <a:bodyPr/>
+          <a:lstStyle/>
+          <a:p>
+            <a:endParaRPr lang="vi-VN"/>
+          </a:p>
+        </p:txBody>
+      </p:sp>
+      <p:sp>
+        <p:nvSpPr>
+          <p:cNvPr id="5" name="Slide Number Placeholder 4">
+            <a:extLst>
+              <a:ext uri="{FF2B5EF4-FFF2-40B4-BE49-F238E27FC236}">
+                <a16:creationId xmlns:a16="http://schemas.microsoft.com/office/drawing/2014/main" id="{5243B307-FEAD-6E88-B9FD-0F96E618221B}"/>
               </a:ext>
             </a:extLst>
           </p:cNvPr>
@@ -5888,7 +7382,7 @@
     </p:spTree>
     <p:extLst>
       <p:ext uri="{BB962C8B-B14F-4D97-AF65-F5344CB8AC3E}">
-        <p14:creationId xmlns:p14="http://schemas.microsoft.com/office/powerpoint/2010/main" val="3092516354"/>
+        <p14:creationId xmlns:p14="http://schemas.microsoft.com/office/powerpoint/2010/main" val="3164548458"/>
       </p:ext>
     </p:extLst>
   </p:cSld>
@@ -6784,15 +8278,6 @@
 </file>
 
 <file path=customXml/item1.xml><?xml version="1.0" encoding="utf-8"?>
-<?mso-contentType ?>
-<FormTemplates xmlns="http://schemas.microsoft.com/sharepoint/v3/contenttype/forms">
-  <Display>DocumentLibraryForm</Display>
-  <Edit>DocumentLibraryForm</Edit>
-  <New>DocumentLibraryForm</New>
-</FormTemplates>
-</file>
-
-<file path=customXml/item2.xml><?xml version="1.0" encoding="utf-8"?>
 <p:properties xmlns:p="http://schemas.microsoft.com/office/2006/metadata/properties" xmlns:xsi="http://www.w3.org/2001/XMLSchema-instance" xmlns:pc="http://schemas.microsoft.com/office/infopath/2007/PartnerControls">
   <documentManagement>
     <SharedWithUsers xmlns="e4770848-7955-4ec6-9f06-ace3904740ab">
@@ -6806,7 +8291,7 @@
 </p:properties>
 </file>
 
-<file path=customXml/item3.xml><?xml version="1.0" encoding="utf-8"?>
+<file path=customXml/item2.xml><?xml version="1.0" encoding="utf-8"?>
 <ct:contentTypeSchema xmlns:ct="http://schemas.microsoft.com/office/2006/metadata/contentType" xmlns:ma="http://schemas.microsoft.com/office/2006/metadata/properties/metaAttributes" ct:_="" ma:_="" ma:contentTypeName="Document" ma:contentTypeID="0x010100ECB19AD86CDF2D4DBF9DAD694EFBC09D" ma:contentTypeVersion="7" ma:contentTypeDescription="Create a new document." ma:contentTypeScope="" ma:versionID="6423fc3df46fff0625ec86a02e55459f">
   <xsd:schema xmlns:xsd="http://www.w3.org/2001/XMLSchema" xmlns:xs="http://www.w3.org/2001/XMLSchema" xmlns:p="http://schemas.microsoft.com/office/2006/metadata/properties" xmlns:ns2="757826ba-dfa3-48aa-98b2-1e988427fee5" xmlns:ns3="e4770848-7955-4ec6-9f06-ace3904740ab" targetNamespace="http://schemas.microsoft.com/office/2006/metadata/properties" ma:root="true" ma:fieldsID="24cf96f43bac35fd0bad3b1a63bec25f" ns2:_="" ns3:_="">
     <xsd:import namespace="757826ba-dfa3-48aa-98b2-1e988427fee5"/>
@@ -6989,15 +8474,16 @@
 </ct:contentTypeSchema>
 </file>
 
-<file path=customXml/itemProps1.xml><?xml version="1.0" encoding="utf-8"?>
-<ds:datastoreItem xmlns:ds="http://schemas.openxmlformats.org/officeDocument/2006/customXml" ds:itemID="{7ECC4DF4-9078-4FA4-84E7-1FE1D3C87610}">
-  <ds:schemaRefs>
-    <ds:schemaRef ds:uri="http://schemas.microsoft.com/sharepoint/v3/contenttype/forms"/>
-  </ds:schemaRefs>
-</ds:datastoreItem>
+<file path=customXml/item3.xml><?xml version="1.0" encoding="utf-8"?>
+<?mso-contentType ?>
+<FormTemplates xmlns="http://schemas.microsoft.com/sharepoint/v3/contenttype/forms">
+  <Display>DocumentLibraryForm</Display>
+  <Edit>DocumentLibraryForm</Edit>
+  <New>DocumentLibraryForm</New>
+</FormTemplates>
 </file>
 
-<file path=customXml/itemProps2.xml><?xml version="1.0" encoding="utf-8"?>
+<file path=customXml/itemProps1.xml><?xml version="1.0" encoding="utf-8"?>
 <ds:datastoreItem xmlns:ds="http://schemas.openxmlformats.org/officeDocument/2006/customXml" ds:itemID="{2B29E730-54C4-4C28-BED5-F21A5A17C36A}">
   <ds:schemaRefs>
     <ds:schemaRef ds:uri="c070d92c-e005-4177-a1a8-b2208be38bba"/>
@@ -7015,7 +8501,7 @@
 </ds:datastoreItem>
 </file>
 
-<file path=customXml/itemProps3.xml><?xml version="1.0" encoding="utf-8"?>
+<file path=customXml/itemProps2.xml><?xml version="1.0" encoding="utf-8"?>
 <ds:datastoreItem xmlns:ds="http://schemas.openxmlformats.org/officeDocument/2006/customXml" ds:itemID="{1238E738-BBF9-4972-8A16-48B0E68732EF}">
   <ds:schemaRefs>
     <ds:schemaRef ds:uri="http://schemas.microsoft.com/office/2006/metadata/contentType"/>
@@ -7032,4 +8518,12 @@
     <ds:schemaRef ds:uri="http://schemas.microsoft.com/internal/obd"/>
   </ds:schemaRefs>
 </ds:datastoreItem>
+</file>
+
+<file path=customXml/itemProps3.xml><?xml version="1.0" encoding="utf-8"?>
+<ds:datastoreItem xmlns:ds="http://schemas.openxmlformats.org/officeDocument/2006/customXml" ds:itemID="{7ECC4DF4-9078-4FA4-84E7-1FE1D3C87610}">
+  <ds:schemaRefs>
+    <ds:schemaRef ds:uri="http://schemas.microsoft.com/sharepoint/v3/contenttype/forms"/>
+  </ds:schemaRefs>
+</ds:datastoreItem>
 </file>
--- a/20225699_MaiVanDang_20252.pptx
+++ b/20225699_MaiVanDang_20252.pptx
@@ -5,10 +5,10 @@
     <p:sldMasterId id="2147483648" r:id="rId4"/>
   </p:sldMasterIdLst>
   <p:notesMasterIdLst>
-    <p:notesMasterId r:id="rId20"/>
+    <p:notesMasterId r:id="rId24"/>
   </p:notesMasterIdLst>
   <p:handoutMasterIdLst>
-    <p:handoutMasterId r:id="rId21"/>
+    <p:handoutMasterId r:id="rId25"/>
   </p:handoutMasterIdLst>
   <p:sldIdLst>
     <p:sldId id="259" r:id="rId5"/>
@@ -18,14 +18,18 @@
     <p:sldId id="258" r:id="rId9"/>
     <p:sldId id="264" r:id="rId10"/>
     <p:sldId id="271" r:id="rId11"/>
-    <p:sldId id="270" r:id="rId12"/>
-    <p:sldId id="269" r:id="rId13"/>
-    <p:sldId id="263" r:id="rId14"/>
-    <p:sldId id="265" r:id="rId15"/>
-    <p:sldId id="266" r:id="rId16"/>
-    <p:sldId id="267" r:id="rId17"/>
-    <p:sldId id="268" r:id="rId18"/>
-    <p:sldId id="262" r:id="rId19"/>
+    <p:sldId id="275" r:id="rId12"/>
+    <p:sldId id="270" r:id="rId13"/>
+    <p:sldId id="272" r:id="rId14"/>
+    <p:sldId id="273" r:id="rId15"/>
+    <p:sldId id="274" r:id="rId16"/>
+    <p:sldId id="269" r:id="rId17"/>
+    <p:sldId id="277" r:id="rId18"/>
+    <p:sldId id="278" r:id="rId19"/>
+    <p:sldId id="279" r:id="rId20"/>
+    <p:sldId id="280" r:id="rId21"/>
+    <p:sldId id="281" r:id="rId22"/>
+    <p:sldId id="262" r:id="rId23"/>
   </p:sldIdLst>
   <p:sldSz cx="12192000" cy="6858000"/>
   <p:notesSz cx="6858000" cy="9144000"/>
@@ -4497,7 +4501,13 @@
   <p:cSld>
     <p:spTree>
       <p:nvGrpSpPr>
-        <p:cNvPr id="1" name=""/>
+        <p:cNvPr id="1" name="">
+          <a:extLst>
+            <a:ext uri="{FF2B5EF4-FFF2-40B4-BE49-F238E27FC236}">
+              <a16:creationId xmlns:a16="http://schemas.microsoft.com/office/drawing/2014/main" id="{06A15200-B78D-54AF-1AA9-B3D2EC9ECD8B}"/>
+            </a:ext>
+          </a:extLst>
+        </p:cNvPr>
         <p:cNvGrpSpPr/>
         <p:nvPr/>
       </p:nvGrpSpPr>
@@ -4511,18 +4521,18 @@
       </p:grpSpPr>
       <p:sp>
         <p:nvSpPr>
-          <p:cNvPr id="2" name="Content Placeholder 1">
-            <a:extLst>
-              <a:ext uri="{FF2B5EF4-FFF2-40B4-BE49-F238E27FC236}">
-                <a16:creationId xmlns:a16="http://schemas.microsoft.com/office/drawing/2014/main" id="{5308E1B1-D9CD-415A-BCE5-B57F39B2F31D}"/>
-              </a:ext>
-            </a:extLst>
-          </p:cNvPr>
-          <p:cNvSpPr>
-            <a:spLocks noGrp="1"/>
-          </p:cNvSpPr>
-          <p:nvPr>
-            <p:ph sz="quarter" idx="13"/>
+          <p:cNvPr id="2" name="Title 1">
+            <a:extLst>
+              <a:ext uri="{FF2B5EF4-FFF2-40B4-BE49-F238E27FC236}">
+                <a16:creationId xmlns:a16="http://schemas.microsoft.com/office/drawing/2014/main" id="{611E9B7D-AF5D-F863-D05E-AB6607EA1C4D}"/>
+              </a:ext>
+            </a:extLst>
+          </p:cNvPr>
+          <p:cNvSpPr>
+            <a:spLocks noGrp="1"/>
+          </p:cNvSpPr>
+          <p:nvPr>
+            <p:ph type="title"/>
           </p:nvPr>
         </p:nvSpPr>
         <p:spPr/>
@@ -4530,41 +4540,74 @@
           <a:bodyPr/>
           <a:lstStyle/>
           <a:p>
+            <a:r>
+              <a:rPr lang="vi-VN"/>
+              <a:t>3. Xây dựng dữ liệu &amp; tiền xử lý</a:t>
+            </a:r>
             <a:endParaRPr lang="en-US"/>
           </a:p>
         </p:txBody>
       </p:sp>
       <p:sp>
         <p:nvSpPr>
-          <p:cNvPr id="3" name="Title 2">
-            <a:extLst>
-              <a:ext uri="{FF2B5EF4-FFF2-40B4-BE49-F238E27FC236}">
-                <a16:creationId xmlns:a16="http://schemas.microsoft.com/office/drawing/2014/main" id="{AD6941D0-D074-43AE-8875-C4BDC98ADB7F}"/>
-              </a:ext>
-            </a:extLst>
-          </p:cNvPr>
-          <p:cNvSpPr>
-            <a:spLocks noGrp="1"/>
-          </p:cNvSpPr>
-          <p:nvPr>
-            <p:ph type="title"/>
-          </p:nvPr>
-        </p:nvSpPr>
-        <p:spPr/>
+          <p:cNvPr id="3" name="Chart Placeholder 2">
+            <a:extLst>
+              <a:ext uri="{FF2B5EF4-FFF2-40B4-BE49-F238E27FC236}">
+                <a16:creationId xmlns:a16="http://schemas.microsoft.com/office/drawing/2014/main" id="{0D5B5F52-3A62-12F3-3DE7-ABFE179DE00B}"/>
+              </a:ext>
+            </a:extLst>
+          </p:cNvPr>
+          <p:cNvSpPr>
+            <a:spLocks noGrp="1"/>
+          </p:cNvSpPr>
+          <p:nvPr>
+            <p:ph type="chart" sz="quarter" idx="13"/>
+          </p:nvPr>
+        </p:nvSpPr>
+        <p:spPr>
+          <a:xfrm>
+            <a:off x="338735" y="1406525"/>
+            <a:ext cx="11514527" cy="4670425"/>
+          </a:xfrm>
+        </p:spPr>
         <p:txBody>
           <a:bodyPr/>
           <a:lstStyle/>
           <a:p>
-            <a:endParaRPr lang="en-US"/>
-          </a:p>
-        </p:txBody>
-      </p:sp>
-      <p:sp>
-        <p:nvSpPr>
-          <p:cNvPr id="4" name="Slide Number Placeholder 3">
-            <a:extLst>
-              <a:ext uri="{FF2B5EF4-FFF2-40B4-BE49-F238E27FC236}">
-                <a16:creationId xmlns:a16="http://schemas.microsoft.com/office/drawing/2014/main" id="{BD91CA00-8B5A-4B5F-AE21-CF0691D64D53}"/>
+            <a:pPr marL="0" indent="0">
+              <a:buNone/>
+            </a:pPr>
+            <a:r>
+              <a:rPr lang="vi-VN" b="1"/>
+              <a:t>3.2. Tiền xử lý dữ liệu</a:t>
+            </a:r>
+          </a:p>
+          <a:p>
+            <a:r>
+              <a:rPr lang="vi-VN" b="1"/>
+              <a:t>Cửa sổ trượt:</a:t>
+            </a:r>
+            <a:r>
+              <a:rPr lang="vi-VN"/>
+              <a:t> cắt thành cửa sổ </a:t>
+            </a:r>
+            <a:r>
+              <a:rPr lang="vi-VN" b="1"/>
+              <a:t>200 mẫu (~4 giây)</a:t>
+            </a:r>
+            <a:r>
+              <a:rPr lang="vi-VN"/>
+              <a:t>, bước trượt 20 → chồng lấn cao, tăng số mẫu</a:t>
+            </a:r>
+          </a:p>
+        </p:txBody>
+      </p:sp>
+      <p:sp>
+        <p:nvSpPr>
+          <p:cNvPr id="5" name="Slide Number Placeholder 4">
+            <a:extLst>
+              <a:ext uri="{FF2B5EF4-FFF2-40B4-BE49-F238E27FC236}">
+                <a16:creationId xmlns:a16="http://schemas.microsoft.com/office/drawing/2014/main" id="{4D07B7F5-BF20-4D21-7601-82EB5BA4F329}"/>
               </a:ext>
             </a:extLst>
           </p:cNvPr>
@@ -4589,10 +4632,46 @@
           </a:p>
         </p:txBody>
       </p:sp>
+      <p:pic>
+        <p:nvPicPr>
+          <p:cNvPr id="7" name="Hình ảnh 6">
+            <a:extLst>
+              <a:ext uri="{FF2B5EF4-FFF2-40B4-BE49-F238E27FC236}">
+                <a16:creationId xmlns:a16="http://schemas.microsoft.com/office/drawing/2014/main" id="{7BAE6879-9E47-89A9-F27B-E654ACEBC583}"/>
+              </a:ext>
+            </a:extLst>
+          </p:cNvPr>
+          <p:cNvPicPr>
+            <a:picLocks noChangeAspect="1"/>
+          </p:cNvPicPr>
+          <p:nvPr/>
+        </p:nvPicPr>
+        <p:blipFill>
+          <a:blip r:embed="rId2">
+            <a:extLst>
+              <a:ext uri="{28A0092B-C50C-407E-A947-70E740481C1C}">
+                <a14:useLocalDpi xmlns:a14="http://schemas.microsoft.com/office/drawing/2010/main" val="0"/>
+              </a:ext>
+            </a:extLst>
+          </a:blip>
+          <a:stretch>
+            <a:fillRect/>
+          </a:stretch>
+        </p:blipFill>
+        <p:spPr>
+          <a:xfrm>
+            <a:off x="2359671" y="2732743"/>
+            <a:ext cx="7181712" cy="3552169"/>
+          </a:xfrm>
+          <a:prstGeom prst="rect">
+            <a:avLst/>
+          </a:prstGeom>
+        </p:spPr>
+      </p:pic>
     </p:spTree>
     <p:extLst>
       <p:ext uri="{BB962C8B-B14F-4D97-AF65-F5344CB8AC3E}">
-        <p14:creationId xmlns:p14="http://schemas.microsoft.com/office/powerpoint/2010/main" val="485500544"/>
+        <p14:creationId xmlns:p14="http://schemas.microsoft.com/office/powerpoint/2010/main" val="4227910138"/>
       </p:ext>
     </p:extLst>
   </p:cSld>
@@ -4607,7 +4686,13 @@
   <p:cSld>
     <p:spTree>
       <p:nvGrpSpPr>
-        <p:cNvPr id="1" name=""/>
+        <p:cNvPr id="1" name="">
+          <a:extLst>
+            <a:ext uri="{FF2B5EF4-FFF2-40B4-BE49-F238E27FC236}">
+              <a16:creationId xmlns:a16="http://schemas.microsoft.com/office/drawing/2014/main" id="{395413B4-55AE-B51F-6B33-1086A97DBA15}"/>
+            </a:ext>
+          </a:extLst>
+        </p:cNvPr>
         <p:cNvGrpSpPr/>
         <p:nvPr/>
       </p:nvGrpSpPr>
@@ -4624,7 +4709,7 @@
           <p:cNvPr id="2" name="Title 1">
             <a:extLst>
               <a:ext uri="{FF2B5EF4-FFF2-40B4-BE49-F238E27FC236}">
-                <a16:creationId xmlns:a16="http://schemas.microsoft.com/office/drawing/2014/main" id="{7BC5AD8A-1EA9-C7CE-D797-0A3D974FB867}"/>
+                <a16:creationId xmlns:a16="http://schemas.microsoft.com/office/drawing/2014/main" id="{C572CE7E-E5B9-ADF8-44D4-45CF1939A06C}"/>
               </a:ext>
             </a:extLst>
           </p:cNvPr>
@@ -4640,41 +4725,74 @@
           <a:bodyPr/>
           <a:lstStyle/>
           <a:p>
+            <a:r>
+              <a:rPr lang="vi-VN"/>
+              <a:t>3. Xây dựng dữ liệu &amp; tiền xử lý</a:t>
+            </a:r>
             <a:endParaRPr lang="en-US"/>
           </a:p>
         </p:txBody>
       </p:sp>
       <p:sp>
         <p:nvSpPr>
-          <p:cNvPr id="3" name="Text Placeholder 2">
-            <a:extLst>
-              <a:ext uri="{FF2B5EF4-FFF2-40B4-BE49-F238E27FC236}">
-                <a16:creationId xmlns:a16="http://schemas.microsoft.com/office/drawing/2014/main" id="{734CFAC5-863F-C743-EE8D-B9564CC43E47}"/>
-              </a:ext>
-            </a:extLst>
-          </p:cNvPr>
-          <p:cNvSpPr>
-            <a:spLocks noGrp="1"/>
-          </p:cNvSpPr>
-          <p:nvPr>
-            <p:ph type="body" sz="quarter" idx="13"/>
-          </p:nvPr>
-        </p:nvSpPr>
-        <p:spPr/>
+          <p:cNvPr id="3" name="Chart Placeholder 2">
+            <a:extLst>
+              <a:ext uri="{FF2B5EF4-FFF2-40B4-BE49-F238E27FC236}">
+                <a16:creationId xmlns:a16="http://schemas.microsoft.com/office/drawing/2014/main" id="{EF0125EF-5E46-4025-CE5E-CFEBD6434D05}"/>
+              </a:ext>
+            </a:extLst>
+          </p:cNvPr>
+          <p:cNvSpPr>
+            <a:spLocks noGrp="1"/>
+          </p:cNvSpPr>
+          <p:nvPr>
+            <p:ph type="chart" sz="quarter" idx="13"/>
+          </p:nvPr>
+        </p:nvSpPr>
+        <p:spPr>
+          <a:xfrm>
+            <a:off x="338735" y="1406525"/>
+            <a:ext cx="11514527" cy="4670425"/>
+          </a:xfrm>
+        </p:spPr>
         <p:txBody>
           <a:bodyPr/>
           <a:lstStyle/>
           <a:p>
-            <a:endParaRPr lang="en-US"/>
-          </a:p>
-        </p:txBody>
-      </p:sp>
-      <p:sp>
-        <p:nvSpPr>
-          <p:cNvPr id="4" name="Slide Number Placeholder 3">
-            <a:extLst>
-              <a:ext uri="{FF2B5EF4-FFF2-40B4-BE49-F238E27FC236}">
-                <a16:creationId xmlns:a16="http://schemas.microsoft.com/office/drawing/2014/main" id="{F8DD1CE8-660D-F65D-7BA2-062181F1E9B0}"/>
+            <a:pPr marL="0" indent="0">
+              <a:buNone/>
+            </a:pPr>
+            <a:r>
+              <a:rPr lang="vi-VN" b="1"/>
+              <a:t>3.2. Tiền xử lý dữ liệu</a:t>
+            </a:r>
+          </a:p>
+          <a:p>
+            <a:r>
+              <a:rPr lang="vi-VN" b="1"/>
+              <a:t>Chuẩn hóa z-score</a:t>
+            </a:r>
+            <a:r>
+              <a:rPr lang="vi-VN"/>
+              <a:t> theo từng cửa sổ → đưa mọi thiết bị/người về </a:t>
+            </a:r>
+            <a:r>
+              <a:rPr lang="vi-VN" b="1"/>
+              <a:t>cùng thang</a:t>
+            </a:r>
+            <a:r>
+              <a:rPr lang="vi-VN"/>
+              <a:t>, khử lệch nền</a:t>
+            </a:r>
+          </a:p>
+        </p:txBody>
+      </p:sp>
+      <p:sp>
+        <p:nvSpPr>
+          <p:cNvPr id="5" name="Slide Number Placeholder 4">
+            <a:extLst>
+              <a:ext uri="{FF2B5EF4-FFF2-40B4-BE49-F238E27FC236}">
+                <a16:creationId xmlns:a16="http://schemas.microsoft.com/office/drawing/2014/main" id="{53365A30-78C2-DB44-A77E-6FCE714EC25D}"/>
               </a:ext>
             </a:extLst>
           </p:cNvPr>
@@ -4699,10 +4817,152 @@
           </a:p>
         </p:txBody>
       </p:sp>
+      <p:pic>
+        <p:nvPicPr>
+          <p:cNvPr id="6" name="Hình ảnh 5">
+            <a:extLst>
+              <a:ext uri="{FF2B5EF4-FFF2-40B4-BE49-F238E27FC236}">
+                <a16:creationId xmlns:a16="http://schemas.microsoft.com/office/drawing/2014/main" id="{046E8789-42CF-0778-DB5B-8E966CD13BA7}"/>
+              </a:ext>
+            </a:extLst>
+          </p:cNvPr>
+          <p:cNvPicPr>
+            <a:picLocks noChangeAspect="1"/>
+          </p:cNvPicPr>
+          <p:nvPr/>
+        </p:nvPicPr>
+        <p:blipFill>
+          <a:blip r:embed="rId2">
+            <a:extLst>
+              <a:ext uri="{28A0092B-C50C-407E-A947-70E740481C1C}">
+                <a14:useLocalDpi xmlns:a14="http://schemas.microsoft.com/office/drawing/2010/main" val="0"/>
+              </a:ext>
+            </a:extLst>
+          </a:blip>
+          <a:stretch>
+            <a:fillRect/>
+          </a:stretch>
+        </p:blipFill>
+        <p:spPr>
+          <a:xfrm>
+            <a:off x="894084" y="2888672"/>
+            <a:ext cx="4866807" cy="2841192"/>
+          </a:xfrm>
+          <a:prstGeom prst="rect">
+            <a:avLst/>
+          </a:prstGeom>
+        </p:spPr>
+      </p:pic>
+      <p:pic>
+        <p:nvPicPr>
+          <p:cNvPr id="9" name="Hình ảnh 8">
+            <a:extLst>
+              <a:ext uri="{FF2B5EF4-FFF2-40B4-BE49-F238E27FC236}">
+                <a16:creationId xmlns:a16="http://schemas.microsoft.com/office/drawing/2014/main" id="{69356DE4-BB3A-B1E2-2942-D84C7FFD6EDD}"/>
+              </a:ext>
+            </a:extLst>
+          </p:cNvPr>
+          <p:cNvPicPr>
+            <a:picLocks noChangeAspect="1"/>
+          </p:cNvPicPr>
+          <p:nvPr/>
+        </p:nvPicPr>
+        <p:blipFill>
+          <a:blip r:embed="rId3">
+            <a:extLst>
+              <a:ext uri="{28A0092B-C50C-407E-A947-70E740481C1C}">
+                <a14:useLocalDpi xmlns:a14="http://schemas.microsoft.com/office/drawing/2010/main" val="0"/>
+              </a:ext>
+            </a:extLst>
+          </a:blip>
+          <a:stretch>
+            <a:fillRect/>
+          </a:stretch>
+        </p:blipFill>
+        <p:spPr>
+          <a:xfrm>
+            <a:off x="6431109" y="2888672"/>
+            <a:ext cx="4866807" cy="2882231"/>
+          </a:xfrm>
+          <a:prstGeom prst="rect">
+            <a:avLst/>
+          </a:prstGeom>
+        </p:spPr>
+      </p:pic>
+      <p:sp>
+        <p:nvSpPr>
+          <p:cNvPr id="10" name="Hộp Văn bản 9">
+            <a:extLst>
+              <a:ext uri="{FF2B5EF4-FFF2-40B4-BE49-F238E27FC236}">
+                <a16:creationId xmlns:a16="http://schemas.microsoft.com/office/drawing/2014/main" id="{AE621519-E500-DB68-083F-2B7D3102C17C}"/>
+              </a:ext>
+            </a:extLst>
+          </p:cNvPr>
+          <p:cNvSpPr txBox="1"/>
+          <p:nvPr/>
+        </p:nvSpPr>
+        <p:spPr>
+          <a:xfrm>
+            <a:off x="2077786" y="5700136"/>
+            <a:ext cx="2499402" cy="338554"/>
+          </a:xfrm>
+          <a:prstGeom prst="rect">
+            <a:avLst/>
+          </a:prstGeom>
+          <a:noFill/>
+        </p:spPr>
+        <p:txBody>
+          <a:bodyPr wrap="none" rtlCol="0">
+            <a:spAutoFit/>
+          </a:bodyPr>
+          <a:lstStyle/>
+          <a:p>
+            <a:r>
+              <a:rPr lang="vi-VN" sz="1600"/>
+              <a:t>Tín hiệu trước chuẩn hóa</a:t>
+            </a:r>
+          </a:p>
+        </p:txBody>
+      </p:sp>
+      <p:sp>
+        <p:nvSpPr>
+          <p:cNvPr id="11" name="Hộp Văn bản 10">
+            <a:extLst>
+              <a:ext uri="{FF2B5EF4-FFF2-40B4-BE49-F238E27FC236}">
+                <a16:creationId xmlns:a16="http://schemas.microsoft.com/office/drawing/2014/main" id="{EE22FED4-410F-B1E2-E706-590588283A33}"/>
+              </a:ext>
+            </a:extLst>
+          </p:cNvPr>
+          <p:cNvSpPr txBox="1"/>
+          <p:nvPr/>
+        </p:nvSpPr>
+        <p:spPr>
+          <a:xfrm>
+            <a:off x="7992570" y="5700136"/>
+            <a:ext cx="2327881" cy="338554"/>
+          </a:xfrm>
+          <a:prstGeom prst="rect">
+            <a:avLst/>
+          </a:prstGeom>
+          <a:noFill/>
+        </p:spPr>
+        <p:txBody>
+          <a:bodyPr wrap="none" rtlCol="0">
+            <a:spAutoFit/>
+          </a:bodyPr>
+          <a:lstStyle/>
+          <a:p>
+            <a:r>
+              <a:rPr lang="vi-VN" sz="1600"/>
+              <a:t>Tín hiệu sau chuẩn hóa</a:t>
+            </a:r>
+          </a:p>
+        </p:txBody>
+      </p:sp>
     </p:spTree>
     <p:extLst>
       <p:ext uri="{BB962C8B-B14F-4D97-AF65-F5344CB8AC3E}">
-        <p14:creationId xmlns:p14="http://schemas.microsoft.com/office/powerpoint/2010/main" val="3092516354"/>
+        <p14:creationId xmlns:p14="http://schemas.microsoft.com/office/powerpoint/2010/main" val="4038106281"/>
       </p:ext>
     </p:extLst>
   </p:cSld>
@@ -4717,7 +4977,13 @@
   <p:cSld>
     <p:spTree>
       <p:nvGrpSpPr>
-        <p:cNvPr id="1" name=""/>
+        <p:cNvPr id="1" name="">
+          <a:extLst>
+            <a:ext uri="{FF2B5EF4-FFF2-40B4-BE49-F238E27FC236}">
+              <a16:creationId xmlns:a16="http://schemas.microsoft.com/office/drawing/2014/main" id="{78F4C009-2FE9-E6A0-B4FA-0E83813AA0E6}"/>
+            </a:ext>
+          </a:extLst>
+        </p:cNvPr>
         <p:cNvGrpSpPr/>
         <p:nvPr/>
       </p:nvGrpSpPr>
@@ -4731,10 +4997,95 @@
       </p:grpSpPr>
       <p:sp>
         <p:nvSpPr>
-          <p:cNvPr id="2" name="Slide Number Placeholder 1">
-            <a:extLst>
-              <a:ext uri="{FF2B5EF4-FFF2-40B4-BE49-F238E27FC236}">
-                <a16:creationId xmlns:a16="http://schemas.microsoft.com/office/drawing/2014/main" id="{3F787B8F-671E-899B-3B95-4CCE696DE9CF}"/>
+          <p:cNvPr id="2" name="Title 1">
+            <a:extLst>
+              <a:ext uri="{FF2B5EF4-FFF2-40B4-BE49-F238E27FC236}">
+                <a16:creationId xmlns:a16="http://schemas.microsoft.com/office/drawing/2014/main" id="{62130D06-9E8B-0981-2757-8BC660011764}"/>
+              </a:ext>
+            </a:extLst>
+          </p:cNvPr>
+          <p:cNvSpPr>
+            <a:spLocks noGrp="1"/>
+          </p:cNvSpPr>
+          <p:nvPr>
+            <p:ph type="title"/>
+          </p:nvPr>
+        </p:nvSpPr>
+        <p:spPr/>
+        <p:txBody>
+          <a:bodyPr/>
+          <a:lstStyle/>
+          <a:p>
+            <a:r>
+              <a:rPr lang="vi-VN"/>
+              <a:t>3. Xây dựng dữ liệu &amp; tiền xử lý</a:t>
+            </a:r>
+            <a:endParaRPr lang="en-US"/>
+          </a:p>
+        </p:txBody>
+      </p:sp>
+      <p:sp>
+        <p:nvSpPr>
+          <p:cNvPr id="3" name="Chart Placeholder 2">
+            <a:extLst>
+              <a:ext uri="{FF2B5EF4-FFF2-40B4-BE49-F238E27FC236}">
+                <a16:creationId xmlns:a16="http://schemas.microsoft.com/office/drawing/2014/main" id="{C0BBADCF-D5C6-606C-D8FA-14ECDA5427DE}"/>
+              </a:ext>
+            </a:extLst>
+          </p:cNvPr>
+          <p:cNvSpPr>
+            <a:spLocks noGrp="1"/>
+          </p:cNvSpPr>
+          <p:nvPr>
+            <p:ph type="chart" sz="quarter" idx="13"/>
+          </p:nvPr>
+        </p:nvSpPr>
+        <p:spPr>
+          <a:xfrm>
+            <a:off x="338735" y="1406525"/>
+            <a:ext cx="11514527" cy="4670425"/>
+          </a:xfrm>
+        </p:spPr>
+        <p:txBody>
+          <a:bodyPr/>
+          <a:lstStyle/>
+          <a:p>
+            <a:pPr marL="0" indent="0">
+              <a:buNone/>
+            </a:pPr>
+            <a:r>
+              <a:rPr lang="vi-VN" sz="2400" b="1"/>
+              <a:t>3.2. Tiền xử lý dữ liệu</a:t>
+            </a:r>
+          </a:p>
+          <a:p>
+            <a:r>
+              <a:rPr lang="vi-VN" sz="2400" b="1"/>
+              <a:t>Kết quả: </a:t>
+            </a:r>
+          </a:p>
+          <a:p>
+            <a:pPr lvl="1"/>
+            <a:r>
+              <a:rPr lang="vi-VN"/>
+              <a:t>Chỉ đi bộ: 54.823 cửa sổ</a:t>
+            </a:r>
+          </a:p>
+          <a:p>
+            <a:pPr lvl="1"/>
+            <a:r>
+              <a:rPr lang="vi-VN"/>
+              <a:t>Toàn bộ: 163.145 cửa sổ</a:t>
+            </a:r>
+          </a:p>
+        </p:txBody>
+      </p:sp>
+      <p:sp>
+        <p:nvSpPr>
+          <p:cNvPr id="5" name="Slide Number Placeholder 4">
+            <a:extLst>
+              <a:ext uri="{FF2B5EF4-FFF2-40B4-BE49-F238E27FC236}">
+                <a16:creationId xmlns:a16="http://schemas.microsoft.com/office/drawing/2014/main" id="{CC3A48A2-EF0D-780A-93D0-BC3DED5249EF}"/>
               </a:ext>
             </a:extLst>
           </p:cNvPr>
@@ -4759,85 +5110,46 @@
           </a:p>
         </p:txBody>
       </p:sp>
-      <p:sp>
-        <p:nvSpPr>
-          <p:cNvPr id="3" name="Title 2">
-            <a:extLst>
-              <a:ext uri="{FF2B5EF4-FFF2-40B4-BE49-F238E27FC236}">
-                <a16:creationId xmlns:a16="http://schemas.microsoft.com/office/drawing/2014/main" id="{57BA6010-86B5-CA9E-6538-49958090D5E1}"/>
-              </a:ext>
-            </a:extLst>
-          </p:cNvPr>
-          <p:cNvSpPr>
-            <a:spLocks noGrp="1"/>
-          </p:cNvSpPr>
-          <p:nvPr>
-            <p:ph type="title"/>
-          </p:nvPr>
-        </p:nvSpPr>
-        <p:spPr/>
-        <p:txBody>
-          <a:bodyPr/>
-          <a:lstStyle/>
-          <a:p>
-            <a:endParaRPr lang="en-US"/>
-          </a:p>
-        </p:txBody>
-      </p:sp>
-      <p:sp>
-        <p:nvSpPr>
-          <p:cNvPr id="4" name="Chart Placeholder 3">
-            <a:extLst>
-              <a:ext uri="{FF2B5EF4-FFF2-40B4-BE49-F238E27FC236}">
-                <a16:creationId xmlns:a16="http://schemas.microsoft.com/office/drawing/2014/main" id="{C8E2D656-4DFD-D837-76D3-A143B0106EB5}"/>
-              </a:ext>
-            </a:extLst>
-          </p:cNvPr>
-          <p:cNvSpPr>
-            <a:spLocks noGrp="1"/>
-          </p:cNvSpPr>
-          <p:nvPr>
-            <p:ph type="chart" sz="quarter" idx="13"/>
-          </p:nvPr>
-        </p:nvSpPr>
-        <p:spPr/>
-        <p:txBody>
-          <a:bodyPr/>
-          <a:lstStyle/>
-          <a:p>
-            <a:endParaRPr lang="vi-VN"/>
-          </a:p>
-        </p:txBody>
-      </p:sp>
-      <p:sp>
-        <p:nvSpPr>
-          <p:cNvPr id="5" name="Picture Placeholder 4">
-            <a:extLst>
-              <a:ext uri="{FF2B5EF4-FFF2-40B4-BE49-F238E27FC236}">
-                <a16:creationId xmlns:a16="http://schemas.microsoft.com/office/drawing/2014/main" id="{9CBAF409-B126-D20D-BE76-1D4AFBEB4A86}"/>
-              </a:ext>
-            </a:extLst>
-          </p:cNvPr>
-          <p:cNvSpPr>
-            <a:spLocks noGrp="1"/>
-          </p:cNvSpPr>
-          <p:nvPr>
-            <p:ph type="pic" sz="quarter" idx="14"/>
-          </p:nvPr>
-        </p:nvSpPr>
-        <p:spPr/>
-        <p:txBody>
-          <a:bodyPr/>
-          <a:lstStyle/>
-          <a:p>
-            <a:endParaRPr lang="vi-VN"/>
-          </a:p>
-        </p:txBody>
-      </p:sp>
+      <p:pic>
+        <p:nvPicPr>
+          <p:cNvPr id="7" name="Hình ảnh 6">
+            <a:extLst>
+              <a:ext uri="{FF2B5EF4-FFF2-40B4-BE49-F238E27FC236}">
+                <a16:creationId xmlns:a16="http://schemas.microsoft.com/office/drawing/2014/main" id="{7B9F5FCD-9152-7B60-01D3-13549C0940D6}"/>
+              </a:ext>
+            </a:extLst>
+          </p:cNvPr>
+          <p:cNvPicPr>
+            <a:picLocks noChangeAspect="1"/>
+          </p:cNvPicPr>
+          <p:nvPr/>
+        </p:nvPicPr>
+        <p:blipFill>
+          <a:blip r:embed="rId2">
+            <a:extLst>
+              <a:ext uri="{28A0092B-C50C-407E-A947-70E740481C1C}">
+                <a14:useLocalDpi xmlns:a14="http://schemas.microsoft.com/office/drawing/2010/main" val="0"/>
+              </a:ext>
+            </a:extLst>
+          </a:blip>
+          <a:stretch>
+            <a:fillRect/>
+          </a:stretch>
+        </p:blipFill>
+        <p:spPr>
+          <a:xfrm>
+            <a:off x="3071721" y="3063341"/>
+            <a:ext cx="4178195" cy="3221571"/>
+          </a:xfrm>
+          <a:prstGeom prst="rect">
+            <a:avLst/>
+          </a:prstGeom>
+        </p:spPr>
+      </p:pic>
     </p:spTree>
     <p:extLst>
       <p:ext uri="{BB962C8B-B14F-4D97-AF65-F5344CB8AC3E}">
-        <p14:creationId xmlns:p14="http://schemas.microsoft.com/office/powerpoint/2010/main" val="428433212"/>
+        <p14:creationId xmlns:p14="http://schemas.microsoft.com/office/powerpoint/2010/main" val="297346780"/>
       </p:ext>
     </p:extLst>
   </p:cSld>
@@ -4852,7 +5164,13 @@
   <p:cSld>
     <p:spTree>
       <p:nvGrpSpPr>
-        <p:cNvPr id="1" name=""/>
+        <p:cNvPr id="1" name="">
+          <a:extLst>
+            <a:ext uri="{FF2B5EF4-FFF2-40B4-BE49-F238E27FC236}">
+              <a16:creationId xmlns:a16="http://schemas.microsoft.com/office/drawing/2014/main" id="{8F3DD39F-7D4B-8919-E95C-093A3E7D8B29}"/>
+            </a:ext>
+          </a:extLst>
+        </p:cNvPr>
         <p:cNvGrpSpPr/>
         <p:nvPr/>
       </p:nvGrpSpPr>
@@ -4869,7 +5187,7 @@
           <p:cNvPr id="2" name="Title 1">
             <a:extLst>
               <a:ext uri="{FF2B5EF4-FFF2-40B4-BE49-F238E27FC236}">
-                <a16:creationId xmlns:a16="http://schemas.microsoft.com/office/drawing/2014/main" id="{56EBCDCA-26D1-DE31-7955-F13FF981A1DC}"/>
+                <a16:creationId xmlns:a16="http://schemas.microsoft.com/office/drawing/2014/main" id="{30640617-7424-9516-7EA3-09E786B29819}"/>
               </a:ext>
             </a:extLst>
           </p:cNvPr>
@@ -4885,41 +5203,86 @@
           <a:bodyPr/>
           <a:lstStyle/>
           <a:p>
+            <a:r>
+              <a:rPr lang="vi-VN"/>
+              <a:t>4. Xây dựng mô hình</a:t>
+            </a:r>
             <a:endParaRPr lang="en-US"/>
           </a:p>
         </p:txBody>
       </p:sp>
       <p:sp>
         <p:nvSpPr>
-          <p:cNvPr id="3" name="Text Placeholder 2">
-            <a:extLst>
-              <a:ext uri="{FF2B5EF4-FFF2-40B4-BE49-F238E27FC236}">
-                <a16:creationId xmlns:a16="http://schemas.microsoft.com/office/drawing/2014/main" id="{ED744802-0381-50A3-7C85-B7B6ED4EFE1B}"/>
-              </a:ext>
-            </a:extLst>
-          </p:cNvPr>
-          <p:cNvSpPr>
-            <a:spLocks noGrp="1"/>
-          </p:cNvSpPr>
-          <p:nvPr>
-            <p:ph type="body" sz="quarter" idx="13"/>
-          </p:nvPr>
-        </p:nvSpPr>
-        <p:spPr/>
+          <p:cNvPr id="3" name="Chart Placeholder 2">
+            <a:extLst>
+              <a:ext uri="{FF2B5EF4-FFF2-40B4-BE49-F238E27FC236}">
+                <a16:creationId xmlns:a16="http://schemas.microsoft.com/office/drawing/2014/main" id="{2CBB4C80-E123-AF8B-B6F8-D35F3192162D}"/>
+              </a:ext>
+            </a:extLst>
+          </p:cNvPr>
+          <p:cNvSpPr>
+            <a:spLocks noGrp="1"/>
+          </p:cNvSpPr>
+          <p:nvPr>
+            <p:ph type="chart" sz="quarter" idx="13"/>
+          </p:nvPr>
+        </p:nvSpPr>
+        <p:spPr>
+          <a:xfrm>
+            <a:off x="338735" y="1406525"/>
+            <a:ext cx="11309473" cy="4670425"/>
+          </a:xfrm>
+        </p:spPr>
         <p:txBody>
           <a:bodyPr/>
           <a:lstStyle/>
           <a:p>
-            <a:endParaRPr lang="en-US"/>
-          </a:p>
-        </p:txBody>
-      </p:sp>
-      <p:sp>
-        <p:nvSpPr>
-          <p:cNvPr id="4" name="Slide Number Placeholder 3">
-            <a:extLst>
-              <a:ext uri="{FF2B5EF4-FFF2-40B4-BE49-F238E27FC236}">
-                <a16:creationId xmlns:a16="http://schemas.microsoft.com/office/drawing/2014/main" id="{F830FB4F-C0E4-5A49-AA97-BCAA527E88FD}"/>
+            <a:r>
+              <a:rPr lang="vi-VN" sz="2400"/>
+              <a:t>CNN 1D mã hóa cửa sổ 200×9 </a:t>
+            </a:r>
+          </a:p>
+          <a:p>
+            <a:pPr marL="0" indent="0">
+              <a:buNone/>
+            </a:pPr>
+            <a:r>
+              <a:rPr lang="vi-VN" sz="2400"/>
+              <a:t>   → embedding 128 chiều (khảo sát cùng CNN-LSTM, CNN-BiLSTM)</a:t>
+            </a:r>
+          </a:p>
+          <a:p>
+            <a:r>
+              <a:rPr lang="vi-VN" sz="2400"/>
+              <a:t>Nhận dạng tập mở: </a:t>
+            </a:r>
+          </a:p>
+          <a:p>
+            <a:pPr marL="0" indent="0">
+              <a:buNone/>
+            </a:pPr>
+            <a:r>
+              <a:rPr lang="vi-VN" sz="2400"/>
+              <a:t>   anchor → cosine → z-norm cohort → sigmoid (hàm cos_znorm)</a:t>
+            </a:r>
+          </a:p>
+          <a:p>
+            <a:r>
+              <a:rPr lang="vi-VN" sz="2400"/>
+              <a:t>Nhánh touch 33 chiều (Random Forest) + dung hợp — vai trò đối chứng</a:t>
+            </a:r>
+          </a:p>
+          <a:p>
+            <a:endParaRPr lang="vi-VN" sz="2400"/>
+          </a:p>
+        </p:txBody>
+      </p:sp>
+      <p:sp>
+        <p:nvSpPr>
+          <p:cNvPr id="5" name="Slide Number Placeholder 4">
+            <a:extLst>
+              <a:ext uri="{FF2B5EF4-FFF2-40B4-BE49-F238E27FC236}">
+                <a16:creationId xmlns:a16="http://schemas.microsoft.com/office/drawing/2014/main" id="{5243B307-FEAD-6E88-B9FD-0F96E618221B}"/>
               </a:ext>
             </a:extLst>
           </p:cNvPr>
@@ -4944,10 +5307,287 @@
           </a:p>
         </p:txBody>
       </p:sp>
+      <p:graphicFrame>
+        <p:nvGraphicFramePr>
+          <p:cNvPr id="7" name="Bảng 6">
+            <a:extLst>
+              <a:ext uri="{FF2B5EF4-FFF2-40B4-BE49-F238E27FC236}">
+                <a16:creationId xmlns:a16="http://schemas.microsoft.com/office/drawing/2014/main" id="{5EC13E64-71B9-C8C4-77DD-44BBEB887576}"/>
+              </a:ext>
+            </a:extLst>
+          </p:cNvPr>
+          <p:cNvGraphicFramePr>
+            <a:graphicFrameLocks noGrp="1"/>
+          </p:cNvGraphicFramePr>
+          <p:nvPr>
+            <p:extLst>
+              <p:ext uri="{D42A27DB-BD31-4B8C-83A1-F6EECF244321}">
+                <p14:modId xmlns:p14="http://schemas.microsoft.com/office/powerpoint/2010/main" val="4023303805"/>
+              </p:ext>
+            </p:extLst>
+          </p:nvPr>
+        </p:nvGraphicFramePr>
+        <p:xfrm>
+          <a:off x="1668318" y="3968115"/>
+          <a:ext cx="8127999" cy="1483360"/>
+        </p:xfrm>
+        <a:graphic>
+          <a:graphicData uri="http://schemas.openxmlformats.org/drawingml/2006/table">
+            <a:tbl>
+              <a:tblPr firstRow="1" bandRow="1">
+                <a:tableStyleId>{5C22544A-7EE6-4342-B048-85BDC9FD1C3A}</a:tableStyleId>
+              </a:tblPr>
+              <a:tblGrid>
+                <a:gridCol w="2709333">
+                  <a:extLst>
+                    <a:ext uri="{9D8B030D-6E8A-4147-A177-3AD203B41FA5}">
+                      <a16:colId xmlns:a16="http://schemas.microsoft.com/office/drawing/2014/main" val="843245035"/>
+                    </a:ext>
+                  </a:extLst>
+                </a:gridCol>
+                <a:gridCol w="2709333">
+                  <a:extLst>
+                    <a:ext uri="{9D8B030D-6E8A-4147-A177-3AD203B41FA5}">
+                      <a16:colId xmlns:a16="http://schemas.microsoft.com/office/drawing/2014/main" val="774648384"/>
+                    </a:ext>
+                  </a:extLst>
+                </a:gridCol>
+                <a:gridCol w="2709333">
+                  <a:extLst>
+                    <a:ext uri="{9D8B030D-6E8A-4147-A177-3AD203B41FA5}">
+                      <a16:colId xmlns:a16="http://schemas.microsoft.com/office/drawing/2014/main" val="180807663"/>
+                    </a:ext>
+                  </a:extLst>
+                </a:gridCol>
+              </a:tblGrid>
+              <a:tr h="370840">
+                <a:tc>
+                  <a:txBody>
+                    <a:bodyPr/>
+                    <a:lstStyle/>
+                    <a:p>
+                      <a:r>
+                        <a:rPr lang="vi-VN"/>
+                        <a:t>Kiến trúc</a:t>
+                      </a:r>
+                    </a:p>
+                  </a:txBody>
+                  <a:tcPr/>
+                </a:tc>
+                <a:tc>
+                  <a:txBody>
+                    <a:bodyPr/>
+                    <a:lstStyle/>
+                    <a:p>
+                      <a:r>
+                        <a:rPr lang="vi-VN"/>
+                        <a:t>Số tham số</a:t>
+                      </a:r>
+                    </a:p>
+                  </a:txBody>
+                  <a:tcPr/>
+                </a:tc>
+                <a:tc>
+                  <a:txBody>
+                    <a:bodyPr/>
+                    <a:lstStyle/>
+                    <a:p>
+                      <a:r>
+                        <a:rPr lang="vi-VN"/>
+                        <a:t>Dung lượng</a:t>
+                      </a:r>
+                    </a:p>
+                  </a:txBody>
+                  <a:tcPr/>
+                </a:tc>
+                <a:extLst>
+                  <a:ext uri="{0D108BD9-81ED-4DB2-BD59-A6C34878D82A}">
+                    <a16:rowId xmlns:a16="http://schemas.microsoft.com/office/drawing/2014/main" val="1434951263"/>
+                  </a:ext>
+                </a:extLst>
+              </a:tr>
+              <a:tr h="370840">
+                <a:tc>
+                  <a:txBody>
+                    <a:bodyPr/>
+                    <a:lstStyle/>
+                    <a:p>
+                      <a:r>
+                        <a:rPr lang="vi-VN"/>
+                        <a:t>CNN 1D</a:t>
+                      </a:r>
+                    </a:p>
+                  </a:txBody>
+                  <a:tcPr/>
+                </a:tc>
+                <a:tc>
+                  <a:txBody>
+                    <a:bodyPr/>
+                    <a:lstStyle/>
+                    <a:p>
+                      <a:r>
+                        <a:rPr lang="vi-VN"/>
+                        <a:t>~ 80,0 nghìn</a:t>
+                      </a:r>
+                    </a:p>
+                  </a:txBody>
+                  <a:tcPr/>
+                </a:tc>
+                <a:tc>
+                  <a:txBody>
+                    <a:bodyPr/>
+                    <a:lstStyle/>
+                    <a:p>
+                      <a:r>
+                        <a:rPr lang="vi-VN"/>
+                        <a:t>~ 323 KB</a:t>
+                      </a:r>
+                    </a:p>
+                  </a:txBody>
+                  <a:tcPr/>
+                </a:tc>
+                <a:extLst>
+                  <a:ext uri="{0D108BD9-81ED-4DB2-BD59-A6C34878D82A}">
+                    <a16:rowId xmlns:a16="http://schemas.microsoft.com/office/drawing/2014/main" val="1456954964"/>
+                  </a:ext>
+                </a:extLst>
+              </a:tr>
+              <a:tr h="370840">
+                <a:tc>
+                  <a:txBody>
+                    <a:bodyPr/>
+                    <a:lstStyle/>
+                    <a:p>
+                      <a:r>
+                        <a:rPr lang="vi-VN"/>
+                        <a:t>CNN-LSTM</a:t>
+                      </a:r>
+                    </a:p>
+                  </a:txBody>
+                  <a:tcPr/>
+                </a:tc>
+                <a:tc>
+                  <a:txBody>
+                    <a:bodyPr/>
+                    <a:lstStyle/>
+                    <a:p>
+                      <a:r>
+                        <a:rPr lang="vi-VN"/>
+                        <a:t>~ 162,6 nghìn</a:t>
+                      </a:r>
+                    </a:p>
+                  </a:txBody>
+                  <a:tcPr/>
+                </a:tc>
+                <a:tc>
+                  <a:txBody>
+                    <a:bodyPr/>
+                    <a:lstStyle/>
+                    <a:p>
+                      <a:r>
+                        <a:rPr lang="vi-VN"/>
+                        <a:t>~ 643 KB</a:t>
+                      </a:r>
+                    </a:p>
+                  </a:txBody>
+                  <a:tcPr/>
+                </a:tc>
+                <a:extLst>
+                  <a:ext uri="{0D108BD9-81ED-4DB2-BD59-A6C34878D82A}">
+                    <a16:rowId xmlns:a16="http://schemas.microsoft.com/office/drawing/2014/main" val="3227508644"/>
+                  </a:ext>
+                </a:extLst>
+              </a:tr>
+              <a:tr h="370840">
+                <a:tc>
+                  <a:txBody>
+                    <a:bodyPr/>
+                    <a:lstStyle/>
+                    <a:p>
+                      <a:r>
+                        <a:rPr lang="vi-VN"/>
+                        <a:t>CNN-BiLSTM</a:t>
+                      </a:r>
+                    </a:p>
+                  </a:txBody>
+                  <a:tcPr/>
+                </a:tc>
+                <a:tc>
+                  <a:txBody>
+                    <a:bodyPr/>
+                    <a:lstStyle/>
+                    <a:p>
+                      <a:r>
+                        <a:rPr lang="vi-VN"/>
+                        <a:t>~ 129,8 nghìn</a:t>
+                      </a:r>
+                    </a:p>
+                  </a:txBody>
+                  <a:tcPr/>
+                </a:tc>
+                <a:tc>
+                  <a:txBody>
+                    <a:bodyPr/>
+                    <a:lstStyle/>
+                    <a:p>
+                      <a:r>
+                        <a:rPr lang="vi-VN"/>
+                        <a:t>~ 516 KB</a:t>
+                      </a:r>
+                    </a:p>
+                  </a:txBody>
+                  <a:tcPr/>
+                </a:tc>
+                <a:extLst>
+                  <a:ext uri="{0D108BD9-81ED-4DB2-BD59-A6C34878D82A}">
+                    <a16:rowId xmlns:a16="http://schemas.microsoft.com/office/drawing/2014/main" val="897798365"/>
+                  </a:ext>
+                </a:extLst>
+              </a:tr>
+            </a:tbl>
+          </a:graphicData>
+        </a:graphic>
+      </p:graphicFrame>
+      <p:sp>
+        <p:nvSpPr>
+          <p:cNvPr id="9" name="Hộp Văn bản 8">
+            <a:extLst>
+              <a:ext uri="{FF2B5EF4-FFF2-40B4-BE49-F238E27FC236}">
+                <a16:creationId xmlns:a16="http://schemas.microsoft.com/office/drawing/2014/main" id="{3AC69C81-C407-DF8D-A9CC-5F256D192384}"/>
+              </a:ext>
+            </a:extLst>
+          </p:cNvPr>
+          <p:cNvSpPr txBox="1"/>
+          <p:nvPr/>
+        </p:nvSpPr>
+        <p:spPr>
+          <a:xfrm>
+            <a:off x="1668318" y="5579546"/>
+            <a:ext cx="8127998" cy="369332"/>
+          </a:xfrm>
+          <a:prstGeom prst="rect">
+            <a:avLst/>
+          </a:prstGeom>
+          <a:noFill/>
+        </p:spPr>
+        <p:txBody>
+          <a:bodyPr wrap="square" rtlCol="0">
+            <a:spAutoFit/>
+          </a:bodyPr>
+          <a:lstStyle/>
+          <a:p>
+            <a:pPr algn="ctr"/>
+            <a:r>
+              <a:rPr lang="vi-VN"/>
+              <a:t>Bảng so sánh quy mô 3 mô hình</a:t>
+            </a:r>
+          </a:p>
+        </p:txBody>
+      </p:sp>
     </p:spTree>
     <p:extLst>
       <p:ext uri="{BB962C8B-B14F-4D97-AF65-F5344CB8AC3E}">
-        <p14:creationId xmlns:p14="http://schemas.microsoft.com/office/powerpoint/2010/main" val="3001568464"/>
+        <p14:creationId xmlns:p14="http://schemas.microsoft.com/office/powerpoint/2010/main" val="3164548458"/>
       </p:ext>
     </p:extLst>
   </p:cSld>
@@ -4962,7 +5602,13 @@
   <p:cSld>
     <p:spTree>
       <p:nvGrpSpPr>
-        <p:cNvPr id="1" name=""/>
+        <p:cNvPr id="1" name="">
+          <a:extLst>
+            <a:ext uri="{FF2B5EF4-FFF2-40B4-BE49-F238E27FC236}">
+              <a16:creationId xmlns:a16="http://schemas.microsoft.com/office/drawing/2014/main" id="{1473E66D-1D48-AAE1-CA99-4F99E561C6FF}"/>
+            </a:ext>
+          </a:extLst>
+        </p:cNvPr>
         <p:cNvGrpSpPr/>
         <p:nvPr/>
       </p:nvGrpSpPr>
@@ -4976,10 +5622,102 @@
       </p:grpSpPr>
       <p:sp>
         <p:nvSpPr>
-          <p:cNvPr id="2" name="Slide Number Placeholder 1">
-            <a:extLst>
-              <a:ext uri="{FF2B5EF4-FFF2-40B4-BE49-F238E27FC236}">
-                <a16:creationId xmlns:a16="http://schemas.microsoft.com/office/drawing/2014/main" id="{4E248DCA-B91F-BC5A-64CE-246CF3581AEB}"/>
+          <p:cNvPr id="2" name="Title 1">
+            <a:extLst>
+              <a:ext uri="{FF2B5EF4-FFF2-40B4-BE49-F238E27FC236}">
+                <a16:creationId xmlns:a16="http://schemas.microsoft.com/office/drawing/2014/main" id="{FE4B3D47-B479-94AC-BD70-2448D9726C91}"/>
+              </a:ext>
+            </a:extLst>
+          </p:cNvPr>
+          <p:cNvSpPr>
+            <a:spLocks noGrp="1"/>
+          </p:cNvSpPr>
+          <p:nvPr>
+            <p:ph type="title"/>
+          </p:nvPr>
+        </p:nvSpPr>
+        <p:spPr/>
+        <p:txBody>
+          <a:bodyPr/>
+          <a:lstStyle/>
+          <a:p>
+            <a:r>
+              <a:rPr lang="vi-VN"/>
+              <a:t>5. Kết quả đánh giá</a:t>
+            </a:r>
+            <a:endParaRPr lang="en-US"/>
+          </a:p>
+        </p:txBody>
+      </p:sp>
+      <p:sp>
+        <p:nvSpPr>
+          <p:cNvPr id="3" name="Chart Placeholder 2">
+            <a:extLst>
+              <a:ext uri="{FF2B5EF4-FFF2-40B4-BE49-F238E27FC236}">
+                <a16:creationId xmlns:a16="http://schemas.microsoft.com/office/drawing/2014/main" id="{4FED15A5-B7C1-2ACE-E513-DBB115473F08}"/>
+              </a:ext>
+            </a:extLst>
+          </p:cNvPr>
+          <p:cNvSpPr>
+            <a:spLocks noGrp="1"/>
+          </p:cNvSpPr>
+          <p:nvPr>
+            <p:ph type="chart" sz="quarter" idx="13"/>
+          </p:nvPr>
+        </p:nvSpPr>
+        <p:spPr>
+          <a:xfrm>
+            <a:off x="338735" y="1406525"/>
+            <a:ext cx="11309473" cy="4670425"/>
+          </a:xfrm>
+        </p:spPr>
+        <p:txBody>
+          <a:bodyPr/>
+          <a:lstStyle/>
+          <a:p>
+            <a:pPr marL="0" indent="0">
+              <a:buNone/>
+            </a:pPr>
+            <a:r>
+              <a:rPr lang="vi-VN" sz="2400" b="1"/>
+              <a:t>5.1. So sánh kiến trúc</a:t>
+            </a:r>
+          </a:p>
+          <a:p>
+            <a:r>
+              <a:rPr lang="vi-VN" sz="2400"/>
+              <a:t>Sử dụng 4 chỉ số: FAR, FRR, EER, AUC</a:t>
+            </a:r>
+          </a:p>
+          <a:p>
+            <a:r>
+              <a:rPr lang="vi-VN" sz="2400"/>
+              <a:t>Đánh giá 2 kịch bản tập đóng và tập mở</a:t>
+            </a:r>
+          </a:p>
+          <a:p>
+            <a:pPr lvl="1"/>
+            <a:r>
+              <a:rPr lang="vi-VN"/>
+              <a:t>Tập đóng: CNN 1D tốt nhất (EER ~ 3,4%) </a:t>
+            </a:r>
+          </a:p>
+          <a:p>
+            <a:pPr lvl="1"/>
+            <a:r>
+              <a:rPr lang="vi-VN"/>
+              <a:t>Tập mở (khó hơn): CNN 1D tốt nhất (EER ~ 21%)</a:t>
+            </a:r>
+            <a:endParaRPr lang="vi-VN" sz="2400"/>
+          </a:p>
+        </p:txBody>
+      </p:sp>
+      <p:sp>
+        <p:nvSpPr>
+          <p:cNvPr id="5" name="Slide Number Placeholder 4">
+            <a:extLst>
+              <a:ext uri="{FF2B5EF4-FFF2-40B4-BE49-F238E27FC236}">
+                <a16:creationId xmlns:a16="http://schemas.microsoft.com/office/drawing/2014/main" id="{707D529A-D641-6231-2EC6-6CB4EABE10F0}"/>
               </a:ext>
             </a:extLst>
           </p:cNvPr>
@@ -5004,85 +5742,10 @@
           </a:p>
         </p:txBody>
       </p:sp>
-      <p:sp>
-        <p:nvSpPr>
-          <p:cNvPr id="3" name="Title 2">
-            <a:extLst>
-              <a:ext uri="{FF2B5EF4-FFF2-40B4-BE49-F238E27FC236}">
-                <a16:creationId xmlns:a16="http://schemas.microsoft.com/office/drawing/2014/main" id="{D4A308EB-C22C-0699-31DF-5588F4DDA75F}"/>
-              </a:ext>
-            </a:extLst>
-          </p:cNvPr>
-          <p:cNvSpPr>
-            <a:spLocks noGrp="1"/>
-          </p:cNvSpPr>
-          <p:nvPr>
-            <p:ph type="title"/>
-          </p:nvPr>
-        </p:nvSpPr>
-        <p:spPr/>
-        <p:txBody>
-          <a:bodyPr/>
-          <a:lstStyle/>
-          <a:p>
-            <a:endParaRPr lang="en-US"/>
-          </a:p>
-        </p:txBody>
-      </p:sp>
-      <p:sp>
-        <p:nvSpPr>
-          <p:cNvPr id="4" name="Chart Placeholder 3">
-            <a:extLst>
-              <a:ext uri="{FF2B5EF4-FFF2-40B4-BE49-F238E27FC236}">
-                <a16:creationId xmlns:a16="http://schemas.microsoft.com/office/drawing/2014/main" id="{99678272-23D5-2910-516A-D7EDB6A7FE52}"/>
-              </a:ext>
-            </a:extLst>
-          </p:cNvPr>
-          <p:cNvSpPr>
-            <a:spLocks noGrp="1"/>
-          </p:cNvSpPr>
-          <p:nvPr>
-            <p:ph type="chart" sz="quarter" idx="13"/>
-          </p:nvPr>
-        </p:nvSpPr>
-        <p:spPr/>
-        <p:txBody>
-          <a:bodyPr/>
-          <a:lstStyle/>
-          <a:p>
-            <a:endParaRPr lang="vi-VN"/>
-          </a:p>
-        </p:txBody>
-      </p:sp>
-      <p:sp>
-        <p:nvSpPr>
-          <p:cNvPr id="5" name="Picture Placeholder 4">
-            <a:extLst>
-              <a:ext uri="{FF2B5EF4-FFF2-40B4-BE49-F238E27FC236}">
-                <a16:creationId xmlns:a16="http://schemas.microsoft.com/office/drawing/2014/main" id="{30E00C4E-0536-65FC-3882-BD908064E9B3}"/>
-              </a:ext>
-            </a:extLst>
-          </p:cNvPr>
-          <p:cNvSpPr>
-            <a:spLocks noGrp="1"/>
-          </p:cNvSpPr>
-          <p:nvPr>
-            <p:ph type="pic" sz="quarter" idx="14"/>
-          </p:nvPr>
-        </p:nvSpPr>
-        <p:spPr/>
-        <p:txBody>
-          <a:bodyPr/>
-          <a:lstStyle/>
-          <a:p>
-            <a:endParaRPr lang="vi-VN"/>
-          </a:p>
-        </p:txBody>
-      </p:sp>
     </p:spTree>
     <p:extLst>
       <p:ext uri="{BB962C8B-B14F-4D97-AF65-F5344CB8AC3E}">
-        <p14:creationId xmlns:p14="http://schemas.microsoft.com/office/powerpoint/2010/main" val="3594598399"/>
+        <p14:creationId xmlns:p14="http://schemas.microsoft.com/office/powerpoint/2010/main" val="264495847"/>
       </p:ext>
     </p:extLst>
   </p:cSld>
@@ -5093,6 +5756,1086 @@
 </file>
 
 <file path=ppt/slides/slide15.xml><?xml version="1.0" encoding="utf-8"?>
+<p:sld xmlns:a="http://schemas.openxmlformats.org/drawingml/2006/main" xmlns:r="http://schemas.openxmlformats.org/officeDocument/2006/relationships" xmlns:p="http://schemas.openxmlformats.org/presentationml/2006/main">
+  <p:cSld>
+    <p:spTree>
+      <p:nvGrpSpPr>
+        <p:cNvPr id="1" name="">
+          <a:extLst>
+            <a:ext uri="{FF2B5EF4-FFF2-40B4-BE49-F238E27FC236}">
+              <a16:creationId xmlns:a16="http://schemas.microsoft.com/office/drawing/2014/main" id="{84ABEDE3-8FF6-B6F1-96F5-3D4011F3DF7B}"/>
+            </a:ext>
+          </a:extLst>
+        </p:cNvPr>
+        <p:cNvGrpSpPr/>
+        <p:nvPr/>
+      </p:nvGrpSpPr>
+      <p:grpSpPr>
+        <a:xfrm>
+          <a:off x="0" y="0"/>
+          <a:ext cx="0" cy="0"/>
+          <a:chOff x="0" y="0"/>
+          <a:chExt cx="0" cy="0"/>
+        </a:xfrm>
+      </p:grpSpPr>
+      <p:sp>
+        <p:nvSpPr>
+          <p:cNvPr id="2" name="Title 1">
+            <a:extLst>
+              <a:ext uri="{FF2B5EF4-FFF2-40B4-BE49-F238E27FC236}">
+                <a16:creationId xmlns:a16="http://schemas.microsoft.com/office/drawing/2014/main" id="{355B052F-C0E8-ACFE-7B78-EA5FEB157F84}"/>
+              </a:ext>
+            </a:extLst>
+          </p:cNvPr>
+          <p:cNvSpPr>
+            <a:spLocks noGrp="1"/>
+          </p:cNvSpPr>
+          <p:nvPr>
+            <p:ph type="title"/>
+          </p:nvPr>
+        </p:nvSpPr>
+        <p:spPr/>
+        <p:txBody>
+          <a:bodyPr/>
+          <a:lstStyle/>
+          <a:p>
+            <a:r>
+              <a:rPr lang="vi-VN"/>
+              <a:t>5. Kết quả đánh giá</a:t>
+            </a:r>
+            <a:endParaRPr lang="en-US"/>
+          </a:p>
+        </p:txBody>
+      </p:sp>
+      <p:sp>
+        <p:nvSpPr>
+          <p:cNvPr id="3" name="Chart Placeholder 2">
+            <a:extLst>
+              <a:ext uri="{FF2B5EF4-FFF2-40B4-BE49-F238E27FC236}">
+                <a16:creationId xmlns:a16="http://schemas.microsoft.com/office/drawing/2014/main" id="{45097B59-3774-698E-78E9-22D638B8458E}"/>
+              </a:ext>
+            </a:extLst>
+          </p:cNvPr>
+          <p:cNvSpPr>
+            <a:spLocks noGrp="1"/>
+          </p:cNvSpPr>
+          <p:nvPr>
+            <p:ph type="chart" sz="quarter" idx="13"/>
+          </p:nvPr>
+        </p:nvSpPr>
+        <p:spPr>
+          <a:xfrm>
+            <a:off x="338735" y="1406525"/>
+            <a:ext cx="11309473" cy="4670425"/>
+          </a:xfrm>
+        </p:spPr>
+        <p:txBody>
+          <a:bodyPr/>
+          <a:lstStyle/>
+          <a:p>
+            <a:pPr marL="0" indent="0">
+              <a:buNone/>
+            </a:pPr>
+            <a:r>
+              <a:rPr lang="vi-VN" sz="2400" b="1"/>
+              <a:t>5.2. Hàm chấm điểm</a:t>
+            </a:r>
+          </a:p>
+          <a:p>
+            <a:r>
+              <a:rPr lang="vi-VN" sz="2400"/>
+              <a:t>So sánh 4 hàm: cos_mean, cos_knn, cos_znorm, maha</a:t>
+            </a:r>
+          </a:p>
+          <a:p>
+            <a:pPr marL="457200" lvl="1" indent="0">
+              <a:buNone/>
+            </a:pPr>
+            <a:r>
+              <a:rPr lang="vi-VN" sz="2000">
+                <a:sym typeface="Wingdings" panose="05000000000000000000" pitchFamily="2" charset="2"/>
+              </a:rPr>
+              <a:t> </a:t>
+            </a:r>
+            <a:r>
+              <a:rPr lang="vi-VN" sz="2000"/>
+              <a:t>cos_znorm tốt nhất: EER tập mở 10,83%; tập đóng 2,24%</a:t>
+            </a:r>
+          </a:p>
+          <a:p>
+            <a:pPr lvl="1"/>
+            <a:endParaRPr lang="vi-VN"/>
+          </a:p>
+        </p:txBody>
+      </p:sp>
+      <p:sp>
+        <p:nvSpPr>
+          <p:cNvPr id="5" name="Slide Number Placeholder 4">
+            <a:extLst>
+              <a:ext uri="{FF2B5EF4-FFF2-40B4-BE49-F238E27FC236}">
+                <a16:creationId xmlns:a16="http://schemas.microsoft.com/office/drawing/2014/main" id="{4ED1A2C6-6FDE-1ED4-CA2B-4ED2493ED841}"/>
+              </a:ext>
+            </a:extLst>
+          </p:cNvPr>
+          <p:cNvSpPr>
+            <a:spLocks noGrp="1"/>
+          </p:cNvSpPr>
+          <p:nvPr>
+            <p:ph type="sldNum" sz="quarter" idx="12"/>
+          </p:nvPr>
+        </p:nvSpPr>
+        <p:spPr/>
+        <p:txBody>
+          <a:bodyPr/>
+          <a:lstStyle/>
+          <a:p>
+            <a:fld id="{9EA0BE3B-158A-4EDF-80DC-E394A0D1600F}" type="slidenum">
+              <a:rPr lang="en-US" smtClean="0"/>
+              <a:pPr/>
+              <a:t>15</a:t>
+            </a:fld>
+            <a:endParaRPr lang="en-US"/>
+          </a:p>
+        </p:txBody>
+      </p:sp>
+      <p:graphicFrame>
+        <p:nvGraphicFramePr>
+          <p:cNvPr id="4" name="Bảng 3">
+            <a:extLst>
+              <a:ext uri="{FF2B5EF4-FFF2-40B4-BE49-F238E27FC236}">
+                <a16:creationId xmlns:a16="http://schemas.microsoft.com/office/drawing/2014/main" id="{F0722A69-48EC-5F80-6CB7-44D45337BD46}"/>
+              </a:ext>
+            </a:extLst>
+          </p:cNvPr>
+          <p:cNvGraphicFramePr>
+            <a:graphicFrameLocks noGrp="1"/>
+          </p:cNvGraphicFramePr>
+          <p:nvPr>
+            <p:extLst>
+              <p:ext uri="{D42A27DB-BD31-4B8C-83A1-F6EECF244321}">
+                <p14:modId xmlns:p14="http://schemas.microsoft.com/office/powerpoint/2010/main" val="607075151"/>
+              </p:ext>
+            </p:extLst>
+          </p:nvPr>
+        </p:nvGraphicFramePr>
+        <p:xfrm>
+          <a:off x="1595583" y="2982219"/>
+          <a:ext cx="7863457" cy="2078156"/>
+        </p:xfrm>
+        <a:graphic>
+          <a:graphicData uri="http://schemas.openxmlformats.org/drawingml/2006/table">
+            <a:tbl>
+              <a:tblPr firstRow="1" bandRow="1">
+                <a:tableStyleId>{5C22544A-7EE6-4342-B048-85BDC9FD1C3A}</a:tableStyleId>
+              </a:tblPr>
+              <a:tblGrid>
+                <a:gridCol w="1960880">
+                  <a:extLst>
+                    <a:ext uri="{9D8B030D-6E8A-4147-A177-3AD203B41FA5}">
+                      <a16:colId xmlns:a16="http://schemas.microsoft.com/office/drawing/2014/main" val="1677443005"/>
+                    </a:ext>
+                  </a:extLst>
+                </a:gridCol>
+                <a:gridCol w="1768092">
+                  <a:extLst>
+                    <a:ext uri="{9D8B030D-6E8A-4147-A177-3AD203B41FA5}">
+                      <a16:colId xmlns:a16="http://schemas.microsoft.com/office/drawing/2014/main" val="662104527"/>
+                    </a:ext>
+                  </a:extLst>
+                </a:gridCol>
+                <a:gridCol w="1970405">
+                  <a:extLst>
+                    <a:ext uri="{9D8B030D-6E8A-4147-A177-3AD203B41FA5}">
+                      <a16:colId xmlns:a16="http://schemas.microsoft.com/office/drawing/2014/main" val="4270615051"/>
+                    </a:ext>
+                  </a:extLst>
+                </a:gridCol>
+                <a:gridCol w="2164080">
+                  <a:extLst>
+                    <a:ext uri="{9D8B030D-6E8A-4147-A177-3AD203B41FA5}">
+                      <a16:colId xmlns:a16="http://schemas.microsoft.com/office/drawing/2014/main" val="2548997991"/>
+                    </a:ext>
+                  </a:extLst>
+                </a:gridCol>
+              </a:tblGrid>
+              <a:tr h="411064">
+                <a:tc>
+                  <a:txBody>
+                    <a:bodyPr/>
+                    <a:lstStyle/>
+                    <a:p>
+                      <a:r>
+                        <a:rPr lang="vi-VN"/>
+                        <a:t>Hàm quyết định</a:t>
+                      </a:r>
+                    </a:p>
+                  </a:txBody>
+                  <a:tcPr/>
+                </a:tc>
+                <a:tc>
+                  <a:txBody>
+                    <a:bodyPr/>
+                    <a:lstStyle/>
+                    <a:p>
+                      <a:r>
+                        <a:rPr lang="vi-VN"/>
+                        <a:t>AUC tập mở</a:t>
+                      </a:r>
+                    </a:p>
+                  </a:txBody>
+                  <a:tcPr/>
+                </a:tc>
+                <a:tc>
+                  <a:txBody>
+                    <a:bodyPr/>
+                    <a:lstStyle/>
+                    <a:p>
+                      <a:r>
+                        <a:rPr lang="vi-VN"/>
+                        <a:t>EER tập mở (%)</a:t>
+                      </a:r>
+                    </a:p>
+                  </a:txBody>
+                  <a:tcPr/>
+                </a:tc>
+                <a:tc>
+                  <a:txBody>
+                    <a:bodyPr/>
+                    <a:lstStyle/>
+                    <a:p>
+                      <a:r>
+                        <a:rPr lang="vi-VN"/>
+                        <a:t>EER tập đóng (%)</a:t>
+                      </a:r>
+                    </a:p>
+                  </a:txBody>
+                  <a:tcPr/>
+                </a:tc>
+                <a:extLst>
+                  <a:ext uri="{0D108BD9-81ED-4DB2-BD59-A6C34878D82A}">
+                    <a16:rowId xmlns:a16="http://schemas.microsoft.com/office/drawing/2014/main" val="3196583256"/>
+                  </a:ext>
+                </a:extLst>
+              </a:tr>
+              <a:tr h="416773">
+                <a:tc>
+                  <a:txBody>
+                    <a:bodyPr/>
+                    <a:lstStyle/>
+                    <a:p>
+                      <a:r>
+                        <a:rPr lang="vi-VN"/>
+                        <a:t>cos_znorm</a:t>
+                      </a:r>
+                    </a:p>
+                  </a:txBody>
+                  <a:tcPr/>
+                </a:tc>
+                <a:tc>
+                  <a:txBody>
+                    <a:bodyPr/>
+                    <a:lstStyle/>
+                    <a:p>
+                      <a:pPr algn="ctr"/>
+                      <a:r>
+                        <a:rPr lang="vi-VN"/>
+                        <a:t>0,963</a:t>
+                      </a:r>
+                    </a:p>
+                  </a:txBody>
+                  <a:tcPr/>
+                </a:tc>
+                <a:tc>
+                  <a:txBody>
+                    <a:bodyPr/>
+                    <a:lstStyle/>
+                    <a:p>
+                      <a:pPr algn="ctr"/>
+                      <a:r>
+                        <a:rPr lang="vi-VN"/>
+                        <a:t>10,83</a:t>
+                      </a:r>
+                    </a:p>
+                  </a:txBody>
+                  <a:tcPr/>
+                </a:tc>
+                <a:tc>
+                  <a:txBody>
+                    <a:bodyPr/>
+                    <a:lstStyle/>
+                    <a:p>
+                      <a:pPr algn="ctr"/>
+                      <a:r>
+                        <a:rPr lang="vi-VN"/>
+                        <a:t>2,24</a:t>
+                      </a:r>
+                    </a:p>
+                  </a:txBody>
+                  <a:tcPr/>
+                </a:tc>
+                <a:extLst>
+                  <a:ext uri="{0D108BD9-81ED-4DB2-BD59-A6C34878D82A}">
+                    <a16:rowId xmlns:a16="http://schemas.microsoft.com/office/drawing/2014/main" val="1690352574"/>
+                  </a:ext>
+                </a:extLst>
+              </a:tr>
+              <a:tr h="416773">
+                <a:tc>
+                  <a:txBody>
+                    <a:bodyPr/>
+                    <a:lstStyle/>
+                    <a:p>
+                      <a:r>
+                        <a:rPr lang="vi-VN"/>
+                        <a:t>cos_knn</a:t>
+                      </a:r>
+                    </a:p>
+                  </a:txBody>
+                  <a:tcPr/>
+                </a:tc>
+                <a:tc>
+                  <a:txBody>
+                    <a:bodyPr/>
+                    <a:lstStyle/>
+                    <a:p>
+                      <a:pPr algn="ctr"/>
+                      <a:r>
+                        <a:rPr lang="vi-VN"/>
+                        <a:t>0,960</a:t>
+                      </a:r>
+                    </a:p>
+                  </a:txBody>
+                  <a:tcPr/>
+                </a:tc>
+                <a:tc>
+                  <a:txBody>
+                    <a:bodyPr/>
+                    <a:lstStyle/>
+                    <a:p>
+                      <a:pPr algn="ctr"/>
+                      <a:r>
+                        <a:rPr lang="vi-VN"/>
+                        <a:t>10,84</a:t>
+                      </a:r>
+                    </a:p>
+                  </a:txBody>
+                  <a:tcPr/>
+                </a:tc>
+                <a:tc>
+                  <a:txBody>
+                    <a:bodyPr/>
+                    <a:lstStyle/>
+                    <a:p>
+                      <a:pPr algn="ctr"/>
+                      <a:r>
+                        <a:rPr lang="vi-VN"/>
+                        <a:t>2,83</a:t>
+                      </a:r>
+                    </a:p>
+                  </a:txBody>
+                  <a:tcPr/>
+                </a:tc>
+                <a:extLst>
+                  <a:ext uri="{0D108BD9-81ED-4DB2-BD59-A6C34878D82A}">
+                    <a16:rowId xmlns:a16="http://schemas.microsoft.com/office/drawing/2014/main" val="2881035616"/>
+                  </a:ext>
+                </a:extLst>
+              </a:tr>
+              <a:tr h="416773">
+                <a:tc>
+                  <a:txBody>
+                    <a:bodyPr/>
+                    <a:lstStyle/>
+                    <a:p>
+                      <a:r>
+                        <a:rPr lang="vi-VN"/>
+                        <a:t>cos_mean</a:t>
+                      </a:r>
+                    </a:p>
+                  </a:txBody>
+                  <a:tcPr/>
+                </a:tc>
+                <a:tc>
+                  <a:txBody>
+                    <a:bodyPr/>
+                    <a:lstStyle/>
+                    <a:p>
+                      <a:pPr algn="ctr"/>
+                      <a:r>
+                        <a:rPr lang="vi-VN"/>
+                        <a:t>0,944</a:t>
+                      </a:r>
+                    </a:p>
+                  </a:txBody>
+                  <a:tcPr/>
+                </a:tc>
+                <a:tc>
+                  <a:txBody>
+                    <a:bodyPr/>
+                    <a:lstStyle/>
+                    <a:p>
+                      <a:pPr algn="ctr"/>
+                      <a:r>
+                        <a:rPr lang="vi-VN"/>
+                        <a:t>14,72</a:t>
+                      </a:r>
+                    </a:p>
+                  </a:txBody>
+                  <a:tcPr/>
+                </a:tc>
+                <a:tc>
+                  <a:txBody>
+                    <a:bodyPr/>
+                    <a:lstStyle/>
+                    <a:p>
+                      <a:pPr algn="ctr"/>
+                      <a:r>
+                        <a:rPr lang="vi-VN"/>
+                        <a:t>3,11</a:t>
+                      </a:r>
+                    </a:p>
+                  </a:txBody>
+                  <a:tcPr/>
+                </a:tc>
+                <a:extLst>
+                  <a:ext uri="{0D108BD9-81ED-4DB2-BD59-A6C34878D82A}">
+                    <a16:rowId xmlns:a16="http://schemas.microsoft.com/office/drawing/2014/main" val="311510634"/>
+                  </a:ext>
+                </a:extLst>
+              </a:tr>
+              <a:tr h="416773">
+                <a:tc>
+                  <a:txBody>
+                    <a:bodyPr/>
+                    <a:lstStyle/>
+                    <a:p>
+                      <a:r>
+                        <a:rPr lang="vi-VN"/>
+                        <a:t>maha</a:t>
+                      </a:r>
+                    </a:p>
+                  </a:txBody>
+                  <a:tcPr/>
+                </a:tc>
+                <a:tc>
+                  <a:txBody>
+                    <a:bodyPr/>
+                    <a:lstStyle/>
+                    <a:p>
+                      <a:pPr algn="ctr"/>
+                      <a:r>
+                        <a:rPr lang="vi-VN"/>
+                        <a:t>0,864</a:t>
+                      </a:r>
+                    </a:p>
+                  </a:txBody>
+                  <a:tcPr/>
+                </a:tc>
+                <a:tc>
+                  <a:txBody>
+                    <a:bodyPr/>
+                    <a:lstStyle/>
+                    <a:p>
+                      <a:pPr algn="ctr"/>
+                      <a:r>
+                        <a:rPr lang="vi-VN"/>
+                        <a:t>23,12</a:t>
+                      </a:r>
+                    </a:p>
+                  </a:txBody>
+                  <a:tcPr/>
+                </a:tc>
+                <a:tc>
+                  <a:txBody>
+                    <a:bodyPr/>
+                    <a:lstStyle/>
+                    <a:p>
+                      <a:pPr algn="ctr"/>
+                      <a:r>
+                        <a:rPr lang="vi-VN"/>
+                        <a:t>17,51</a:t>
+                      </a:r>
+                    </a:p>
+                  </a:txBody>
+                  <a:tcPr/>
+                </a:tc>
+                <a:extLst>
+                  <a:ext uri="{0D108BD9-81ED-4DB2-BD59-A6C34878D82A}">
+                    <a16:rowId xmlns:a16="http://schemas.microsoft.com/office/drawing/2014/main" val="2895231727"/>
+                  </a:ext>
+                </a:extLst>
+              </a:tr>
+            </a:tbl>
+          </a:graphicData>
+        </a:graphic>
+      </p:graphicFrame>
+    </p:spTree>
+    <p:extLst>
+      <p:ext uri="{BB962C8B-B14F-4D97-AF65-F5344CB8AC3E}">
+        <p14:creationId xmlns:p14="http://schemas.microsoft.com/office/powerpoint/2010/main" val="3797912490"/>
+      </p:ext>
+    </p:extLst>
+  </p:cSld>
+  <p:clrMapOvr>
+    <a:masterClrMapping/>
+  </p:clrMapOvr>
+</p:sld>
+</file>
+
+<file path=ppt/slides/slide16.xml><?xml version="1.0" encoding="utf-8"?>
+<p:sld xmlns:a="http://schemas.openxmlformats.org/drawingml/2006/main" xmlns:r="http://schemas.openxmlformats.org/officeDocument/2006/relationships" xmlns:p="http://schemas.openxmlformats.org/presentationml/2006/main">
+  <p:cSld>
+    <p:spTree>
+      <p:nvGrpSpPr>
+        <p:cNvPr id="1" name="">
+          <a:extLst>
+            <a:ext uri="{FF2B5EF4-FFF2-40B4-BE49-F238E27FC236}">
+              <a16:creationId xmlns:a16="http://schemas.microsoft.com/office/drawing/2014/main" id="{1FA3513C-E988-6802-F4FA-ECF02F61CBDC}"/>
+            </a:ext>
+          </a:extLst>
+        </p:cNvPr>
+        <p:cNvGrpSpPr/>
+        <p:nvPr/>
+      </p:nvGrpSpPr>
+      <p:grpSpPr>
+        <a:xfrm>
+          <a:off x="0" y="0"/>
+          <a:ext cx="0" cy="0"/>
+          <a:chOff x="0" y="0"/>
+          <a:chExt cx="0" cy="0"/>
+        </a:xfrm>
+      </p:grpSpPr>
+      <p:sp>
+        <p:nvSpPr>
+          <p:cNvPr id="2" name="Title 1">
+            <a:extLst>
+              <a:ext uri="{FF2B5EF4-FFF2-40B4-BE49-F238E27FC236}">
+                <a16:creationId xmlns:a16="http://schemas.microsoft.com/office/drawing/2014/main" id="{1D83B4AB-BB35-950D-8F4A-8B16E57D709D}"/>
+              </a:ext>
+            </a:extLst>
+          </p:cNvPr>
+          <p:cNvSpPr>
+            <a:spLocks noGrp="1"/>
+          </p:cNvSpPr>
+          <p:nvPr>
+            <p:ph type="title"/>
+          </p:nvPr>
+        </p:nvSpPr>
+        <p:spPr/>
+        <p:txBody>
+          <a:bodyPr/>
+          <a:lstStyle/>
+          <a:p>
+            <a:r>
+              <a:rPr lang="vi-VN"/>
+              <a:t>6. Triển khai &amp; kết luận</a:t>
+            </a:r>
+            <a:endParaRPr lang="en-US"/>
+          </a:p>
+        </p:txBody>
+      </p:sp>
+      <p:sp>
+        <p:nvSpPr>
+          <p:cNvPr id="5" name="Slide Number Placeholder 4">
+            <a:extLst>
+              <a:ext uri="{FF2B5EF4-FFF2-40B4-BE49-F238E27FC236}">
+                <a16:creationId xmlns:a16="http://schemas.microsoft.com/office/drawing/2014/main" id="{7F4183F9-F7A2-0EAA-FAE1-84A3B3806BA6}"/>
+              </a:ext>
+            </a:extLst>
+          </p:cNvPr>
+          <p:cNvSpPr>
+            <a:spLocks noGrp="1"/>
+          </p:cNvSpPr>
+          <p:nvPr>
+            <p:ph type="sldNum" sz="quarter" idx="12"/>
+          </p:nvPr>
+        </p:nvSpPr>
+        <p:spPr/>
+        <p:txBody>
+          <a:bodyPr/>
+          <a:lstStyle/>
+          <a:p>
+            <a:fld id="{9EA0BE3B-158A-4EDF-80DC-E394A0D1600F}" type="slidenum">
+              <a:rPr lang="en-US" smtClean="0"/>
+              <a:pPr/>
+              <a:t>16</a:t>
+            </a:fld>
+            <a:endParaRPr lang="en-US"/>
+          </a:p>
+        </p:txBody>
+      </p:sp>
+      <p:sp>
+        <p:nvSpPr>
+          <p:cNvPr id="7" name="Chỗ dành sẵn cho Biểu đồ 6">
+            <a:extLst>
+              <a:ext uri="{FF2B5EF4-FFF2-40B4-BE49-F238E27FC236}">
+                <a16:creationId xmlns:a16="http://schemas.microsoft.com/office/drawing/2014/main" id="{4545993E-6EA3-CFDB-1478-9878A3722D5F}"/>
+              </a:ext>
+            </a:extLst>
+          </p:cNvPr>
+          <p:cNvSpPr>
+            <a:spLocks noGrp="1"/>
+          </p:cNvSpPr>
+          <p:nvPr>
+            <p:ph type="chart" sz="quarter" idx="13"/>
+          </p:nvPr>
+        </p:nvSpPr>
+        <p:spPr>
+          <a:xfrm>
+            <a:off x="338735" y="1406526"/>
+            <a:ext cx="11560975" cy="4661766"/>
+          </a:xfrm>
+        </p:spPr>
+        <p:txBody>
+          <a:bodyPr/>
+          <a:lstStyle/>
+          <a:p>
+            <a:pPr marL="0" indent="0">
+              <a:buNone/>
+            </a:pPr>
+            <a:r>
+              <a:rPr lang="vi-VN" sz="2400" b="1"/>
+              <a:t>6.1. Triển khai</a:t>
+            </a:r>
+          </a:p>
+          <a:p>
+            <a:r>
+              <a:rPr lang="vi-VN" sz="2400"/>
+              <a:t>Suy luận trực tiếp trên thiết bị qua TensorFlow Lite → riêng tư, chạy ngoại tuyến</a:t>
+            </a:r>
+          </a:p>
+          <a:p>
+            <a:r>
+              <a:rPr lang="vi-VN" sz="2400"/>
+              <a:t>Xác thực liên tục: máy trạng thái 3 mức, làm mịn EWMA, ngưỡng riêng từng chủ máy</a:t>
+            </a:r>
+          </a:p>
+          <a:p>
+            <a:r>
+              <a:rPr lang="vi-VN" sz="2400"/>
+              <a:t>Dự phòng khi nghi ngờ người lạ: cử chỉ lắc (mã 4–8 chữ số), không quay về PIN</a:t>
+            </a:r>
+          </a:p>
+          <a:p>
+            <a:r>
+              <a:rPr lang="vi-VN" sz="2400"/>
+              <a:t>Sản phẩm: app xác thực, web demo</a:t>
+            </a:r>
+          </a:p>
+          <a:p>
+            <a:pPr marL="0" indent="0">
+              <a:buNone/>
+            </a:pPr>
+            <a:endParaRPr lang="vi-VN" sz="2400"/>
+          </a:p>
+        </p:txBody>
+      </p:sp>
+    </p:spTree>
+    <p:extLst>
+      <p:ext uri="{BB962C8B-B14F-4D97-AF65-F5344CB8AC3E}">
+        <p14:creationId xmlns:p14="http://schemas.microsoft.com/office/powerpoint/2010/main" val="2432252877"/>
+      </p:ext>
+    </p:extLst>
+  </p:cSld>
+  <p:clrMapOvr>
+    <a:masterClrMapping/>
+  </p:clrMapOvr>
+</p:sld>
+</file>
+
+<file path=ppt/slides/slide17.xml><?xml version="1.0" encoding="utf-8"?>
+<p:sld xmlns:a="http://schemas.openxmlformats.org/drawingml/2006/main" xmlns:r="http://schemas.openxmlformats.org/officeDocument/2006/relationships" xmlns:p="http://schemas.openxmlformats.org/presentationml/2006/main">
+  <p:cSld>
+    <p:spTree>
+      <p:nvGrpSpPr>
+        <p:cNvPr id="1" name="">
+          <a:extLst>
+            <a:ext uri="{FF2B5EF4-FFF2-40B4-BE49-F238E27FC236}">
+              <a16:creationId xmlns:a16="http://schemas.microsoft.com/office/drawing/2014/main" id="{00BD2020-5CEA-A050-7F17-FC208813F4E6}"/>
+            </a:ext>
+          </a:extLst>
+        </p:cNvPr>
+        <p:cNvGrpSpPr/>
+        <p:nvPr/>
+      </p:nvGrpSpPr>
+      <p:grpSpPr>
+        <a:xfrm>
+          <a:off x="0" y="0"/>
+          <a:ext cx="0" cy="0"/>
+          <a:chOff x="0" y="0"/>
+          <a:chExt cx="0" cy="0"/>
+        </a:xfrm>
+      </p:grpSpPr>
+      <p:sp>
+        <p:nvSpPr>
+          <p:cNvPr id="2" name="Title 1">
+            <a:extLst>
+              <a:ext uri="{FF2B5EF4-FFF2-40B4-BE49-F238E27FC236}">
+                <a16:creationId xmlns:a16="http://schemas.microsoft.com/office/drawing/2014/main" id="{6C42B6E4-90AC-9C71-51DC-0A23566A20DD}"/>
+              </a:ext>
+            </a:extLst>
+          </p:cNvPr>
+          <p:cNvSpPr>
+            <a:spLocks noGrp="1"/>
+          </p:cNvSpPr>
+          <p:nvPr>
+            <p:ph type="title"/>
+          </p:nvPr>
+        </p:nvSpPr>
+        <p:spPr/>
+        <p:txBody>
+          <a:bodyPr/>
+          <a:lstStyle/>
+          <a:p>
+            <a:r>
+              <a:rPr lang="vi-VN"/>
+              <a:t>6. Triển khai &amp; kết luận</a:t>
+            </a:r>
+            <a:endParaRPr lang="en-US"/>
+          </a:p>
+        </p:txBody>
+      </p:sp>
+      <p:sp>
+        <p:nvSpPr>
+          <p:cNvPr id="5" name="Slide Number Placeholder 4">
+            <a:extLst>
+              <a:ext uri="{FF2B5EF4-FFF2-40B4-BE49-F238E27FC236}">
+                <a16:creationId xmlns:a16="http://schemas.microsoft.com/office/drawing/2014/main" id="{120041E4-BA3D-7A93-E5A5-36EC56677506}"/>
+              </a:ext>
+            </a:extLst>
+          </p:cNvPr>
+          <p:cNvSpPr>
+            <a:spLocks noGrp="1"/>
+          </p:cNvSpPr>
+          <p:nvPr>
+            <p:ph type="sldNum" sz="quarter" idx="12"/>
+          </p:nvPr>
+        </p:nvSpPr>
+        <p:spPr/>
+        <p:txBody>
+          <a:bodyPr/>
+          <a:lstStyle/>
+          <a:p>
+            <a:fld id="{9EA0BE3B-158A-4EDF-80DC-E394A0D1600F}" type="slidenum">
+              <a:rPr lang="en-US" smtClean="0"/>
+              <a:pPr/>
+              <a:t>17</a:t>
+            </a:fld>
+            <a:endParaRPr lang="en-US"/>
+          </a:p>
+        </p:txBody>
+      </p:sp>
+      <p:sp>
+        <p:nvSpPr>
+          <p:cNvPr id="7" name="Chỗ dành sẵn cho Biểu đồ 6">
+            <a:extLst>
+              <a:ext uri="{FF2B5EF4-FFF2-40B4-BE49-F238E27FC236}">
+                <a16:creationId xmlns:a16="http://schemas.microsoft.com/office/drawing/2014/main" id="{B10BE6AD-AA6E-B270-9412-2CBB2C33EB71}"/>
+              </a:ext>
+            </a:extLst>
+          </p:cNvPr>
+          <p:cNvSpPr>
+            <a:spLocks noGrp="1"/>
+          </p:cNvSpPr>
+          <p:nvPr>
+            <p:ph type="chart" sz="quarter" idx="13"/>
+          </p:nvPr>
+        </p:nvSpPr>
+        <p:spPr>
+          <a:xfrm>
+            <a:off x="338735" y="1406526"/>
+            <a:ext cx="11560975" cy="4661766"/>
+          </a:xfrm>
+        </p:spPr>
+        <p:txBody>
+          <a:bodyPr/>
+          <a:lstStyle/>
+          <a:p>
+            <a:pPr marL="0" indent="0">
+              <a:buNone/>
+            </a:pPr>
+            <a:r>
+              <a:rPr lang="vi-VN" sz="2400" b="1"/>
+              <a:t>6.1. Triển khai</a:t>
+            </a:r>
+          </a:p>
+          <a:p>
+            <a:pPr marL="0" indent="0">
+              <a:buNone/>
+            </a:pPr>
+            <a:endParaRPr lang="vi-VN" sz="2400"/>
+          </a:p>
+        </p:txBody>
+      </p:sp>
+      <p:pic>
+        <p:nvPicPr>
+          <p:cNvPr id="8" name="Hình ảnh 7">
+            <a:extLst>
+              <a:ext uri="{FF2B5EF4-FFF2-40B4-BE49-F238E27FC236}">
+                <a16:creationId xmlns:a16="http://schemas.microsoft.com/office/drawing/2014/main" id="{79831D53-D114-4247-A88F-21849EC71657}"/>
+              </a:ext>
+            </a:extLst>
+          </p:cNvPr>
+          <p:cNvPicPr>
+            <a:picLocks noChangeAspect="1"/>
+          </p:cNvPicPr>
+          <p:nvPr/>
+        </p:nvPicPr>
+        <p:blipFill>
+          <a:blip r:embed="rId2"/>
+          <a:stretch>
+            <a:fillRect/>
+          </a:stretch>
+        </p:blipFill>
+        <p:spPr>
+          <a:xfrm>
+            <a:off x="2649682" y="1554017"/>
+            <a:ext cx="5792062" cy="3993355"/>
+          </a:xfrm>
+          <a:prstGeom prst="rect">
+            <a:avLst/>
+          </a:prstGeom>
+        </p:spPr>
+      </p:pic>
+      <p:sp>
+        <p:nvSpPr>
+          <p:cNvPr id="10" name="Hộp Văn bản 9">
+            <a:extLst>
+              <a:ext uri="{FF2B5EF4-FFF2-40B4-BE49-F238E27FC236}">
+                <a16:creationId xmlns:a16="http://schemas.microsoft.com/office/drawing/2014/main" id="{DD2CD42F-072E-0A7B-7217-D5AB59B4960F}"/>
+              </a:ext>
+            </a:extLst>
+          </p:cNvPr>
+          <p:cNvSpPr txBox="1"/>
+          <p:nvPr/>
+        </p:nvSpPr>
+        <p:spPr>
+          <a:xfrm>
+            <a:off x="3730152" y="5623166"/>
+            <a:ext cx="3381054" cy="369332"/>
+          </a:xfrm>
+          <a:prstGeom prst="rect">
+            <a:avLst/>
+          </a:prstGeom>
+          <a:noFill/>
+        </p:spPr>
+        <p:txBody>
+          <a:bodyPr wrap="none" rtlCol="0">
+            <a:spAutoFit/>
+          </a:bodyPr>
+          <a:lstStyle/>
+          <a:p>
+            <a:r>
+              <a:rPr lang="vi-VN"/>
+              <a:t>Sơ đồ </a:t>
+            </a:r>
+            <a:r>
+              <a:rPr lang="vi-VN" sz="1600"/>
+              <a:t>usecase</a:t>
+            </a:r>
+            <a:r>
+              <a:rPr lang="vi-VN"/>
+              <a:t> thiết bị triển khai</a:t>
+            </a:r>
+          </a:p>
+        </p:txBody>
+      </p:sp>
+    </p:spTree>
+    <p:extLst>
+      <p:ext uri="{BB962C8B-B14F-4D97-AF65-F5344CB8AC3E}">
+        <p14:creationId xmlns:p14="http://schemas.microsoft.com/office/powerpoint/2010/main" val="2769200499"/>
+      </p:ext>
+    </p:extLst>
+  </p:cSld>
+  <p:clrMapOvr>
+    <a:masterClrMapping/>
+  </p:clrMapOvr>
+</p:sld>
+</file>
+
+<file path=ppt/slides/slide18.xml><?xml version="1.0" encoding="utf-8"?>
+<p:sld xmlns:a="http://schemas.openxmlformats.org/drawingml/2006/main" xmlns:r="http://schemas.openxmlformats.org/officeDocument/2006/relationships" xmlns:p="http://schemas.openxmlformats.org/presentationml/2006/main">
+  <p:cSld>
+    <p:spTree>
+      <p:nvGrpSpPr>
+        <p:cNvPr id="1" name="">
+          <a:extLst>
+            <a:ext uri="{FF2B5EF4-FFF2-40B4-BE49-F238E27FC236}">
+              <a16:creationId xmlns:a16="http://schemas.microsoft.com/office/drawing/2014/main" id="{D9C2F685-5CD0-76AE-0E0C-9FF017D2C86C}"/>
+            </a:ext>
+          </a:extLst>
+        </p:cNvPr>
+        <p:cNvGrpSpPr/>
+        <p:nvPr/>
+      </p:nvGrpSpPr>
+      <p:grpSpPr>
+        <a:xfrm>
+          <a:off x="0" y="0"/>
+          <a:ext cx="0" cy="0"/>
+          <a:chOff x="0" y="0"/>
+          <a:chExt cx="0" cy="0"/>
+        </a:xfrm>
+      </p:grpSpPr>
+      <p:sp>
+        <p:nvSpPr>
+          <p:cNvPr id="2" name="Title 1">
+            <a:extLst>
+              <a:ext uri="{FF2B5EF4-FFF2-40B4-BE49-F238E27FC236}">
+                <a16:creationId xmlns:a16="http://schemas.microsoft.com/office/drawing/2014/main" id="{9AA0F199-F58E-769C-0196-2C5E63E184A5}"/>
+              </a:ext>
+            </a:extLst>
+          </p:cNvPr>
+          <p:cNvSpPr>
+            <a:spLocks noGrp="1"/>
+          </p:cNvSpPr>
+          <p:nvPr>
+            <p:ph type="title"/>
+          </p:nvPr>
+        </p:nvSpPr>
+        <p:spPr/>
+        <p:txBody>
+          <a:bodyPr/>
+          <a:lstStyle/>
+          <a:p>
+            <a:r>
+              <a:rPr lang="vi-VN"/>
+              <a:t>6. Triển khai &amp; kết luận</a:t>
+            </a:r>
+            <a:endParaRPr lang="en-US"/>
+          </a:p>
+        </p:txBody>
+      </p:sp>
+      <p:sp>
+        <p:nvSpPr>
+          <p:cNvPr id="5" name="Slide Number Placeholder 4">
+            <a:extLst>
+              <a:ext uri="{FF2B5EF4-FFF2-40B4-BE49-F238E27FC236}">
+                <a16:creationId xmlns:a16="http://schemas.microsoft.com/office/drawing/2014/main" id="{048888C4-E78A-22B9-7BE2-58FB6BCA80DA}"/>
+              </a:ext>
+            </a:extLst>
+          </p:cNvPr>
+          <p:cNvSpPr>
+            <a:spLocks noGrp="1"/>
+          </p:cNvSpPr>
+          <p:nvPr>
+            <p:ph type="sldNum" sz="quarter" idx="12"/>
+          </p:nvPr>
+        </p:nvSpPr>
+        <p:spPr/>
+        <p:txBody>
+          <a:bodyPr/>
+          <a:lstStyle/>
+          <a:p>
+            <a:fld id="{9EA0BE3B-158A-4EDF-80DC-E394A0D1600F}" type="slidenum">
+              <a:rPr lang="en-US" smtClean="0"/>
+              <a:pPr/>
+              <a:t>18</a:t>
+            </a:fld>
+            <a:endParaRPr lang="en-US"/>
+          </a:p>
+        </p:txBody>
+      </p:sp>
+      <p:sp>
+        <p:nvSpPr>
+          <p:cNvPr id="7" name="Chỗ dành sẵn cho Biểu đồ 6">
+            <a:extLst>
+              <a:ext uri="{FF2B5EF4-FFF2-40B4-BE49-F238E27FC236}">
+                <a16:creationId xmlns:a16="http://schemas.microsoft.com/office/drawing/2014/main" id="{000C35CD-280F-DF5E-9B42-75DF2F88C9E6}"/>
+              </a:ext>
+            </a:extLst>
+          </p:cNvPr>
+          <p:cNvSpPr>
+            <a:spLocks noGrp="1"/>
+          </p:cNvSpPr>
+          <p:nvPr>
+            <p:ph type="chart" sz="quarter" idx="13"/>
+          </p:nvPr>
+        </p:nvSpPr>
+        <p:spPr>
+          <a:xfrm>
+            <a:off x="338735" y="1406526"/>
+            <a:ext cx="11560975" cy="4661766"/>
+          </a:xfrm>
+        </p:spPr>
+        <p:txBody>
+          <a:bodyPr/>
+          <a:lstStyle/>
+          <a:p>
+            <a:pPr marL="0" indent="0">
+              <a:buNone/>
+            </a:pPr>
+            <a:r>
+              <a:rPr lang="vi-VN" sz="2400" b="1"/>
+              <a:t>6.2. Kết luận</a:t>
+            </a:r>
+          </a:p>
+          <a:p>
+            <a:r>
+              <a:rPr lang="vi-VN" sz="2400"/>
+              <a:t>Hệ thống hoàn chỉnh quá trình từ thu thập dữ liệu đến triển khai trên thiết bị di động</a:t>
+            </a:r>
+          </a:p>
+          <a:p>
+            <a:r>
+              <a:rPr lang="vi-VN" sz="2400"/>
+              <a:t>Kết quả cuối cùng: CNN 1D + cos_znorm; EER đóng 2,24% / mở 10,83%</a:t>
+            </a:r>
+          </a:p>
+          <a:p>
+            <a:r>
+              <a:rPr lang="vi-VN" sz="2400"/>
+              <a:t>Hạn chế: tập mở còn ~10–11%; touch chưa hiệu quả; chưa đánh giá tấn công chủ động</a:t>
+            </a:r>
+          </a:p>
+          <a:p>
+            <a:r>
+              <a:rPr lang="vi-VN" sz="2400"/>
+              <a:t>Hướng phát triển</a:t>
+            </a:r>
+          </a:p>
+          <a:p>
+            <a:pPr lvl="1"/>
+            <a:r>
+              <a:rPr lang="vi-VN"/>
+              <a:t>Học biểu diễn (ArcFace)</a:t>
+            </a:r>
+          </a:p>
+          <a:p>
+            <a:pPr lvl="1"/>
+            <a:r>
+              <a:rPr lang="vi-VN"/>
+              <a:t>Mở rộng dữ liệu</a:t>
+            </a:r>
+          </a:p>
+          <a:p>
+            <a:pPr lvl="1"/>
+            <a:r>
+              <a:rPr lang="vi-VN"/>
+              <a:t>Hoàn thiện touch</a:t>
+            </a:r>
+          </a:p>
+          <a:p>
+            <a:pPr marL="0" indent="0">
+              <a:buNone/>
+            </a:pPr>
+            <a:endParaRPr lang="vi-VN" sz="2400"/>
+          </a:p>
+        </p:txBody>
+      </p:sp>
+    </p:spTree>
+    <p:extLst>
+      <p:ext uri="{BB962C8B-B14F-4D97-AF65-F5344CB8AC3E}">
+        <p14:creationId xmlns:p14="http://schemas.microsoft.com/office/powerpoint/2010/main" val="4090747"/>
+      </p:ext>
+    </p:extLst>
+  </p:cSld>
+  <p:clrMapOvr>
+    <a:masterClrMapping/>
+  </p:clrMapOvr>
+</p:sld>
+</file>
+
+<file path=ppt/slides/slide19.xml><?xml version="1.0" encoding="utf-8"?>
 <p:sld xmlns:a="http://schemas.openxmlformats.org/drawingml/2006/main" xmlns:r="http://schemas.openxmlformats.org/officeDocument/2006/relationships" xmlns:p="http://schemas.openxmlformats.org/presentationml/2006/main">
   <p:cSld>
     <p:spTree>
@@ -5185,7 +6928,7 @@
             <a:fld id="{9EA0BE3B-158A-4EDF-80DC-E394A0D1600F}" type="slidenum">
               <a:rPr lang="en-US" smtClean="0"/>
               <a:pPr/>
-              <a:t>15</a:t>
+              <a:t>19</a:t>
             </a:fld>
             <a:endParaRPr lang="en-US"/>
           </a:p>
@@ -5624,7 +7367,7 @@
             </a:pPr>
             <a:r>
               <a:rPr lang="vi-VN"/>
-              <a:t>Xây dựng dữ liệu &amp; mô hình</a:t>
+              <a:t>Xây dựng dữ liệu &amp; tiền xử lý</a:t>
             </a:r>
           </a:p>
           <a:p>
@@ -5634,7 +7377,7 @@
             </a:pPr>
             <a:r>
               <a:rPr lang="vi-VN"/>
-              <a:t>Kết quả đánh giá</a:t>
+              <a:t>Xây dựng mô hình</a:t>
             </a:r>
           </a:p>
           <a:p>
@@ -5644,7 +7387,7 @@
             </a:pPr>
             <a:r>
               <a:rPr lang="vi-VN"/>
-              <a:t>Triển khai &amp; sản phẩm</a:t>
+              <a:t>Kết quả đánh giá</a:t>
             </a:r>
           </a:p>
           <a:p>
@@ -5654,7 +7397,7 @@
             </a:pPr>
             <a:r>
               <a:rPr lang="vi-VN"/>
-              <a:t>Kết luận</a:t>
+              <a:t>Triển khai &amp; Kết luận</a:t>
             </a:r>
           </a:p>
           <a:p>
@@ -6145,7 +7888,7 @@
           <a:p>
             <a:r>
               <a:rPr lang="vi-VN"/>
-              <a:t>3. Xây dựng dữ liệu &amp; mô hình</a:t>
+              <a:t>3. Xây dựng dữ liệu &amp; tiền xử lý</a:t>
             </a:r>
             <a:endParaRPr lang="en-US"/>
           </a:p>
@@ -6797,7 +8540,7 @@
           <a:p>
             <a:r>
               <a:rPr lang="vi-VN"/>
-              <a:t>3. Xây dựng dữ liệu &amp; mô hình</a:t>
+              <a:t>3. Xây dựng dữ liệu &amp; tiền xử lý</a:t>
             </a:r>
             <a:endParaRPr lang="en-US"/>
           </a:p>
@@ -7086,6 +8829,302 @@
 </file>
 
 <file path=ppt/slides/slide8.xml><?xml version="1.0" encoding="utf-8"?>
+<p:sld xmlns:a="http://schemas.openxmlformats.org/drawingml/2006/main" xmlns:r="http://schemas.openxmlformats.org/officeDocument/2006/relationships" xmlns:p="http://schemas.openxmlformats.org/presentationml/2006/main">
+  <p:cSld>
+    <p:spTree>
+      <p:nvGrpSpPr>
+        <p:cNvPr id="1" name="">
+          <a:extLst>
+            <a:ext uri="{FF2B5EF4-FFF2-40B4-BE49-F238E27FC236}">
+              <a16:creationId xmlns:a16="http://schemas.microsoft.com/office/drawing/2014/main" id="{F0630B27-6FC7-41B5-6117-DAD0220E86A1}"/>
+            </a:ext>
+          </a:extLst>
+        </p:cNvPr>
+        <p:cNvGrpSpPr/>
+        <p:nvPr/>
+      </p:nvGrpSpPr>
+      <p:grpSpPr>
+        <a:xfrm>
+          <a:off x="0" y="0"/>
+          <a:ext cx="0" cy="0"/>
+          <a:chOff x="0" y="0"/>
+          <a:chExt cx="0" cy="0"/>
+        </a:xfrm>
+      </p:grpSpPr>
+      <p:sp>
+        <p:nvSpPr>
+          <p:cNvPr id="2" name="Title 1">
+            <a:extLst>
+              <a:ext uri="{FF2B5EF4-FFF2-40B4-BE49-F238E27FC236}">
+                <a16:creationId xmlns:a16="http://schemas.microsoft.com/office/drawing/2014/main" id="{EA1EDCAA-DE0D-0662-CD4B-67C5C09291A6}"/>
+              </a:ext>
+            </a:extLst>
+          </p:cNvPr>
+          <p:cNvSpPr>
+            <a:spLocks noGrp="1"/>
+          </p:cNvSpPr>
+          <p:nvPr>
+            <p:ph type="title"/>
+          </p:nvPr>
+        </p:nvSpPr>
+        <p:spPr/>
+        <p:txBody>
+          <a:bodyPr/>
+          <a:lstStyle/>
+          <a:p>
+            <a:r>
+              <a:rPr lang="vi-VN"/>
+              <a:t>3. Xây dựng dữ liệu &amp; tiền xử lý</a:t>
+            </a:r>
+            <a:endParaRPr lang="en-US"/>
+          </a:p>
+        </p:txBody>
+      </p:sp>
+      <p:sp>
+        <p:nvSpPr>
+          <p:cNvPr id="3" name="Chart Placeholder 2">
+            <a:extLst>
+              <a:ext uri="{FF2B5EF4-FFF2-40B4-BE49-F238E27FC236}">
+                <a16:creationId xmlns:a16="http://schemas.microsoft.com/office/drawing/2014/main" id="{95686E7B-4CA4-3274-08AC-17FC93061603}"/>
+              </a:ext>
+            </a:extLst>
+          </p:cNvPr>
+          <p:cNvSpPr>
+            <a:spLocks noGrp="1"/>
+          </p:cNvSpPr>
+          <p:nvPr>
+            <p:ph type="chart" sz="quarter" idx="13"/>
+          </p:nvPr>
+        </p:nvSpPr>
+        <p:spPr>
+          <a:xfrm>
+            <a:off x="338735" y="1406525"/>
+            <a:ext cx="11683547" cy="4670425"/>
+          </a:xfrm>
+        </p:spPr>
+        <p:txBody>
+          <a:bodyPr/>
+          <a:lstStyle/>
+          <a:p>
+            <a:pPr marL="0" indent="0">
+              <a:buNone/>
+            </a:pPr>
+            <a:r>
+              <a:rPr lang="vi-VN" b="1"/>
+              <a:t>3.2. Tiền xử lý dữ liệu</a:t>
+            </a:r>
+          </a:p>
+          <a:p>
+            <a:r>
+              <a:rPr lang="vi-VN" sz="2400" b="1"/>
+              <a:t>Kiểm tra chất lượng và phân đoạn</a:t>
+            </a:r>
+            <a:endParaRPr lang="vi-VN" sz="2400"/>
+          </a:p>
+          <a:p>
+            <a:pPr lvl="1"/>
+            <a:r>
+              <a:rPr lang="vi-VN" sz="2000"/>
+              <a:t> Tín hiệu ngồi ít biến đổi hơn đi bộ </a:t>
+            </a:r>
+            <a:r>
+              <a:rPr lang="vi-VN" sz="2000">
+                <a:sym typeface="Wingdings" panose="05000000000000000000" pitchFamily="2" charset="2"/>
+              </a:rPr>
+              <a:t> 2 ngữ cảnh chính gồm đi bộ và toàn bộ (đi bộ/ đứng/ ngồi)</a:t>
+            </a:r>
+            <a:endParaRPr lang="vi-VN"/>
+          </a:p>
+        </p:txBody>
+      </p:sp>
+      <p:sp>
+        <p:nvSpPr>
+          <p:cNvPr id="5" name="Slide Number Placeholder 4">
+            <a:extLst>
+              <a:ext uri="{FF2B5EF4-FFF2-40B4-BE49-F238E27FC236}">
+                <a16:creationId xmlns:a16="http://schemas.microsoft.com/office/drawing/2014/main" id="{6AEE565F-3928-F888-96C0-E41029AD0695}"/>
+              </a:ext>
+            </a:extLst>
+          </p:cNvPr>
+          <p:cNvSpPr>
+            <a:spLocks noGrp="1"/>
+          </p:cNvSpPr>
+          <p:nvPr>
+            <p:ph type="sldNum" sz="quarter" idx="12"/>
+          </p:nvPr>
+        </p:nvSpPr>
+        <p:spPr/>
+        <p:txBody>
+          <a:bodyPr/>
+          <a:lstStyle/>
+          <a:p>
+            <a:fld id="{9EA0BE3B-158A-4EDF-80DC-E394A0D1600F}" type="slidenum">
+              <a:rPr lang="en-US" smtClean="0"/>
+              <a:pPr/>
+              <a:t>8</a:t>
+            </a:fld>
+            <a:endParaRPr lang="en-US"/>
+          </a:p>
+        </p:txBody>
+      </p:sp>
+      <p:pic>
+        <p:nvPicPr>
+          <p:cNvPr id="7" name="Hình ảnh 6">
+            <a:extLst>
+              <a:ext uri="{FF2B5EF4-FFF2-40B4-BE49-F238E27FC236}">
+                <a16:creationId xmlns:a16="http://schemas.microsoft.com/office/drawing/2014/main" id="{0E414B43-C81E-6B96-0D6A-5467196A6FFF}"/>
+              </a:ext>
+            </a:extLst>
+          </p:cNvPr>
+          <p:cNvPicPr>
+            <a:picLocks noChangeAspect="1"/>
+          </p:cNvPicPr>
+          <p:nvPr/>
+        </p:nvPicPr>
+        <p:blipFill>
+          <a:blip r:embed="rId2">
+            <a:extLst>
+              <a:ext uri="{28A0092B-C50C-407E-A947-70E740481C1C}">
+                <a14:useLocalDpi xmlns:a14="http://schemas.microsoft.com/office/drawing/2010/main" val="0"/>
+              </a:ext>
+            </a:extLst>
+          </a:blip>
+          <a:stretch>
+            <a:fillRect/>
+          </a:stretch>
+        </p:blipFill>
+        <p:spPr>
+          <a:xfrm>
+            <a:off x="611600" y="2870164"/>
+            <a:ext cx="5070516" cy="2474895"/>
+          </a:xfrm>
+          <a:prstGeom prst="rect">
+            <a:avLst/>
+          </a:prstGeom>
+        </p:spPr>
+      </p:pic>
+      <p:pic>
+        <p:nvPicPr>
+          <p:cNvPr id="9" name="Hình ảnh 8">
+            <a:extLst>
+              <a:ext uri="{FF2B5EF4-FFF2-40B4-BE49-F238E27FC236}">
+                <a16:creationId xmlns:a16="http://schemas.microsoft.com/office/drawing/2014/main" id="{0DBDAF1D-A1EE-F910-A84A-635D9DB07F0E}"/>
+              </a:ext>
+            </a:extLst>
+          </p:cNvPr>
+          <p:cNvPicPr>
+            <a:picLocks noChangeAspect="1"/>
+          </p:cNvPicPr>
+          <p:nvPr/>
+        </p:nvPicPr>
+        <p:blipFill>
+          <a:blip r:embed="rId3">
+            <a:extLst>
+              <a:ext uri="{28A0092B-C50C-407E-A947-70E740481C1C}">
+                <a14:useLocalDpi xmlns:a14="http://schemas.microsoft.com/office/drawing/2010/main" val="0"/>
+              </a:ext>
+            </a:extLst>
+          </a:blip>
+          <a:stretch>
+            <a:fillRect/>
+          </a:stretch>
+        </p:blipFill>
+        <p:spPr>
+          <a:xfrm>
+            <a:off x="5954981" y="2815805"/>
+            <a:ext cx="5293252" cy="2583611"/>
+          </a:xfrm>
+          <a:prstGeom prst="rect">
+            <a:avLst/>
+          </a:prstGeom>
+        </p:spPr>
+      </p:pic>
+      <p:sp>
+        <p:nvSpPr>
+          <p:cNvPr id="13" name="Hộp Văn bản 12">
+            <a:extLst>
+              <a:ext uri="{FF2B5EF4-FFF2-40B4-BE49-F238E27FC236}">
+                <a16:creationId xmlns:a16="http://schemas.microsoft.com/office/drawing/2014/main" id="{E6EE3E24-A4EB-D712-7551-480BB9A2A48E}"/>
+              </a:ext>
+            </a:extLst>
+          </p:cNvPr>
+          <p:cNvSpPr txBox="1"/>
+          <p:nvPr/>
+        </p:nvSpPr>
+        <p:spPr>
+          <a:xfrm>
+            <a:off x="611600" y="5480916"/>
+            <a:ext cx="5070516" cy="338554"/>
+          </a:xfrm>
+          <a:prstGeom prst="rect">
+            <a:avLst/>
+          </a:prstGeom>
+          <a:noFill/>
+        </p:spPr>
+        <p:txBody>
+          <a:bodyPr wrap="square" rtlCol="0">
+            <a:spAutoFit/>
+          </a:bodyPr>
+          <a:lstStyle/>
+          <a:p>
+            <a:pPr algn="ctr"/>
+            <a:r>
+              <a:rPr lang="vi-VN" sz="1600"/>
+              <a:t>Tín hiệu gia tốc đi bộ</a:t>
+            </a:r>
+          </a:p>
+        </p:txBody>
+      </p:sp>
+      <p:sp>
+        <p:nvSpPr>
+          <p:cNvPr id="14" name="Hộp Văn bản 13">
+            <a:extLst>
+              <a:ext uri="{FF2B5EF4-FFF2-40B4-BE49-F238E27FC236}">
+                <a16:creationId xmlns:a16="http://schemas.microsoft.com/office/drawing/2014/main" id="{6F8AE0C3-20CB-B5E7-8D7D-24C603765A23}"/>
+              </a:ext>
+            </a:extLst>
+          </p:cNvPr>
+          <p:cNvSpPr txBox="1"/>
+          <p:nvPr/>
+        </p:nvSpPr>
+        <p:spPr>
+          <a:xfrm>
+            <a:off x="6096000" y="5553517"/>
+            <a:ext cx="5152233" cy="338554"/>
+          </a:xfrm>
+          <a:prstGeom prst="rect">
+            <a:avLst/>
+          </a:prstGeom>
+          <a:noFill/>
+        </p:spPr>
+        <p:txBody>
+          <a:bodyPr wrap="square" rtlCol="0">
+            <a:spAutoFit/>
+          </a:bodyPr>
+          <a:lstStyle/>
+          <a:p>
+            <a:pPr algn="ctr"/>
+            <a:r>
+              <a:rPr lang="vi-VN" sz="1600"/>
+              <a:t>Tín hiệu gia tốc ngồi</a:t>
+            </a:r>
+          </a:p>
+        </p:txBody>
+      </p:sp>
+    </p:spTree>
+    <p:extLst>
+      <p:ext uri="{BB962C8B-B14F-4D97-AF65-F5344CB8AC3E}">
+        <p14:creationId xmlns:p14="http://schemas.microsoft.com/office/powerpoint/2010/main" val="4194825471"/>
+      </p:ext>
+    </p:extLst>
+  </p:cSld>
+  <p:clrMapOvr>
+    <a:masterClrMapping/>
+  </p:clrMapOvr>
+</p:sld>
+</file>
+
+<file path=ppt/slides/slide9.xml><?xml version="1.0" encoding="utf-8"?>
 <p:sld xmlns:a="http://schemas.openxmlformats.org/drawingml/2006/main" xmlns:r="http://schemas.openxmlformats.org/officeDocument/2006/relationships" xmlns:p="http://schemas.openxmlformats.org/presentationml/2006/main">
   <p:cSld>
     <p:spTree>
@@ -7131,7 +9170,7 @@
           <a:p>
             <a:r>
               <a:rPr lang="vi-VN"/>
-              <a:t>3. Xây dựng dữ liệu &amp; mô hình</a:t>
+              <a:t>3. Xây dựng dữ liệu &amp; tiền xử lý</a:t>
             </a:r>
             <a:endParaRPr lang="en-US"/>
           </a:p>
@@ -7168,37 +9207,22 @@
             </a:pPr>
             <a:r>
               <a:rPr lang="vi-VN" b="1"/>
-              <a:t>3.2. Xây dựng mô hình</a:t>
-            </a:r>
-          </a:p>
-          <a:p>
-            <a:r>
-              <a:rPr lang="vi-VN"/>
-              <a:t>Nhánh quán tính: </a:t>
-            </a:r>
+              <a:t>3.2. Tiền xử lý dữ liệu</a:t>
+            </a:r>
+          </a:p>
+          <a:p>
+            <a:r>
+              <a:rPr lang="vi-VN" sz="2400" b="1"/>
+              <a:t>Kiểm tra chất lượng và phân đoạn</a:t>
+            </a:r>
+            <a:endParaRPr lang="vi-VN" sz="2400"/>
           </a:p>
           <a:p>
             <a:pPr lvl="1"/>
             <a:r>
-              <a:rPr lang="vi-VN"/>
-              <a:t>CNN 1D mã hóa cửa sổ 200×9 → embedding 128 chiều (khảo sát cùng CNN-LSTM, CNN-BiLSTM)</a:t>
-            </a:r>
-          </a:p>
-          <a:p>
-            <a:pPr lvl="1"/>
-            <a:r>
-              <a:rPr lang="vi-VN"/>
-              <a:t>Nhận dạng tập mở: anchor → cosine → z-norm cohort → sigmoid (hàm cos_znorm)</a:t>
-            </a:r>
-          </a:p>
-          <a:p>
-            <a:r>
-              <a:rPr lang="vi-VN"/>
-              <a:t>Nhánh touch 33 chiều (Random Forest) + dung hợp điểm</a:t>
-            </a:r>
-          </a:p>
-          <a:p>
-            <a:endParaRPr lang="vi-VN" sz="2400"/>
+              <a:rPr lang="vi-VN" sz="2000"/>
+              <a:t> Cắt tín hiệu tại khoảng trống lớn hơn ngưỡng và bỏ đoạn quá ngắn</a:t>
+            </a:r>
           </a:p>
           <a:p>
             <a:pPr marL="0" indent="0">
@@ -7214,147 +9238,6 @@
             <a:extLst>
               <a:ext uri="{FF2B5EF4-FFF2-40B4-BE49-F238E27FC236}">
                 <a16:creationId xmlns:a16="http://schemas.microsoft.com/office/drawing/2014/main" id="{7F5860C8-7DEC-B70C-66A2-7554912C5D46}"/>
-              </a:ext>
-            </a:extLst>
-          </p:cNvPr>
-          <p:cNvSpPr>
-            <a:spLocks noGrp="1"/>
-          </p:cNvSpPr>
-          <p:nvPr>
-            <p:ph type="sldNum" sz="quarter" idx="12"/>
-          </p:nvPr>
-        </p:nvSpPr>
-        <p:spPr/>
-        <p:txBody>
-          <a:bodyPr/>
-          <a:lstStyle/>
-          <a:p>
-            <a:fld id="{9EA0BE3B-158A-4EDF-80DC-E394A0D1600F}" type="slidenum">
-              <a:rPr lang="en-US" smtClean="0"/>
-              <a:pPr/>
-              <a:t>8</a:t>
-            </a:fld>
-            <a:endParaRPr lang="en-US"/>
-          </a:p>
-        </p:txBody>
-      </p:sp>
-    </p:spTree>
-    <p:extLst>
-      <p:ext uri="{BB962C8B-B14F-4D97-AF65-F5344CB8AC3E}">
-        <p14:creationId xmlns:p14="http://schemas.microsoft.com/office/powerpoint/2010/main" val="3157123402"/>
-      </p:ext>
-    </p:extLst>
-  </p:cSld>
-  <p:clrMapOvr>
-    <a:masterClrMapping/>
-  </p:clrMapOvr>
-</p:sld>
-</file>
-
-<file path=ppt/slides/slide9.xml><?xml version="1.0" encoding="utf-8"?>
-<p:sld xmlns:a="http://schemas.openxmlformats.org/drawingml/2006/main" xmlns:r="http://schemas.openxmlformats.org/officeDocument/2006/relationships" xmlns:p="http://schemas.openxmlformats.org/presentationml/2006/main">
-  <p:cSld>
-    <p:spTree>
-      <p:nvGrpSpPr>
-        <p:cNvPr id="1" name="">
-          <a:extLst>
-            <a:ext uri="{FF2B5EF4-FFF2-40B4-BE49-F238E27FC236}">
-              <a16:creationId xmlns:a16="http://schemas.microsoft.com/office/drawing/2014/main" id="{8F3DD39F-7D4B-8919-E95C-093A3E7D8B29}"/>
-            </a:ext>
-          </a:extLst>
-        </p:cNvPr>
-        <p:cNvGrpSpPr/>
-        <p:nvPr/>
-      </p:nvGrpSpPr>
-      <p:grpSpPr>
-        <a:xfrm>
-          <a:off x="0" y="0"/>
-          <a:ext cx="0" cy="0"/>
-          <a:chOff x="0" y="0"/>
-          <a:chExt cx="0" cy="0"/>
-        </a:xfrm>
-      </p:grpSpPr>
-      <p:sp>
-        <p:nvSpPr>
-          <p:cNvPr id="2" name="Title 1">
-            <a:extLst>
-              <a:ext uri="{FF2B5EF4-FFF2-40B4-BE49-F238E27FC236}">
-                <a16:creationId xmlns:a16="http://schemas.microsoft.com/office/drawing/2014/main" id="{30640617-7424-9516-7EA3-09E786B29819}"/>
-              </a:ext>
-            </a:extLst>
-          </p:cNvPr>
-          <p:cNvSpPr>
-            <a:spLocks noGrp="1"/>
-          </p:cNvSpPr>
-          <p:nvPr>
-            <p:ph type="title"/>
-          </p:nvPr>
-        </p:nvSpPr>
-        <p:spPr/>
-        <p:txBody>
-          <a:bodyPr/>
-          <a:lstStyle/>
-          <a:p>
-            <a:endParaRPr lang="en-US"/>
-          </a:p>
-        </p:txBody>
-      </p:sp>
-      <p:sp>
-        <p:nvSpPr>
-          <p:cNvPr id="3" name="Chart Placeholder 2">
-            <a:extLst>
-              <a:ext uri="{FF2B5EF4-FFF2-40B4-BE49-F238E27FC236}">
-                <a16:creationId xmlns:a16="http://schemas.microsoft.com/office/drawing/2014/main" id="{2CBB4C80-E123-AF8B-B6F8-D35F3192162D}"/>
-              </a:ext>
-            </a:extLst>
-          </p:cNvPr>
-          <p:cNvSpPr>
-            <a:spLocks noGrp="1"/>
-          </p:cNvSpPr>
-          <p:nvPr>
-            <p:ph type="chart" sz="quarter" idx="13"/>
-          </p:nvPr>
-        </p:nvSpPr>
-        <p:spPr/>
-        <p:txBody>
-          <a:bodyPr/>
-          <a:lstStyle/>
-          <a:p>
-            <a:endParaRPr lang="vi-VN"/>
-          </a:p>
-        </p:txBody>
-      </p:sp>
-      <p:sp>
-        <p:nvSpPr>
-          <p:cNvPr id="4" name="Table Placeholder 3">
-            <a:extLst>
-              <a:ext uri="{FF2B5EF4-FFF2-40B4-BE49-F238E27FC236}">
-                <a16:creationId xmlns:a16="http://schemas.microsoft.com/office/drawing/2014/main" id="{0B0E9581-D575-41FD-9C1E-220AE5191B45}"/>
-              </a:ext>
-            </a:extLst>
-          </p:cNvPr>
-          <p:cNvSpPr>
-            <a:spLocks noGrp="1"/>
-          </p:cNvSpPr>
-          <p:nvPr>
-            <p:ph type="tbl" sz="quarter" idx="14"/>
-          </p:nvPr>
-        </p:nvSpPr>
-        <p:spPr/>
-        <p:txBody>
-          <a:bodyPr/>
-          <a:lstStyle/>
-          <a:p>
-            <a:endParaRPr lang="vi-VN"/>
-          </a:p>
-        </p:txBody>
-      </p:sp>
-      <p:sp>
-        <p:nvSpPr>
-          <p:cNvPr id="5" name="Slide Number Placeholder 4">
-            <a:extLst>
-              <a:ext uri="{FF2B5EF4-FFF2-40B4-BE49-F238E27FC236}">
-                <a16:creationId xmlns:a16="http://schemas.microsoft.com/office/drawing/2014/main" id="{5243B307-FEAD-6E88-B9FD-0F96E618221B}"/>
               </a:ext>
             </a:extLst>
           </p:cNvPr>
@@ -7379,10 +9262,46 @@
           </a:p>
         </p:txBody>
       </p:sp>
+      <p:pic>
+        <p:nvPicPr>
+          <p:cNvPr id="6" name="Hình ảnh 5">
+            <a:extLst>
+              <a:ext uri="{FF2B5EF4-FFF2-40B4-BE49-F238E27FC236}">
+                <a16:creationId xmlns:a16="http://schemas.microsoft.com/office/drawing/2014/main" id="{AA580411-0BE0-4BC0-A332-B3B0A00BE5B8}"/>
+              </a:ext>
+            </a:extLst>
+          </p:cNvPr>
+          <p:cNvPicPr>
+            <a:picLocks noChangeAspect="1"/>
+          </p:cNvPicPr>
+          <p:nvPr/>
+        </p:nvPicPr>
+        <p:blipFill>
+          <a:blip r:embed="rId2">
+            <a:extLst>
+              <a:ext uri="{28A0092B-C50C-407E-A947-70E740481C1C}">
+                <a14:useLocalDpi xmlns:a14="http://schemas.microsoft.com/office/drawing/2010/main" val="0"/>
+              </a:ext>
+            </a:extLst>
+          </a:blip>
+          <a:stretch>
+            <a:fillRect/>
+          </a:stretch>
+        </p:blipFill>
+        <p:spPr>
+          <a:xfrm>
+            <a:off x="1724860" y="2908624"/>
+            <a:ext cx="7765534" cy="2848769"/>
+          </a:xfrm>
+          <a:prstGeom prst="rect">
+            <a:avLst/>
+          </a:prstGeom>
+        </p:spPr>
+      </p:pic>
     </p:spTree>
     <p:extLst>
       <p:ext uri="{BB962C8B-B14F-4D97-AF65-F5344CB8AC3E}">
-        <p14:creationId xmlns:p14="http://schemas.microsoft.com/office/powerpoint/2010/main" val="3164548458"/>
+        <p14:creationId xmlns:p14="http://schemas.microsoft.com/office/powerpoint/2010/main" val="3157123402"/>
       </p:ext>
     </p:extLst>
   </p:cSld>

--- a/20225699_MaiVanDang_20252.pptx
+++ b/20225699_MaiVanDang_20252.pptx
@@ -5,10 +5,10 @@
     <p:sldMasterId id="2147483648" r:id="rId4"/>
   </p:sldMasterIdLst>
   <p:notesMasterIdLst>
-    <p:notesMasterId r:id="rId24"/>
+    <p:notesMasterId r:id="rId25"/>
   </p:notesMasterIdLst>
   <p:handoutMasterIdLst>
-    <p:handoutMasterId r:id="rId25"/>
+    <p:handoutMasterId r:id="rId26"/>
   </p:handoutMasterIdLst>
   <p:sldIdLst>
     <p:sldId id="259" r:id="rId5"/>
@@ -26,10 +26,11 @@
     <p:sldId id="269" r:id="rId17"/>
     <p:sldId id="277" r:id="rId18"/>
     <p:sldId id="278" r:id="rId19"/>
-    <p:sldId id="279" r:id="rId20"/>
-    <p:sldId id="280" r:id="rId21"/>
-    <p:sldId id="281" r:id="rId22"/>
-    <p:sldId id="262" r:id="rId23"/>
+    <p:sldId id="282" r:id="rId20"/>
+    <p:sldId id="279" r:id="rId21"/>
+    <p:sldId id="280" r:id="rId22"/>
+    <p:sldId id="281" r:id="rId23"/>
+    <p:sldId id="262" r:id="rId24"/>
   </p:sldIdLst>
   <p:sldSz cx="12192000" cy="6858000"/>
   <p:notesSz cx="6858000" cy="9144000"/>
@@ -239,7 +240,7 @@
           <a:p>
             <a:fld id="{48B45424-6BAC-416C-8F6C-5F9DE854A36B}" type="datetimeFigureOut">
               <a:rPr lang="en-US" smtClean="0"/>
-              <a:t>7/9/2026</a:t>
+              <a:t>7/10/2026</a:t>
             </a:fld>
             <a:endParaRPr lang="en-US"/>
           </a:p>
@@ -417,7 +418,7 @@
           <a:p>
             <a:fld id="{6B733702-C25A-40B9-9167-54BAA79B29B0}" type="datetimeFigureOut">
               <a:rPr lang="en-US" smtClean="0"/>
-              <a:t>7/9/2026</a:t>
+              <a:t>7/10/2026</a:t>
             </a:fld>
             <a:endParaRPr lang="en-US"/>
           </a:p>
@@ -758,7 +759,7 @@
           <a:p>
             <a:fld id="{58E92B09-5AF4-4E86-A8BE-E866F0E2C017}" type="datetime1">
               <a:rPr lang="en-US" smtClean="0"/>
-              <a:t>7/9/2026</a:t>
+              <a:t>7/10/2026</a:t>
             </a:fld>
             <a:endParaRPr lang="en-US"/>
           </a:p>
@@ -944,7 +945,7 @@
             <a:fld id="{B3ACFEBC-8634-4116-B617-2BE5C2034C2C}" type="datetime1">
               <a:rPr lang="en-US" smtClean="0"/>
               <a:pPr/>
-              <a:t>7/9/2026</a:t>
+              <a:t>7/10/2026</a:t>
             </a:fld>
             <a:endParaRPr lang="en-US"/>
           </a:p>
@@ -1265,7 +1266,7 @@
             <a:fld id="{82F65D4C-DEE4-4C7B-91C4-D6D57A523E98}" type="datetime1">
               <a:rPr lang="en-US" smtClean="0"/>
               <a:pPr/>
-              <a:t>7/9/2026</a:t>
+              <a:t>7/10/2026</a:t>
             </a:fld>
             <a:endParaRPr lang="en-US"/>
           </a:p>
@@ -1572,7 +1573,7 @@
             <a:fld id="{F70EAA40-3A53-4A3D-924A-D38F1059C7D5}" type="datetime1">
               <a:rPr lang="en-US" smtClean="0"/>
               <a:pPr/>
-              <a:t>7/9/2026</a:t>
+              <a:t>7/10/2026</a:t>
             </a:fld>
             <a:endParaRPr lang="en-US"/>
           </a:p>
@@ -1906,7 +1907,7 @@
             <a:fld id="{B3ACFEBC-8634-4116-B617-2BE5C2034C2C}" type="datetime1">
               <a:rPr lang="en-US" smtClean="0"/>
               <a:pPr/>
-              <a:t>7/9/2026</a:t>
+              <a:t>7/10/2026</a:t>
             </a:fld>
             <a:endParaRPr lang="en-US"/>
           </a:p>
@@ -2374,7 +2375,7 @@
           <a:p>
             <a:fld id="{8CDB0C24-DFE0-41C5-B02D-FC32F5C22F7C}" type="datetime1">
               <a:rPr lang="en-US" smtClean="0"/>
-              <a:t>7/9/2026</a:t>
+              <a:t>7/10/2026</a:t>
             </a:fld>
             <a:endParaRPr lang="en-US"/>
           </a:p>
@@ -2560,7 +2561,7 @@
             <a:fld id="{19A9EFEF-A194-4819-82D7-1112425D0E86}" type="datetime1">
               <a:rPr lang="en-US" smtClean="0"/>
               <a:pPr/>
-              <a:t>7/9/2026</a:t>
+              <a:t>7/10/2026</a:t>
             </a:fld>
             <a:endParaRPr lang="en-US"/>
           </a:p>
@@ -2881,7 +2882,7 @@
             <a:fld id="{EEBFCEF3-2DDE-476B-8A96-303EC557333C}" type="datetime1">
               <a:rPr lang="en-US" smtClean="0"/>
               <a:pPr/>
-              <a:t>7/9/2026</a:t>
+              <a:t>7/10/2026</a:t>
             </a:fld>
             <a:endParaRPr lang="en-US"/>
           </a:p>
@@ -3362,7 +3363,7 @@
           <a:p>
             <a:fld id="{8CDB0C24-DFE0-41C5-B02D-FC32F5C22F7C}" type="datetime1">
               <a:rPr lang="en-US" smtClean="0"/>
-              <a:t>7/9/2026</a:t>
+              <a:t>7/10/2026</a:t>
             </a:fld>
             <a:endParaRPr lang="en-US"/>
           </a:p>
@@ -3548,7 +3549,7 @@
             <a:fld id="{B3ACFEBC-8634-4116-B617-2BE5C2034C2C}" type="datetime1">
               <a:rPr lang="en-US" smtClean="0"/>
               <a:pPr/>
-              <a:t>7/9/2026</a:t>
+              <a:t>7/10/2026</a:t>
             </a:fld>
             <a:endParaRPr lang="en-US"/>
           </a:p>
@@ -4016,7 +4017,7 @@
           <a:p>
             <a:fld id="{8CDB0C24-DFE0-41C5-B02D-FC32F5C22F7C}" type="datetime1">
               <a:rPr lang="en-US" smtClean="0"/>
-              <a:t>7/9/2026</a:t>
+              <a:t>7/10/2026</a:t>
             </a:fld>
             <a:endParaRPr lang="en-US"/>
           </a:p>
@@ -5269,7 +5270,7 @@
           <a:p>
             <a:r>
               <a:rPr lang="vi-VN" sz="2400"/>
-              <a:t>Nhánh touch 33 chiều (Random Forest) + dung hợp — vai trò đối chứng</a:t>
+              <a:t>Nhánh touch 33 chiều (Random Forest) + dung hợp - vai trò đối chứng</a:t>
             </a:r>
           </a:p>
           <a:p>
@@ -6287,6 +6288,141 @@
   <p:cSld>
     <p:spTree>
       <p:nvGrpSpPr>
+        <p:cNvPr id="1" name=""/>
+        <p:cNvGrpSpPr/>
+        <p:nvPr/>
+      </p:nvGrpSpPr>
+      <p:grpSpPr>
+        <a:xfrm>
+          <a:off x="0" y="0"/>
+          <a:ext cx="0" cy="0"/>
+          <a:chOff x="0" y="0"/>
+          <a:chExt cx="0" cy="0"/>
+        </a:xfrm>
+      </p:grpSpPr>
+      <p:sp>
+        <p:nvSpPr>
+          <p:cNvPr id="2" name="Chỗ dành sẵn cho Số hiệu Bản chiếu 1">
+            <a:extLst>
+              <a:ext uri="{FF2B5EF4-FFF2-40B4-BE49-F238E27FC236}">
+                <a16:creationId xmlns:a16="http://schemas.microsoft.com/office/drawing/2014/main" id="{7CEA7D3A-1FFE-C55A-00A9-55C477A569A9}"/>
+              </a:ext>
+            </a:extLst>
+          </p:cNvPr>
+          <p:cNvSpPr>
+            <a:spLocks noGrp="1"/>
+          </p:cNvSpPr>
+          <p:nvPr>
+            <p:ph type="sldNum" sz="quarter" idx="12"/>
+          </p:nvPr>
+        </p:nvSpPr>
+        <p:spPr/>
+        <p:txBody>
+          <a:bodyPr/>
+          <a:lstStyle/>
+          <a:p>
+            <a:fld id="{9EA0BE3B-158A-4EDF-80DC-E394A0D1600F}" type="slidenum">
+              <a:rPr lang="en-US" smtClean="0"/>
+              <a:pPr/>
+              <a:t>16</a:t>
+            </a:fld>
+            <a:endParaRPr lang="en-US"/>
+          </a:p>
+        </p:txBody>
+      </p:sp>
+      <p:sp>
+        <p:nvSpPr>
+          <p:cNvPr id="3" name="Tiêu đề 2">
+            <a:extLst>
+              <a:ext uri="{FF2B5EF4-FFF2-40B4-BE49-F238E27FC236}">
+                <a16:creationId xmlns:a16="http://schemas.microsoft.com/office/drawing/2014/main" id="{711C71EE-E5BC-E07D-E68B-77FB473C6E22}"/>
+              </a:ext>
+            </a:extLst>
+          </p:cNvPr>
+          <p:cNvSpPr>
+            <a:spLocks noGrp="1"/>
+          </p:cNvSpPr>
+          <p:nvPr>
+            <p:ph type="title"/>
+          </p:nvPr>
+        </p:nvSpPr>
+        <p:spPr/>
+        <p:txBody>
+          <a:bodyPr/>
+          <a:lstStyle/>
+          <a:p>
+            <a:endParaRPr lang="vi-VN"/>
+          </a:p>
+        </p:txBody>
+      </p:sp>
+      <p:sp>
+        <p:nvSpPr>
+          <p:cNvPr id="4" name="Chỗ dành sẵn cho Biểu đồ 3">
+            <a:extLst>
+              <a:ext uri="{FF2B5EF4-FFF2-40B4-BE49-F238E27FC236}">
+                <a16:creationId xmlns:a16="http://schemas.microsoft.com/office/drawing/2014/main" id="{D7B4331E-2D34-5A0E-E630-B044953B8B65}"/>
+              </a:ext>
+            </a:extLst>
+          </p:cNvPr>
+          <p:cNvSpPr>
+            <a:spLocks noGrp="1"/>
+          </p:cNvSpPr>
+          <p:nvPr>
+            <p:ph type="chart" sz="quarter" idx="13"/>
+          </p:nvPr>
+        </p:nvSpPr>
+        <p:spPr/>
+        <p:txBody>
+          <a:bodyPr/>
+          <a:lstStyle/>
+          <a:p>
+            <a:endParaRPr lang="vi-VN"/>
+          </a:p>
+        </p:txBody>
+      </p:sp>
+      <p:sp>
+        <p:nvSpPr>
+          <p:cNvPr id="5" name="Chỗ dành sẵn cho Bảng 4">
+            <a:extLst>
+              <a:ext uri="{FF2B5EF4-FFF2-40B4-BE49-F238E27FC236}">
+                <a16:creationId xmlns:a16="http://schemas.microsoft.com/office/drawing/2014/main" id="{1145F35E-64F0-260B-C546-BA8F851DD8E6}"/>
+              </a:ext>
+            </a:extLst>
+          </p:cNvPr>
+          <p:cNvSpPr>
+            <a:spLocks noGrp="1"/>
+          </p:cNvSpPr>
+          <p:nvPr>
+            <p:ph type="tbl" sz="quarter" idx="14"/>
+          </p:nvPr>
+        </p:nvSpPr>
+        <p:spPr/>
+        <p:txBody>
+          <a:bodyPr/>
+          <a:lstStyle/>
+          <a:p>
+            <a:endParaRPr lang="vi-VN"/>
+          </a:p>
+        </p:txBody>
+      </p:sp>
+    </p:spTree>
+    <p:extLst>
+      <p:ext uri="{BB962C8B-B14F-4D97-AF65-F5344CB8AC3E}">
+        <p14:creationId xmlns:p14="http://schemas.microsoft.com/office/powerpoint/2010/main" val="1691121360"/>
+      </p:ext>
+    </p:extLst>
+  </p:cSld>
+  <p:clrMapOvr>
+    <a:masterClrMapping/>
+  </p:clrMapOvr>
+</p:sld>
+</file>
+
+<file path=ppt/slides/slide17.xml><?xml version="1.0" encoding="utf-8"?>
+<p:sld xmlns:a="http://schemas.openxmlformats.org/drawingml/2006/main" xmlns:r="http://schemas.openxmlformats.org/officeDocument/2006/relationships" xmlns:p="http://schemas.openxmlformats.org/presentationml/2006/main">
+  <p:cSld>
+    <p:spTree>
+      <p:nvGrpSpPr>
         <p:cNvPr id="1" name="">
           <a:extLst>
             <a:ext uri="{FF2B5EF4-FFF2-40B4-BE49-F238E27FC236}">
@@ -6358,7 +6494,7 @@
             <a:fld id="{9EA0BE3B-158A-4EDF-80DC-E394A0D1600F}" type="slidenum">
               <a:rPr lang="en-US" smtClean="0"/>
               <a:pPr/>
-              <a:t>16</a:t>
+              <a:t>17</a:t>
             </a:fld>
             <a:endParaRPr lang="en-US"/>
           </a:p>
@@ -6443,7 +6579,7 @@
 </p:sld>
 </file>
 
-<file path=ppt/slides/slide17.xml><?xml version="1.0" encoding="utf-8"?>
+<file path=ppt/slides/slide18.xml><?xml version="1.0" encoding="utf-8"?>
 <p:sld xmlns:a="http://schemas.openxmlformats.org/drawingml/2006/main" xmlns:r="http://schemas.openxmlformats.org/officeDocument/2006/relationships" xmlns:p="http://schemas.openxmlformats.org/presentationml/2006/main">
   <p:cSld>
     <p:spTree>
@@ -6519,7 +6655,7 @@
             <a:fld id="{9EA0BE3B-158A-4EDF-80DC-E394A0D1600F}" type="slidenum">
               <a:rPr lang="en-US" smtClean="0"/>
               <a:pPr/>
-              <a:t>17</a:t>
+              <a:t>18</a:t>
             </a:fld>
             <a:endParaRPr lang="en-US"/>
           </a:p>
@@ -6653,7 +6789,7 @@
 </p:sld>
 </file>
 
-<file path=ppt/slides/slide18.xml><?xml version="1.0" encoding="utf-8"?>
+<file path=ppt/slides/slide19.xml><?xml version="1.0" encoding="utf-8"?>
 <p:sld xmlns:a="http://schemas.openxmlformats.org/drawingml/2006/main" xmlns:r="http://schemas.openxmlformats.org/officeDocument/2006/relationships" xmlns:p="http://schemas.openxmlformats.org/presentationml/2006/main">
   <p:cSld>
     <p:spTree>
@@ -6729,7 +6865,7 @@
             <a:fld id="{9EA0BE3B-158A-4EDF-80DC-E394A0D1600F}" type="slidenum">
               <a:rPr lang="en-US" smtClean="0"/>
               <a:pPr/>
-              <a:t>18</a:t>
+              <a:t>19</a:t>
             </a:fld>
             <a:endParaRPr lang="en-US"/>
           </a:p>
@@ -6826,118 +6962,6 @@
     <p:extLst>
       <p:ext uri="{BB962C8B-B14F-4D97-AF65-F5344CB8AC3E}">
         <p14:creationId xmlns:p14="http://schemas.microsoft.com/office/powerpoint/2010/main" val="4090747"/>
-      </p:ext>
-    </p:extLst>
-  </p:cSld>
-  <p:clrMapOvr>
-    <a:masterClrMapping/>
-  </p:clrMapOvr>
-</p:sld>
-</file>
-
-<file path=ppt/slides/slide19.xml><?xml version="1.0" encoding="utf-8"?>
-<p:sld xmlns:a="http://schemas.openxmlformats.org/drawingml/2006/main" xmlns:r="http://schemas.openxmlformats.org/officeDocument/2006/relationships" xmlns:p="http://schemas.openxmlformats.org/presentationml/2006/main">
-  <p:cSld>
-    <p:spTree>
-      <p:nvGrpSpPr>
-        <p:cNvPr id="1" name=""/>
-        <p:cNvGrpSpPr/>
-        <p:nvPr/>
-      </p:nvGrpSpPr>
-      <p:grpSpPr>
-        <a:xfrm>
-          <a:off x="0" y="0"/>
-          <a:ext cx="0" cy="0"/>
-          <a:chOff x="0" y="0"/>
-          <a:chExt cx="0" cy="0"/>
-        </a:xfrm>
-      </p:grpSpPr>
-      <p:sp>
-        <p:nvSpPr>
-          <p:cNvPr id="2" name="Title 6">
-            <a:extLst>
-              <a:ext uri="{FF2B5EF4-FFF2-40B4-BE49-F238E27FC236}">
-                <a16:creationId xmlns:a16="http://schemas.microsoft.com/office/drawing/2014/main" id="{5945A2BB-ABB6-48FB-A491-502474D93E34}"/>
-              </a:ext>
-            </a:extLst>
-          </p:cNvPr>
-          <p:cNvSpPr txBox="1">
-            <a:spLocks/>
-          </p:cNvSpPr>
-          <p:nvPr/>
-        </p:nvSpPr>
-        <p:spPr>
-          <a:xfrm>
-            <a:off x="5605763" y="2869457"/>
-            <a:ext cx="5422456" cy="971304"/>
-          </a:xfrm>
-          <a:prstGeom prst="rect">
-            <a:avLst/>
-          </a:prstGeom>
-        </p:spPr>
-        <p:txBody>
-          <a:bodyPr/>
-          <a:lstStyle>
-            <a:lvl1pPr algn="l" defTabSz="914400" rtl="0" eaLnBrk="1" latinLnBrk="0" hangingPunct="1">
-              <a:lnSpc>
-                <a:spcPct val="90000"/>
-              </a:lnSpc>
-              <a:spcBef>
-                <a:spcPct val="0"/>
-              </a:spcBef>
-              <a:buNone/>
-              <a:defRPr sz="7200" b="1" kern="1200">
-                <a:solidFill>
-                  <a:srgbClr val="C00000"/>
-                </a:solidFill>
-                <a:latin typeface="Lato" panose="020F0502020204030203" pitchFamily="34" charset="0"/>
-                <a:ea typeface="Lato" panose="020F0502020204030203" pitchFamily="34" charset="0"/>
-                <a:cs typeface="Lato" panose="020F0502020204030203" pitchFamily="34" charset="0"/>
-              </a:defRPr>
-            </a:lvl1pPr>
-          </a:lstStyle>
-          <a:p>
-            <a:r>
-              <a:rPr lang="en-US" sz="6000"/>
-              <a:t>THANK YOU !</a:t>
-            </a:r>
-          </a:p>
-        </p:txBody>
-      </p:sp>
-      <p:sp>
-        <p:nvSpPr>
-          <p:cNvPr id="3" name="Slide Number Placeholder 2">
-            <a:extLst>
-              <a:ext uri="{FF2B5EF4-FFF2-40B4-BE49-F238E27FC236}">
-                <a16:creationId xmlns:a16="http://schemas.microsoft.com/office/drawing/2014/main" id="{B255FE58-BA70-418C-863F-55066B6675FB}"/>
-              </a:ext>
-            </a:extLst>
-          </p:cNvPr>
-          <p:cNvSpPr>
-            <a:spLocks noGrp="1"/>
-          </p:cNvSpPr>
-          <p:nvPr>
-            <p:ph type="sldNum" sz="quarter" idx="12"/>
-          </p:nvPr>
-        </p:nvSpPr>
-        <p:spPr/>
-        <p:txBody>
-          <a:bodyPr/>
-          <a:lstStyle/>
-          <a:p>
-            <a:fld id="{9EA0BE3B-158A-4EDF-80DC-E394A0D1600F}" type="slidenum">
-              <a:rPr lang="en-US" smtClean="0"/>
-              <a:pPr/>
-              <a:t>19</a:t>
-            </a:fld>
-            <a:endParaRPr lang="en-US"/>
-          </a:p>
-        </p:txBody>
-      </p:sp>
-    </p:spTree>
-    <p:extLst>
-      <p:ext uri="{BB962C8B-B14F-4D97-AF65-F5344CB8AC3E}">
-        <p14:creationId xmlns:p14="http://schemas.microsoft.com/office/powerpoint/2010/main" val="2790627162"/>
       </p:ext>
     </p:extLst>
   </p:cSld>
@@ -7257,6 +7281,118 @@
     <p:extLst>
       <p:ext uri="{BB962C8B-B14F-4D97-AF65-F5344CB8AC3E}">
         <p14:creationId xmlns:p14="http://schemas.microsoft.com/office/powerpoint/2010/main" val="743172911"/>
+      </p:ext>
+    </p:extLst>
+  </p:cSld>
+  <p:clrMapOvr>
+    <a:masterClrMapping/>
+  </p:clrMapOvr>
+</p:sld>
+</file>
+
+<file path=ppt/slides/slide20.xml><?xml version="1.0" encoding="utf-8"?>
+<p:sld xmlns:a="http://schemas.openxmlformats.org/drawingml/2006/main" xmlns:r="http://schemas.openxmlformats.org/officeDocument/2006/relationships" xmlns:p="http://schemas.openxmlformats.org/presentationml/2006/main">
+  <p:cSld>
+    <p:spTree>
+      <p:nvGrpSpPr>
+        <p:cNvPr id="1" name=""/>
+        <p:cNvGrpSpPr/>
+        <p:nvPr/>
+      </p:nvGrpSpPr>
+      <p:grpSpPr>
+        <a:xfrm>
+          <a:off x="0" y="0"/>
+          <a:ext cx="0" cy="0"/>
+          <a:chOff x="0" y="0"/>
+          <a:chExt cx="0" cy="0"/>
+        </a:xfrm>
+      </p:grpSpPr>
+      <p:sp>
+        <p:nvSpPr>
+          <p:cNvPr id="2" name="Title 6">
+            <a:extLst>
+              <a:ext uri="{FF2B5EF4-FFF2-40B4-BE49-F238E27FC236}">
+                <a16:creationId xmlns:a16="http://schemas.microsoft.com/office/drawing/2014/main" id="{5945A2BB-ABB6-48FB-A491-502474D93E34}"/>
+              </a:ext>
+            </a:extLst>
+          </p:cNvPr>
+          <p:cNvSpPr txBox="1">
+            <a:spLocks/>
+          </p:cNvSpPr>
+          <p:nvPr/>
+        </p:nvSpPr>
+        <p:spPr>
+          <a:xfrm>
+            <a:off x="5605763" y="2869457"/>
+            <a:ext cx="5422456" cy="971304"/>
+          </a:xfrm>
+          <a:prstGeom prst="rect">
+            <a:avLst/>
+          </a:prstGeom>
+        </p:spPr>
+        <p:txBody>
+          <a:bodyPr/>
+          <a:lstStyle>
+            <a:lvl1pPr algn="l" defTabSz="914400" rtl="0" eaLnBrk="1" latinLnBrk="0" hangingPunct="1">
+              <a:lnSpc>
+                <a:spcPct val="90000"/>
+              </a:lnSpc>
+              <a:spcBef>
+                <a:spcPct val="0"/>
+              </a:spcBef>
+              <a:buNone/>
+              <a:defRPr sz="7200" b="1" kern="1200">
+                <a:solidFill>
+                  <a:srgbClr val="C00000"/>
+                </a:solidFill>
+                <a:latin typeface="Lato" panose="020F0502020204030203" pitchFamily="34" charset="0"/>
+                <a:ea typeface="Lato" panose="020F0502020204030203" pitchFamily="34" charset="0"/>
+                <a:cs typeface="Lato" panose="020F0502020204030203" pitchFamily="34" charset="0"/>
+              </a:defRPr>
+            </a:lvl1pPr>
+          </a:lstStyle>
+          <a:p>
+            <a:r>
+              <a:rPr lang="en-US" sz="6000"/>
+              <a:t>THANK YOU !</a:t>
+            </a:r>
+          </a:p>
+        </p:txBody>
+      </p:sp>
+      <p:sp>
+        <p:nvSpPr>
+          <p:cNvPr id="3" name="Slide Number Placeholder 2">
+            <a:extLst>
+              <a:ext uri="{FF2B5EF4-FFF2-40B4-BE49-F238E27FC236}">
+                <a16:creationId xmlns:a16="http://schemas.microsoft.com/office/drawing/2014/main" id="{B255FE58-BA70-418C-863F-55066B6675FB}"/>
+              </a:ext>
+            </a:extLst>
+          </p:cNvPr>
+          <p:cNvSpPr>
+            <a:spLocks noGrp="1"/>
+          </p:cNvSpPr>
+          <p:nvPr>
+            <p:ph type="sldNum" sz="quarter" idx="12"/>
+          </p:nvPr>
+        </p:nvSpPr>
+        <p:spPr/>
+        <p:txBody>
+          <a:bodyPr/>
+          <a:lstStyle/>
+          <a:p>
+            <a:fld id="{9EA0BE3B-158A-4EDF-80DC-E394A0D1600F}" type="slidenum">
+              <a:rPr lang="en-US" smtClean="0"/>
+              <a:pPr/>
+              <a:t>20</a:t>
+            </a:fld>
+            <a:endParaRPr lang="en-US"/>
+          </a:p>
+        </p:txBody>
+      </p:sp>
+    </p:spTree>
+    <p:extLst>
+      <p:ext uri="{BB962C8B-B14F-4D97-AF65-F5344CB8AC3E}">
+        <p14:creationId xmlns:p14="http://schemas.microsoft.com/office/powerpoint/2010/main" val="2790627162"/>
       </p:ext>
     </p:extLst>
   </p:cSld>
@@ -7671,31 +7807,6 @@
             <a:br>
               <a:rPr lang="vi-VN"/>
             </a:br>
-            <a:endParaRPr lang="en-US"/>
-          </a:p>
-        </p:txBody>
-      </p:sp>
-      <p:sp>
-        <p:nvSpPr>
-          <p:cNvPr id="3" name="Text Placeholder 2">
-            <a:extLst>
-              <a:ext uri="{FF2B5EF4-FFF2-40B4-BE49-F238E27FC236}">
-                <a16:creationId xmlns:a16="http://schemas.microsoft.com/office/drawing/2014/main" id="{A5726603-7893-4AE0-9532-68058044B69D}"/>
-              </a:ext>
-            </a:extLst>
-          </p:cNvPr>
-          <p:cNvSpPr>
-            <a:spLocks noGrp="1"/>
-          </p:cNvSpPr>
-          <p:nvPr>
-            <p:ph type="body" sz="quarter" idx="13"/>
-          </p:nvPr>
-        </p:nvSpPr>
-        <p:spPr/>
-        <p:txBody>
-          <a:bodyPr/>
-          <a:lstStyle/>
-          <a:p>
             <a:endParaRPr lang="en-US"/>
           </a:p>
         </p:txBody>
